--- a/docs/pptx/whole/jx-linsubhr-sens-anyhosp.pptx
+++ b/docs/pptx/whole/jx-linsubhr-sens-anyhosp.pptx
@@ -5339,7 +5339,7 @@
           <p:spPr>
             <a:xfrm>
               <a:off x="817517" y="1896563"/>
-              <a:ext cx="6169365" cy="82021"/>
+              <a:ext cx="6833128" cy="82021"/>
             </a:xfrm>
             <a:prstGeom prst="rect">
               <a:avLst/>
@@ -5371,7 +5371,7 @@
                   <a:latin typeface="Helvetica"/>
                   <a:cs typeface="Helvetica"/>
                 </a:rPr>
-                <a:t>subHR per 0.1 ratio decline: 1.08 (1.01-1.17), p = 0.031  |  per IQR decline (Δ = 0.27): 1.25 (1.02-1.53)  |  IQR: [0.71, 0.98]</a:t>
+                <a:t>subHR per 0.1 ratio decline: 1.08 (1.01-1.17), p_Bonf = 0.187 (n = 6)  |  per IQR decline (Δ = 0.27): 1.25 (1.02-1.53)  |  IQR: [0.71, 0.98]</a:t>
               </a:r>
             </a:p>
           </p:txBody>

--- a/docs/pptx/whole/jx-linsubhr-sens-anyhosp.pptx
+++ b/docs/pptx/whole/jx-linsubhr-sens-anyhosp.pptx
@@ -5062,8 +5062,8 @@
           </p:nvSpPr>
           <p:spPr>
             <a:xfrm>
-              <a:off x="1980137" y="5785772"/>
-              <a:ext cx="155356" cy="80101"/>
+              <a:off x="1977028" y="5785772"/>
+              <a:ext cx="161574" cy="80101"/>
             </a:xfrm>
             <a:prstGeom prst="rect">
               <a:avLst/>
@@ -5095,7 +5095,7 @@
                   <a:latin typeface="Helvetica"/>
                   <a:cs typeface="Helvetica"/>
                 </a:rPr>
-                <a:t>0.6</a:t>
+                <a:t>-40</a:t>
               </a:r>
             </a:p>
           </p:txBody>
@@ -5108,8 +5108,8 @@
           </p:nvSpPr>
           <p:spPr>
             <a:xfrm>
-              <a:off x="3731922" y="5785772"/>
-              <a:ext cx="155356" cy="80101"/>
+              <a:off x="3728813" y="5785772"/>
+              <a:ext cx="161574" cy="80101"/>
             </a:xfrm>
             <a:prstGeom prst="rect">
               <a:avLst/>
@@ -5141,7 +5141,7 @@
                   <a:latin typeface="Helvetica"/>
                   <a:cs typeface="Helvetica"/>
                 </a:rPr>
-                <a:t>0.8</a:t>
+                <a:t>-20</a:t>
               </a:r>
             </a:p>
           </p:txBody>
@@ -5154,8 +5154,8 @@
           </p:nvSpPr>
           <p:spPr>
             <a:xfrm>
-              <a:off x="5483707" y="5785772"/>
-              <a:ext cx="155356" cy="80101"/>
+              <a:off x="5530296" y="5785772"/>
+              <a:ext cx="62179" cy="80101"/>
             </a:xfrm>
             <a:prstGeom prst="rect">
               <a:avLst/>
@@ -5187,7 +5187,7 @@
                   <a:latin typeface="Helvetica"/>
                   <a:cs typeface="Helvetica"/>
                 </a:rPr>
-                <a:t>1.0</a:t>
+                <a:t>0</a:t>
               </a:r>
             </a:p>
           </p:txBody>
@@ -5200,8 +5200,8 @@
           </p:nvSpPr>
           <p:spPr>
             <a:xfrm>
-              <a:off x="7235493" y="5785772"/>
-              <a:ext cx="155356" cy="80101"/>
+              <a:off x="7250992" y="5785772"/>
+              <a:ext cx="124358" cy="80101"/>
             </a:xfrm>
             <a:prstGeom prst="rect">
               <a:avLst/>
@@ -5233,7 +5233,7 @@
                   <a:latin typeface="Helvetica"/>
                   <a:cs typeface="Helvetica"/>
                 </a:rPr>
-                <a:t>1.2</a:t>
+                <a:t>20</a:t>
               </a:r>
             </a:p>
           </p:txBody>
@@ -5246,8 +5246,8 @@
           </p:nvSpPr>
           <p:spPr>
             <a:xfrm>
-              <a:off x="2691419" y="5925448"/>
-              <a:ext cx="4051889" cy="100218"/>
+              <a:off x="1561815" y="5925448"/>
+              <a:ext cx="6311097" cy="100218"/>
             </a:xfrm>
             <a:prstGeom prst="rect">
               <a:avLst/>
@@ -5279,7 +5279,7 @@
                   <a:latin typeface="Helvetica"/>
                   <a:cs typeface="Helvetica"/>
                 </a:rPr>
-                <a:t>Sensitivity eGFR Ratio (CKD-EPI 2012 CysC / CKD-EPI 2021 Cr)</a:t>
+                <a:t>Sensitivity eGFR Difference (%): 100 × (CKD-EPI 2012 CysC − CKD-EPI 2021 Cr) / CKD-EPI 2021 Cr</a:t>
               </a:r>
             </a:p>
           </p:txBody>
@@ -5339,7 +5339,7 @@
           <p:spPr>
             <a:xfrm>
               <a:off x="817517" y="1896563"/>
-              <a:ext cx="6833128" cy="82021"/>
+              <a:ext cx="6959864" cy="82021"/>
             </a:xfrm>
             <a:prstGeom prst="rect">
               <a:avLst/>
@@ -5371,7 +5371,7 @@
                   <a:latin typeface="Helvetica"/>
                   <a:cs typeface="Helvetica"/>
                 </a:rPr>
-                <a:t>subHR per 0.1 ratio decline: 1.08 (1.01-1.17), p_Bonf = 0.187 (n = 6)  |  per IQR decline (Δ = 0.27): 1.25 (1.02-1.53)  |  IQR: [0.71, 0.98]</a:t>
+                <a:t>subHR per 10 % decline: 1.08 (1.01-1.17), p_Bonf = 0.187 (n = 6)  |  per IQR decline (Δ = 27.5 %): 1.25 (1.02-1.53)  |  IQR: [-29.1, -1.6] %</a:t>
               </a:r>
             </a:p>
           </p:txBody>

--- a/docs/pptx/whole/jx-linsubhr-sens-anyhosp.pptx
+++ b/docs/pptx/whole/jx-linsubhr-sens-anyhosp.pptx
@@ -2265,34 +2265,26 @@
         </p:sp>
         <p:sp>
           <p:nvSpPr>
-            <p:cNvPr id="4" name="pl4"/>
+            <p:cNvPr id="4" name="rc4"/>
             <p:cNvSpPr/>
             <p:nvPr/>
           </p:nvSpPr>
           <p:spPr>
             <a:xfrm>
-              <a:off x="817517" y="5142518"/>
-              <a:ext cx="7799693" cy="0"/>
+              <a:off x="457200" y="1600200"/>
+              <a:ext cx="8229600" cy="4525962"/>
             </a:xfrm>
-            <a:custGeom>
+            <a:prstGeom prst="rect">
               <a:avLst/>
-              <a:pathLst>
-                <a:path w="7799693" h="0">
-                  <a:moveTo>
-                    <a:pt x="0" y="0"/>
-                  </a:moveTo>
-                  <a:lnTo>
-                    <a:pt x="7799693" y="0"/>
-                  </a:lnTo>
-                  <a:lnTo>
-                    <a:pt x="7799693" y="0"/>
-                  </a:lnTo>
-                </a:path>
-              </a:pathLst>
-            </a:custGeom>
-            <a:ln w="6775" cap="flat">
+            </a:prstGeom>
+            <a:solidFill>
+              <a:srgbClr val="FFFFFF">
+                <a:alpha val="100000"/>
+              </a:srgbClr>
+            </a:solidFill>
+            <a:ln w="13550" cap="rnd">
               <a:solidFill>
-                <a:srgbClr val="EBEBEB">
+                <a:srgbClr val="FFFFFF">
                   <a:alpha val="100000"/>
                 </a:srgbClr>
               </a:solidFill>
@@ -2314,21 +2306,21 @@
           </p:nvSpPr>
           <p:spPr>
             <a:xfrm>
-              <a:off x="817517" y="4313054"/>
-              <a:ext cx="7799693" cy="0"/>
+              <a:off x="887106" y="3250627"/>
+              <a:ext cx="7660515" cy="0"/>
             </a:xfrm>
             <a:custGeom>
               <a:avLst/>
               <a:pathLst>
-                <a:path w="7799693" h="0">
+                <a:path w="7660515" h="0">
                   <a:moveTo>
                     <a:pt x="0" y="0"/>
                   </a:moveTo>
                   <a:lnTo>
-                    <a:pt x="7799693" y="0"/>
-                  </a:lnTo>
-                  <a:lnTo>
-                    <a:pt x="7799693" y="0"/>
+                    <a:pt x="7660515" y="0"/>
+                  </a:lnTo>
+                  <a:lnTo>
+                    <a:pt x="7660515" y="0"/>
                   </a:lnTo>
                 </a:path>
               </a:pathLst>
@@ -2357,21 +2349,21 @@
           </p:nvSpPr>
           <p:spPr>
             <a:xfrm>
-              <a:off x="817517" y="3483591"/>
-              <a:ext cx="7799693" cy="0"/>
+              <a:off x="887106" y="2951293"/>
+              <a:ext cx="7660515" cy="0"/>
             </a:xfrm>
             <a:custGeom>
               <a:avLst/>
               <a:pathLst>
-                <a:path w="7799693" h="0">
+                <a:path w="7660515" h="0">
                   <a:moveTo>
                     <a:pt x="0" y="0"/>
                   </a:moveTo>
                   <a:lnTo>
-                    <a:pt x="7799693" y="0"/>
-                  </a:lnTo>
-                  <a:lnTo>
-                    <a:pt x="7799693" y="0"/>
+                    <a:pt x="7660515" y="0"/>
+                  </a:lnTo>
+                  <a:lnTo>
+                    <a:pt x="7660515" y="0"/>
                   </a:lnTo>
                 </a:path>
               </a:pathLst>
@@ -2400,21 +2392,21 @@
           </p:nvSpPr>
           <p:spPr>
             <a:xfrm>
-              <a:off x="817517" y="2654127"/>
-              <a:ext cx="7799693" cy="0"/>
+              <a:off x="887106" y="2651959"/>
+              <a:ext cx="7660515" cy="0"/>
             </a:xfrm>
             <a:custGeom>
               <a:avLst/>
               <a:pathLst>
-                <a:path w="7799693" h="0">
+                <a:path w="7660515" h="0">
                   <a:moveTo>
                     <a:pt x="0" y="0"/>
                   </a:moveTo>
                   <a:lnTo>
-                    <a:pt x="7799693" y="0"/>
-                  </a:lnTo>
-                  <a:lnTo>
-                    <a:pt x="7799693" y="0"/>
+                    <a:pt x="7660515" y="0"/>
+                  </a:lnTo>
+                  <a:lnTo>
+                    <a:pt x="7660515" y="0"/>
                   </a:lnTo>
                 </a:path>
               </a:pathLst>
@@ -2443,21 +2435,21 @@
           </p:nvSpPr>
           <p:spPr>
             <a:xfrm>
-              <a:off x="1181923" y="2073503"/>
-              <a:ext cx="0" cy="3649639"/>
+              <a:off x="887106" y="2352625"/>
+              <a:ext cx="7660515" cy="0"/>
             </a:xfrm>
             <a:custGeom>
               <a:avLst/>
               <a:pathLst>
-                <a:path w="0" h="3649639">
+                <a:path w="7660515" h="0">
                   <a:moveTo>
-                    <a:pt x="0" y="3649639"/>
+                    <a:pt x="0" y="0"/>
                   </a:moveTo>
                   <a:lnTo>
-                    <a:pt x="0" y="0"/>
-                  </a:lnTo>
-                  <a:lnTo>
-                    <a:pt x="0" y="0"/>
+                    <a:pt x="7660515" y="0"/>
+                  </a:lnTo>
+                  <a:lnTo>
+                    <a:pt x="7660515" y="0"/>
                   </a:lnTo>
                 </a:path>
               </a:pathLst>
@@ -2486,15 +2478,15 @@
           </p:nvSpPr>
           <p:spPr>
             <a:xfrm>
-              <a:off x="2933708" y="2073503"/>
-              <a:ext cx="0" cy="3649639"/>
+              <a:off x="1245010" y="2143092"/>
+              <a:ext cx="0" cy="1317069"/>
             </a:xfrm>
             <a:custGeom>
               <a:avLst/>
               <a:pathLst>
-                <a:path w="0" h="3649639">
+                <a:path w="0" h="1317069">
                   <a:moveTo>
-                    <a:pt x="0" y="3649639"/>
+                    <a:pt x="0" y="1317069"/>
                   </a:moveTo>
                   <a:lnTo>
                     <a:pt x="0" y="0"/>
@@ -2529,15 +2521,15 @@
           </p:nvSpPr>
           <p:spPr>
             <a:xfrm>
-              <a:off x="4685493" y="2073503"/>
-              <a:ext cx="0" cy="3649639"/>
+              <a:off x="2965536" y="2143092"/>
+              <a:ext cx="0" cy="1317069"/>
             </a:xfrm>
             <a:custGeom>
               <a:avLst/>
               <a:pathLst>
-                <a:path w="0" h="3649639">
+                <a:path w="0" h="1317069">
                   <a:moveTo>
-                    <a:pt x="0" y="3649639"/>
+                    <a:pt x="0" y="1317069"/>
                   </a:moveTo>
                   <a:lnTo>
                     <a:pt x="0" y="0"/>
@@ -2572,15 +2564,15 @@
           </p:nvSpPr>
           <p:spPr>
             <a:xfrm>
-              <a:off x="6437278" y="2073503"/>
-              <a:ext cx="0" cy="3649639"/>
+              <a:off x="4686062" y="2143092"/>
+              <a:ext cx="0" cy="1317069"/>
             </a:xfrm>
             <a:custGeom>
               <a:avLst/>
               <a:pathLst>
-                <a:path w="0" h="3649639">
+                <a:path w="0" h="1317069">
                   <a:moveTo>
-                    <a:pt x="0" y="3649639"/>
+                    <a:pt x="0" y="1317069"/>
                   </a:moveTo>
                   <a:lnTo>
                     <a:pt x="0" y="0"/>
@@ -2615,15 +2607,15 @@
           </p:nvSpPr>
           <p:spPr>
             <a:xfrm>
-              <a:off x="8189063" y="2073503"/>
-              <a:ext cx="0" cy="3649639"/>
+              <a:off x="6406588" y="2143092"/>
+              <a:ext cx="0" cy="1317069"/>
             </a:xfrm>
             <a:custGeom>
               <a:avLst/>
               <a:pathLst>
-                <a:path w="0" h="3649639">
+                <a:path w="0" h="1317069">
                   <a:moveTo>
-                    <a:pt x="0" y="3649639"/>
+                    <a:pt x="0" y="1317069"/>
                   </a:moveTo>
                   <a:lnTo>
                     <a:pt x="0" y="0"/>
@@ -2658,26 +2650,26 @@
           </p:nvSpPr>
           <p:spPr>
             <a:xfrm>
-              <a:off x="817517" y="5557249"/>
-              <a:ext cx="7799693" cy="0"/>
+              <a:off x="8127114" y="2143092"/>
+              <a:ext cx="0" cy="1317069"/>
             </a:xfrm>
             <a:custGeom>
               <a:avLst/>
               <a:pathLst>
-                <a:path w="7799693" h="0">
+                <a:path w="0" h="1317069">
                   <a:moveTo>
+                    <a:pt x="0" y="1317069"/>
+                  </a:moveTo>
+                  <a:lnTo>
                     <a:pt x="0" y="0"/>
-                  </a:moveTo>
-                  <a:lnTo>
-                    <a:pt x="7799693" y="0"/>
-                  </a:lnTo>
-                  <a:lnTo>
-                    <a:pt x="7799693" y="0"/>
+                  </a:lnTo>
+                  <a:lnTo>
+                    <a:pt x="0" y="0"/>
                   </a:lnTo>
                 </a:path>
               </a:pathLst>
             </a:custGeom>
-            <a:ln w="13550" cap="flat">
+            <a:ln w="6775" cap="flat">
               <a:solidFill>
                 <a:srgbClr val="EBEBEB">
                   <a:alpha val="100000"/>
@@ -2701,21 +2693,21 @@
           </p:nvSpPr>
           <p:spPr>
             <a:xfrm>
-              <a:off x="817517" y="4727786"/>
-              <a:ext cx="7799693" cy="0"/>
+              <a:off x="887106" y="3400294"/>
+              <a:ext cx="7660515" cy="0"/>
             </a:xfrm>
             <a:custGeom>
               <a:avLst/>
               <a:pathLst>
-                <a:path w="7799693" h="0">
+                <a:path w="7660515" h="0">
                   <a:moveTo>
                     <a:pt x="0" y="0"/>
                   </a:moveTo>
                   <a:lnTo>
-                    <a:pt x="7799693" y="0"/>
-                  </a:lnTo>
-                  <a:lnTo>
-                    <a:pt x="7799693" y="0"/>
+                    <a:pt x="7660515" y="0"/>
+                  </a:lnTo>
+                  <a:lnTo>
+                    <a:pt x="7660515" y="0"/>
                   </a:lnTo>
                 </a:path>
               </a:pathLst>
@@ -2744,21 +2736,21 @@
           </p:nvSpPr>
           <p:spPr>
             <a:xfrm>
-              <a:off x="817517" y="3898322"/>
-              <a:ext cx="7799693" cy="0"/>
+              <a:off x="887106" y="3100960"/>
+              <a:ext cx="7660515" cy="0"/>
             </a:xfrm>
             <a:custGeom>
               <a:avLst/>
               <a:pathLst>
-                <a:path w="7799693" h="0">
+                <a:path w="7660515" h="0">
                   <a:moveTo>
                     <a:pt x="0" y="0"/>
                   </a:moveTo>
                   <a:lnTo>
-                    <a:pt x="7799693" y="0"/>
-                  </a:lnTo>
-                  <a:lnTo>
-                    <a:pt x="7799693" y="0"/>
+                    <a:pt x="7660515" y="0"/>
+                  </a:lnTo>
+                  <a:lnTo>
+                    <a:pt x="7660515" y="0"/>
                   </a:lnTo>
                 </a:path>
               </a:pathLst>
@@ -2787,21 +2779,21 @@
           </p:nvSpPr>
           <p:spPr>
             <a:xfrm>
-              <a:off x="817517" y="3068859"/>
-              <a:ext cx="7799693" cy="0"/>
+              <a:off x="887106" y="2801626"/>
+              <a:ext cx="7660515" cy="0"/>
             </a:xfrm>
             <a:custGeom>
               <a:avLst/>
               <a:pathLst>
-                <a:path w="7799693" h="0">
+                <a:path w="7660515" h="0">
                   <a:moveTo>
                     <a:pt x="0" y="0"/>
                   </a:moveTo>
                   <a:lnTo>
-                    <a:pt x="7799693" y="0"/>
-                  </a:lnTo>
-                  <a:lnTo>
-                    <a:pt x="7799693" y="0"/>
+                    <a:pt x="7660515" y="0"/>
+                  </a:lnTo>
+                  <a:lnTo>
+                    <a:pt x="7660515" y="0"/>
                   </a:lnTo>
                 </a:path>
               </a:pathLst>
@@ -2830,21 +2822,21 @@
           </p:nvSpPr>
           <p:spPr>
             <a:xfrm>
-              <a:off x="817517" y="2239395"/>
-              <a:ext cx="7799693" cy="0"/>
+              <a:off x="887106" y="2502292"/>
+              <a:ext cx="7660515" cy="0"/>
             </a:xfrm>
             <a:custGeom>
               <a:avLst/>
               <a:pathLst>
-                <a:path w="7799693" h="0">
+                <a:path w="7660515" h="0">
                   <a:moveTo>
                     <a:pt x="0" y="0"/>
                   </a:moveTo>
                   <a:lnTo>
-                    <a:pt x="7799693" y="0"/>
-                  </a:lnTo>
-                  <a:lnTo>
-                    <a:pt x="7799693" y="0"/>
+                    <a:pt x="7660515" y="0"/>
+                  </a:lnTo>
+                  <a:lnTo>
+                    <a:pt x="7660515" y="0"/>
                   </a:lnTo>
                 </a:path>
               </a:pathLst>
@@ -2873,21 +2865,21 @@
           </p:nvSpPr>
           <p:spPr>
             <a:xfrm>
-              <a:off x="2057816" y="2073503"/>
-              <a:ext cx="0" cy="3649639"/>
+              <a:off x="887106" y="2202958"/>
+              <a:ext cx="7660515" cy="0"/>
             </a:xfrm>
             <a:custGeom>
               <a:avLst/>
               <a:pathLst>
-                <a:path w="0" h="3649639">
+                <a:path w="7660515" h="0">
                   <a:moveTo>
-                    <a:pt x="0" y="3649639"/>
+                    <a:pt x="0" y="0"/>
                   </a:moveTo>
                   <a:lnTo>
-                    <a:pt x="0" y="0"/>
-                  </a:lnTo>
-                  <a:lnTo>
-                    <a:pt x="0" y="0"/>
+                    <a:pt x="7660515" y="0"/>
+                  </a:lnTo>
+                  <a:lnTo>
+                    <a:pt x="7660515" y="0"/>
                   </a:lnTo>
                 </a:path>
               </a:pathLst>
@@ -2916,15 +2908,15 @@
           </p:nvSpPr>
           <p:spPr>
             <a:xfrm>
-              <a:off x="3809601" y="2073503"/>
-              <a:ext cx="0" cy="3649639"/>
+              <a:off x="2105273" y="2143092"/>
+              <a:ext cx="0" cy="1317069"/>
             </a:xfrm>
             <a:custGeom>
               <a:avLst/>
               <a:pathLst>
-                <a:path w="0" h="3649639">
+                <a:path w="0" h="1317069">
                   <a:moveTo>
-                    <a:pt x="0" y="3649639"/>
+                    <a:pt x="0" y="1317069"/>
                   </a:moveTo>
                   <a:lnTo>
                     <a:pt x="0" y="0"/>
@@ -2959,15 +2951,15 @@
           </p:nvSpPr>
           <p:spPr>
             <a:xfrm>
-              <a:off x="5561386" y="2073503"/>
-              <a:ext cx="0" cy="3649639"/>
+              <a:off x="3825799" y="2143092"/>
+              <a:ext cx="0" cy="1317069"/>
             </a:xfrm>
             <a:custGeom>
               <a:avLst/>
               <a:pathLst>
-                <a:path w="0" h="3649639">
+                <a:path w="0" h="1317069">
                   <a:moveTo>
-                    <a:pt x="0" y="3649639"/>
+                    <a:pt x="0" y="1317069"/>
                   </a:moveTo>
                   <a:lnTo>
                     <a:pt x="0" y="0"/>
@@ -3002,15 +2994,15 @@
           </p:nvSpPr>
           <p:spPr>
             <a:xfrm>
-              <a:off x="7313171" y="2073503"/>
-              <a:ext cx="0" cy="3649639"/>
+              <a:off x="5546325" y="2143092"/>
+              <a:ext cx="0" cy="1317069"/>
             </a:xfrm>
             <a:custGeom>
               <a:avLst/>
               <a:pathLst>
-                <a:path w="0" h="3649639">
+                <a:path w="0" h="1317069">
                   <a:moveTo>
-                    <a:pt x="0" y="3649639"/>
+                    <a:pt x="0" y="1317069"/>
                   </a:moveTo>
                   <a:lnTo>
                     <a:pt x="0" y="0"/>
@@ -3039,618 +3031,661 @@
         </p:sp>
         <p:sp>
           <p:nvSpPr>
-            <p:cNvPr id="22" name="pg22"/>
+            <p:cNvPr id="22" name="pl22"/>
             <p:cNvSpPr/>
             <p:nvPr/>
           </p:nvSpPr>
           <p:spPr>
             <a:xfrm>
-              <a:off x="1172049" y="4139915"/>
-              <a:ext cx="7090630" cy="1012120"/>
+              <a:off x="7266851" y="2143092"/>
+              <a:ext cx="0" cy="1317069"/>
             </a:xfrm>
             <a:custGeom>
               <a:avLst/>
               <a:pathLst>
-                <a:path w="7090630" h="1012120">
+                <a:path w="0" h="1317069">
+                  <a:moveTo>
+                    <a:pt x="0" y="1317069"/>
+                  </a:moveTo>
+                  <a:lnTo>
+                    <a:pt x="0" y="0"/>
+                  </a:lnTo>
+                  <a:lnTo>
+                    <a:pt x="0" y="0"/>
+                  </a:lnTo>
+                </a:path>
+              </a:pathLst>
+            </a:custGeom>
+            <a:ln w="13550" cap="flat">
+              <a:solidFill>
+                <a:srgbClr val="EBEBEB">
+                  <a:alpha val="100000"/>
+                </a:srgbClr>
+              </a:solidFill>
+              <a:prstDash val="solid"/>
+              <a:round/>
+            </a:ln>
+          </p:spPr>
+          <p:txBody>
+            <a:bodyPr/>
+            <a:lstStyle/>
+            <a:p/>
+          </p:txBody>
+        </p:sp>
+        <p:sp>
+          <p:nvSpPr>
+            <p:cNvPr id="23" name="pg23"/>
+            <p:cNvSpPr/>
+            <p:nvPr/>
+          </p:nvSpPr>
+          <p:spPr>
+            <a:xfrm>
+              <a:off x="1235312" y="2888811"/>
+              <a:ext cx="6964104" cy="365250"/>
+            </a:xfrm>
+            <a:custGeom>
+              <a:avLst/>
+              <a:pathLst>
+                <a:path w="6964104" h="365250">
                   <a:moveTo>
                     <a:pt x="0" y="0"/>
                   </a:moveTo>
                   <a:lnTo>
-                    <a:pt x="71622" y="17813"/>
-                  </a:lnTo>
-                  <a:lnTo>
-                    <a:pt x="143245" y="35402"/>
-                  </a:lnTo>
-                  <a:lnTo>
-                    <a:pt x="214867" y="52770"/>
-                  </a:lnTo>
-                  <a:lnTo>
-                    <a:pt x="286490" y="69920"/>
-                  </a:lnTo>
-                  <a:lnTo>
-                    <a:pt x="358112" y="86854"/>
-                  </a:lnTo>
-                  <a:lnTo>
-                    <a:pt x="429735" y="103576"/>
-                  </a:lnTo>
-                  <a:lnTo>
-                    <a:pt x="501357" y="120087"/>
-                  </a:lnTo>
-                  <a:lnTo>
-                    <a:pt x="572980" y="136391"/>
-                  </a:lnTo>
-                  <a:lnTo>
-                    <a:pt x="644602" y="152490"/>
-                  </a:lnTo>
-                  <a:lnTo>
-                    <a:pt x="716225" y="168386"/>
-                  </a:lnTo>
-                  <a:lnTo>
-                    <a:pt x="787847" y="184083"/>
-                  </a:lnTo>
-                  <a:lnTo>
-                    <a:pt x="859470" y="199582"/>
-                  </a:lnTo>
-                  <a:lnTo>
-                    <a:pt x="931092" y="214887"/>
-                  </a:lnTo>
-                  <a:lnTo>
-                    <a:pt x="1002715" y="229999"/>
-                  </a:lnTo>
-                  <a:lnTo>
-                    <a:pt x="1074337" y="244922"/>
-                  </a:lnTo>
-                  <a:lnTo>
-                    <a:pt x="1145960" y="259657"/>
-                  </a:lnTo>
-                  <a:lnTo>
-                    <a:pt x="1217582" y="274206"/>
-                  </a:lnTo>
-                  <a:lnTo>
-                    <a:pt x="1289205" y="288573"/>
-                  </a:lnTo>
-                  <a:lnTo>
-                    <a:pt x="1360827" y="302760"/>
-                  </a:lnTo>
-                  <a:lnTo>
-                    <a:pt x="1432450" y="316768"/>
-                  </a:lnTo>
-                  <a:lnTo>
-                    <a:pt x="1504073" y="330599"/>
-                  </a:lnTo>
-                  <a:lnTo>
-                    <a:pt x="1575695" y="344258"/>
-                  </a:lnTo>
-                  <a:lnTo>
-                    <a:pt x="1647318" y="357744"/>
-                  </a:lnTo>
-                  <a:lnTo>
-                    <a:pt x="1718940" y="371061"/>
-                  </a:lnTo>
-                  <a:lnTo>
-                    <a:pt x="1790563" y="384210"/>
-                  </a:lnTo>
-                  <a:lnTo>
-                    <a:pt x="1862185" y="397195"/>
-                  </a:lnTo>
-                  <a:lnTo>
-                    <a:pt x="1933808" y="410016"/>
-                  </a:lnTo>
-                  <a:lnTo>
-                    <a:pt x="2005430" y="422676"/>
-                  </a:lnTo>
-                  <a:lnTo>
-                    <a:pt x="2077053" y="435177"/>
-                  </a:lnTo>
-                  <a:lnTo>
-                    <a:pt x="2148675" y="447520"/>
-                  </a:lnTo>
-                  <a:lnTo>
-                    <a:pt x="2220298" y="459709"/>
-                  </a:lnTo>
-                  <a:lnTo>
-                    <a:pt x="2291920" y="471745"/>
-                  </a:lnTo>
-                  <a:lnTo>
-                    <a:pt x="2363543" y="483629"/>
-                  </a:lnTo>
-                  <a:lnTo>
-                    <a:pt x="2435165" y="495363"/>
-                  </a:lnTo>
-                  <a:lnTo>
-                    <a:pt x="2506788" y="506951"/>
-                  </a:lnTo>
-                  <a:lnTo>
-                    <a:pt x="2578410" y="518393"/>
-                  </a:lnTo>
-                  <a:lnTo>
-                    <a:pt x="2650033" y="529690"/>
-                  </a:lnTo>
-                  <a:lnTo>
-                    <a:pt x="2721655" y="540846"/>
-                  </a:lnTo>
-                  <a:lnTo>
-                    <a:pt x="2793278" y="551862"/>
-                  </a:lnTo>
-                  <a:lnTo>
-                    <a:pt x="2864901" y="562739"/>
-                  </a:lnTo>
-                  <a:lnTo>
-                    <a:pt x="2936523" y="573480"/>
-                  </a:lnTo>
-                  <a:lnTo>
-                    <a:pt x="3008146" y="584085"/>
-                  </a:lnTo>
-                  <a:lnTo>
-                    <a:pt x="3079768" y="588188"/>
-                  </a:lnTo>
-                  <a:lnTo>
-                    <a:pt x="3151391" y="588684"/>
-                  </a:lnTo>
-                  <a:lnTo>
-                    <a:pt x="3223013" y="589179"/>
-                  </a:lnTo>
-                  <a:lnTo>
-                    <a:pt x="3294636" y="589675"/>
-                  </a:lnTo>
-                  <a:lnTo>
-                    <a:pt x="3366258" y="590170"/>
-                  </a:lnTo>
-                  <a:lnTo>
-                    <a:pt x="3437881" y="590664"/>
-                  </a:lnTo>
-                  <a:lnTo>
-                    <a:pt x="3509503" y="591159"/>
-                  </a:lnTo>
-                  <a:lnTo>
-                    <a:pt x="3581126" y="591653"/>
-                  </a:lnTo>
-                  <a:lnTo>
-                    <a:pt x="3652748" y="592147"/>
-                  </a:lnTo>
-                  <a:lnTo>
-                    <a:pt x="3724371" y="592641"/>
-                  </a:lnTo>
-                  <a:lnTo>
-                    <a:pt x="3795993" y="593134"/>
-                  </a:lnTo>
-                  <a:lnTo>
-                    <a:pt x="3867616" y="593627"/>
-                  </a:lnTo>
-                  <a:lnTo>
-                    <a:pt x="3939238" y="594120"/>
-                  </a:lnTo>
-                  <a:lnTo>
-                    <a:pt x="4010861" y="594612"/>
-                  </a:lnTo>
-                  <a:lnTo>
-                    <a:pt x="4082483" y="595104"/>
-                  </a:lnTo>
-                  <a:lnTo>
-                    <a:pt x="4154106" y="595596"/>
-                  </a:lnTo>
-                  <a:lnTo>
-                    <a:pt x="4225729" y="596087"/>
-                  </a:lnTo>
-                  <a:lnTo>
-                    <a:pt x="4297351" y="596579"/>
-                  </a:lnTo>
-                  <a:lnTo>
-                    <a:pt x="4368974" y="597070"/>
-                  </a:lnTo>
-                  <a:lnTo>
-                    <a:pt x="4440596" y="597560"/>
-                  </a:lnTo>
-                  <a:lnTo>
-                    <a:pt x="4512219" y="598051"/>
-                  </a:lnTo>
-                  <a:lnTo>
-                    <a:pt x="4583841" y="598541"/>
-                  </a:lnTo>
-                  <a:lnTo>
-                    <a:pt x="4655464" y="599030"/>
-                  </a:lnTo>
-                  <a:lnTo>
-                    <a:pt x="4727086" y="599520"/>
-                  </a:lnTo>
-                  <a:lnTo>
-                    <a:pt x="4798709" y="600009"/>
-                  </a:lnTo>
-                  <a:lnTo>
-                    <a:pt x="4870331" y="600498"/>
-                  </a:lnTo>
-                  <a:lnTo>
-                    <a:pt x="4941954" y="600986"/>
-                  </a:lnTo>
-                  <a:lnTo>
-                    <a:pt x="5013576" y="601475"/>
-                  </a:lnTo>
-                  <a:lnTo>
-                    <a:pt x="5085199" y="601963"/>
-                  </a:lnTo>
-                  <a:lnTo>
-                    <a:pt x="5156821" y="602450"/>
-                  </a:lnTo>
-                  <a:lnTo>
-                    <a:pt x="5228444" y="602938"/>
-                  </a:lnTo>
-                  <a:lnTo>
-                    <a:pt x="5300066" y="603425"/>
-                  </a:lnTo>
-                  <a:lnTo>
-                    <a:pt x="5371689" y="603912"/>
-                  </a:lnTo>
-                  <a:lnTo>
-                    <a:pt x="5443311" y="604398"/>
-                  </a:lnTo>
-                  <a:lnTo>
-                    <a:pt x="5514934" y="604885"/>
-                  </a:lnTo>
-                  <a:lnTo>
-                    <a:pt x="5586557" y="605371"/>
-                  </a:lnTo>
-                  <a:lnTo>
-                    <a:pt x="5658179" y="605856"/>
-                  </a:lnTo>
-                  <a:lnTo>
-                    <a:pt x="5729802" y="606342"/>
-                  </a:lnTo>
-                  <a:lnTo>
-                    <a:pt x="5801424" y="606827"/>
-                  </a:lnTo>
-                  <a:lnTo>
-                    <a:pt x="5873047" y="607312"/>
-                  </a:lnTo>
-                  <a:lnTo>
-                    <a:pt x="5944669" y="607796"/>
-                  </a:lnTo>
-                  <a:lnTo>
-                    <a:pt x="6016292" y="608280"/>
-                  </a:lnTo>
-                  <a:lnTo>
-                    <a:pt x="6087914" y="608764"/>
-                  </a:lnTo>
-                  <a:lnTo>
-                    <a:pt x="6159537" y="609248"/>
-                  </a:lnTo>
-                  <a:lnTo>
-                    <a:pt x="6231159" y="609731"/>
-                  </a:lnTo>
-                  <a:lnTo>
-                    <a:pt x="6302782" y="610214"/>
-                  </a:lnTo>
-                  <a:lnTo>
-                    <a:pt x="6374404" y="610697"/>
-                  </a:lnTo>
-                  <a:lnTo>
-                    <a:pt x="6446027" y="611180"/>
-                  </a:lnTo>
-                  <a:lnTo>
-                    <a:pt x="6517649" y="611662"/>
-                  </a:lnTo>
-                  <a:lnTo>
-                    <a:pt x="6589272" y="612144"/>
-                  </a:lnTo>
-                  <a:lnTo>
-                    <a:pt x="6660894" y="612625"/>
-                  </a:lnTo>
-                  <a:lnTo>
-                    <a:pt x="6732517" y="613107"/>
-                  </a:lnTo>
-                  <a:lnTo>
-                    <a:pt x="6804139" y="613588"/>
-                  </a:lnTo>
-                  <a:lnTo>
-                    <a:pt x="6875762" y="614068"/>
-                  </a:lnTo>
-                  <a:lnTo>
-                    <a:pt x="6947385" y="614549"/>
-                  </a:lnTo>
-                  <a:lnTo>
-                    <a:pt x="7019007" y="615029"/>
-                  </a:lnTo>
-                  <a:lnTo>
-                    <a:pt x="7090630" y="615509"/>
-                  </a:lnTo>
-                  <a:lnTo>
-                    <a:pt x="7090630" y="1012120"/>
-                  </a:lnTo>
-                  <a:lnTo>
-                    <a:pt x="7019007" y="1006962"/>
-                  </a:lnTo>
-                  <a:lnTo>
-                    <a:pt x="6947385" y="1001739"/>
-                  </a:lnTo>
-                  <a:lnTo>
-                    <a:pt x="6875762" y="996449"/>
-                  </a:lnTo>
-                  <a:lnTo>
-                    <a:pt x="6804139" y="991092"/>
-                  </a:lnTo>
-                  <a:lnTo>
-                    <a:pt x="6732517" y="985667"/>
-                  </a:lnTo>
-                  <a:lnTo>
-                    <a:pt x="6660894" y="980173"/>
-                  </a:lnTo>
-                  <a:lnTo>
-                    <a:pt x="6589272" y="974609"/>
-                  </a:lnTo>
-                  <a:lnTo>
-                    <a:pt x="6517649" y="968974"/>
-                  </a:lnTo>
-                  <a:lnTo>
-                    <a:pt x="6446027" y="963267"/>
-                  </a:lnTo>
-                  <a:lnTo>
-                    <a:pt x="6374404" y="957487"/>
-                  </a:lnTo>
-                  <a:lnTo>
-                    <a:pt x="6302782" y="951635"/>
-                  </a:lnTo>
-                  <a:lnTo>
-                    <a:pt x="6231159" y="945707"/>
-                  </a:lnTo>
-                  <a:lnTo>
-                    <a:pt x="6159537" y="939704"/>
-                  </a:lnTo>
-                  <a:lnTo>
-                    <a:pt x="6087914" y="933625"/>
-                  </a:lnTo>
-                  <a:lnTo>
-                    <a:pt x="6016292" y="927468"/>
-                  </a:lnTo>
-                  <a:lnTo>
-                    <a:pt x="5944669" y="921233"/>
-                  </a:lnTo>
-                  <a:lnTo>
-                    <a:pt x="5873047" y="914919"/>
-                  </a:lnTo>
-                  <a:lnTo>
-                    <a:pt x="5801424" y="908524"/>
-                  </a:lnTo>
-                  <a:lnTo>
-                    <a:pt x="5729802" y="902048"/>
-                  </a:lnTo>
-                  <a:lnTo>
-                    <a:pt x="5658179" y="895490"/>
-                  </a:lnTo>
-                  <a:lnTo>
-                    <a:pt x="5586557" y="888848"/>
-                  </a:lnTo>
-                  <a:lnTo>
-                    <a:pt x="5514934" y="882121"/>
-                  </a:lnTo>
-                  <a:lnTo>
-                    <a:pt x="5443311" y="875309"/>
-                  </a:lnTo>
-                  <a:lnTo>
-                    <a:pt x="5371689" y="868410"/>
-                  </a:lnTo>
-                  <a:lnTo>
-                    <a:pt x="5300066" y="861423"/>
-                  </a:lnTo>
-                  <a:lnTo>
-                    <a:pt x="5228444" y="854348"/>
-                  </a:lnTo>
-                  <a:lnTo>
-                    <a:pt x="5156821" y="847182"/>
-                  </a:lnTo>
-                  <a:lnTo>
-                    <a:pt x="5085199" y="839925"/>
-                  </a:lnTo>
-                  <a:lnTo>
-                    <a:pt x="5013576" y="832576"/>
-                  </a:lnTo>
-                  <a:lnTo>
-                    <a:pt x="4941954" y="825133"/>
-                  </a:lnTo>
-                  <a:lnTo>
-                    <a:pt x="4870331" y="817596"/>
-                  </a:lnTo>
-                  <a:lnTo>
-                    <a:pt x="4798709" y="809962"/>
-                  </a:lnTo>
-                  <a:lnTo>
-                    <a:pt x="4727086" y="802232"/>
-                  </a:lnTo>
-                  <a:lnTo>
-                    <a:pt x="4655464" y="794403"/>
-                  </a:lnTo>
-                  <a:lnTo>
-                    <a:pt x="4583841" y="786474"/>
-                  </a:lnTo>
-                  <a:lnTo>
-                    <a:pt x="4512219" y="778445"/>
-                  </a:lnTo>
-                  <a:lnTo>
-                    <a:pt x="4440596" y="770313"/>
-                  </a:lnTo>
-                  <a:lnTo>
-                    <a:pt x="4368974" y="762077"/>
-                  </a:lnTo>
-                  <a:lnTo>
-                    <a:pt x="4297351" y="753737"/>
-                  </a:lnTo>
-                  <a:lnTo>
-                    <a:pt x="4225729" y="745291"/>
-                  </a:lnTo>
-                  <a:lnTo>
-                    <a:pt x="4154106" y="736737"/>
-                  </a:lnTo>
-                  <a:lnTo>
-                    <a:pt x="4082483" y="728075"/>
-                  </a:lnTo>
-                  <a:lnTo>
-                    <a:pt x="4010861" y="719302"/>
-                  </a:lnTo>
-                  <a:lnTo>
-                    <a:pt x="3939238" y="710417"/>
-                  </a:lnTo>
-                  <a:lnTo>
-                    <a:pt x="3867616" y="701420"/>
-                  </a:lnTo>
-                  <a:lnTo>
-                    <a:pt x="3795993" y="692308"/>
-                  </a:lnTo>
-                  <a:lnTo>
-                    <a:pt x="3724371" y="683080"/>
-                  </a:lnTo>
-                  <a:lnTo>
-                    <a:pt x="3652748" y="673734"/>
-                  </a:lnTo>
-                  <a:lnTo>
-                    <a:pt x="3581126" y="664269"/>
-                  </a:lnTo>
-                  <a:lnTo>
-                    <a:pt x="3509503" y="654685"/>
-                  </a:lnTo>
-                  <a:lnTo>
-                    <a:pt x="3437881" y="644978"/>
-                  </a:lnTo>
-                  <a:lnTo>
-                    <a:pt x="3366258" y="635147"/>
-                  </a:lnTo>
-                  <a:lnTo>
-                    <a:pt x="3294636" y="625191"/>
-                  </a:lnTo>
-                  <a:lnTo>
-                    <a:pt x="3223013" y="615109"/>
-                  </a:lnTo>
-                  <a:lnTo>
-                    <a:pt x="3151391" y="604898"/>
-                  </a:lnTo>
-                  <a:lnTo>
-                    <a:pt x="3079768" y="594558"/>
-                  </a:lnTo>
-                  <a:lnTo>
-                    <a:pt x="3008146" y="587691"/>
-                  </a:lnTo>
-                  <a:lnTo>
-                    <a:pt x="2936523" y="587195"/>
-                  </a:lnTo>
-                  <a:lnTo>
-                    <a:pt x="2864901" y="586698"/>
-                  </a:lnTo>
-                  <a:lnTo>
-                    <a:pt x="2793278" y="586201"/>
-                  </a:lnTo>
-                  <a:lnTo>
-                    <a:pt x="2721655" y="585703"/>
-                  </a:lnTo>
-                  <a:lnTo>
-                    <a:pt x="2650033" y="585206"/>
-                  </a:lnTo>
-                  <a:lnTo>
-                    <a:pt x="2578410" y="584708"/>
-                  </a:lnTo>
-                  <a:lnTo>
-                    <a:pt x="2506788" y="584209"/>
-                  </a:lnTo>
-                  <a:lnTo>
-                    <a:pt x="2435165" y="583711"/>
-                  </a:lnTo>
-                  <a:lnTo>
-                    <a:pt x="2363543" y="583212"/>
-                  </a:lnTo>
-                  <a:lnTo>
-                    <a:pt x="2291920" y="582713"/>
-                  </a:lnTo>
-                  <a:lnTo>
-                    <a:pt x="2220298" y="582213"/>
-                  </a:lnTo>
-                  <a:lnTo>
-                    <a:pt x="2148675" y="581713"/>
-                  </a:lnTo>
-                  <a:lnTo>
-                    <a:pt x="2077053" y="581213"/>
-                  </a:lnTo>
-                  <a:lnTo>
-                    <a:pt x="2005430" y="580713"/>
-                  </a:lnTo>
-                  <a:lnTo>
-                    <a:pt x="1933808" y="580212"/>
-                  </a:lnTo>
-                  <a:lnTo>
-                    <a:pt x="1862185" y="579711"/>
-                  </a:lnTo>
-                  <a:lnTo>
-                    <a:pt x="1790563" y="579210"/>
-                  </a:lnTo>
-                  <a:lnTo>
-                    <a:pt x="1718940" y="578708"/>
-                  </a:lnTo>
-                  <a:lnTo>
-                    <a:pt x="1647318" y="578206"/>
-                  </a:lnTo>
-                  <a:lnTo>
-                    <a:pt x="1575695" y="577704"/>
-                  </a:lnTo>
-                  <a:lnTo>
-                    <a:pt x="1504073" y="577201"/>
-                  </a:lnTo>
-                  <a:lnTo>
-                    <a:pt x="1432450" y="576698"/>
-                  </a:lnTo>
-                  <a:lnTo>
-                    <a:pt x="1360827" y="576195"/>
-                  </a:lnTo>
-                  <a:lnTo>
-                    <a:pt x="1289205" y="575692"/>
-                  </a:lnTo>
-                  <a:lnTo>
-                    <a:pt x="1217582" y="575188"/>
-                  </a:lnTo>
-                  <a:lnTo>
-                    <a:pt x="1145960" y="574684"/>
-                  </a:lnTo>
-                  <a:lnTo>
-                    <a:pt x="1074337" y="574180"/>
-                  </a:lnTo>
-                  <a:lnTo>
-                    <a:pt x="1002715" y="573675"/>
-                  </a:lnTo>
-                  <a:lnTo>
-                    <a:pt x="931092" y="573170"/>
-                  </a:lnTo>
-                  <a:lnTo>
-                    <a:pt x="859470" y="572665"/>
-                  </a:lnTo>
-                  <a:lnTo>
-                    <a:pt x="787847" y="572159"/>
-                  </a:lnTo>
-                  <a:lnTo>
-                    <a:pt x="716225" y="571654"/>
-                  </a:lnTo>
-                  <a:lnTo>
-                    <a:pt x="644602" y="571147"/>
-                  </a:lnTo>
-                  <a:lnTo>
-                    <a:pt x="572980" y="570641"/>
-                  </a:lnTo>
-                  <a:lnTo>
-                    <a:pt x="501357" y="570134"/>
-                  </a:lnTo>
-                  <a:lnTo>
-                    <a:pt x="429735" y="569627"/>
-                  </a:lnTo>
-                  <a:lnTo>
-                    <a:pt x="358112" y="569120"/>
-                  </a:lnTo>
-                  <a:lnTo>
-                    <a:pt x="286490" y="568612"/>
-                  </a:lnTo>
-                  <a:lnTo>
-                    <a:pt x="214867" y="568104"/>
-                  </a:lnTo>
-                  <a:lnTo>
-                    <a:pt x="143245" y="567596"/>
-                  </a:lnTo>
-                  <a:lnTo>
-                    <a:pt x="71622" y="567087"/>
-                  </a:lnTo>
-                  <a:lnTo>
-                    <a:pt x="0" y="566579"/>
+                    <a:pt x="70344" y="6428"/>
+                  </a:lnTo>
+                  <a:lnTo>
+                    <a:pt x="140688" y="12775"/>
+                  </a:lnTo>
+                  <a:lnTo>
+                    <a:pt x="211033" y="19043"/>
+                  </a:lnTo>
+                  <a:lnTo>
+                    <a:pt x="281377" y="25232"/>
+                  </a:lnTo>
+                  <a:lnTo>
+                    <a:pt x="351722" y="31343"/>
+                  </a:lnTo>
+                  <a:lnTo>
+                    <a:pt x="422066" y="37378"/>
+                  </a:lnTo>
+                  <a:lnTo>
+                    <a:pt x="492411" y="43336"/>
+                  </a:lnTo>
+                  <a:lnTo>
+                    <a:pt x="562755" y="49220"/>
+                  </a:lnTo>
+                  <a:lnTo>
+                    <a:pt x="633100" y="55030"/>
+                  </a:lnTo>
+                  <a:lnTo>
+                    <a:pt x="703444" y="60766"/>
+                  </a:lnTo>
+                  <a:lnTo>
+                    <a:pt x="773789" y="66431"/>
+                  </a:lnTo>
+                  <a:lnTo>
+                    <a:pt x="844133" y="72024"/>
+                  </a:lnTo>
+                  <a:lnTo>
+                    <a:pt x="914478" y="77547"/>
+                  </a:lnTo>
+                  <a:lnTo>
+                    <a:pt x="984822" y="83001"/>
+                  </a:lnTo>
+                  <a:lnTo>
+                    <a:pt x="1055167" y="88386"/>
+                  </a:lnTo>
+                  <a:lnTo>
+                    <a:pt x="1125511" y="93704"/>
+                  </a:lnTo>
+                  <a:lnTo>
+                    <a:pt x="1195856" y="98954"/>
+                  </a:lnTo>
+                  <a:lnTo>
+                    <a:pt x="1266200" y="104139"/>
+                  </a:lnTo>
+                  <a:lnTo>
+                    <a:pt x="1336545" y="109258"/>
+                  </a:lnTo>
+                  <a:lnTo>
+                    <a:pt x="1406889" y="114314"/>
+                  </a:lnTo>
+                  <a:lnTo>
+                    <a:pt x="1477234" y="119305"/>
+                  </a:lnTo>
+                  <a:lnTo>
+                    <a:pt x="1547578" y="124234"/>
+                  </a:lnTo>
+                  <a:lnTo>
+                    <a:pt x="1617923" y="129101"/>
+                  </a:lnTo>
+                  <a:lnTo>
+                    <a:pt x="1688267" y="133907"/>
+                  </a:lnTo>
+                  <a:lnTo>
+                    <a:pt x="1758612" y="138652"/>
+                  </a:lnTo>
+                  <a:lnTo>
+                    <a:pt x="1828956" y="143338"/>
+                  </a:lnTo>
+                  <a:lnTo>
+                    <a:pt x="1899301" y="147965"/>
+                  </a:lnTo>
+                  <a:lnTo>
+                    <a:pt x="1969645" y="152533"/>
+                  </a:lnTo>
+                  <a:lnTo>
+                    <a:pt x="2039990" y="157045"/>
+                  </a:lnTo>
+                  <a:lnTo>
+                    <a:pt x="2110334" y="161499"/>
+                  </a:lnTo>
+                  <a:lnTo>
+                    <a:pt x="2180679" y="165898"/>
+                  </a:lnTo>
+                  <a:lnTo>
+                    <a:pt x="2251023" y="170241"/>
+                  </a:lnTo>
+                  <a:lnTo>
+                    <a:pt x="2321368" y="174530"/>
+                  </a:lnTo>
+                  <a:lnTo>
+                    <a:pt x="2391712" y="178765"/>
+                  </a:lnTo>
+                  <a:lnTo>
+                    <a:pt x="2462057" y="182946"/>
+                  </a:lnTo>
+                  <a:lnTo>
+                    <a:pt x="2532401" y="187075"/>
+                  </a:lnTo>
+                  <a:lnTo>
+                    <a:pt x="2602746" y="191152"/>
+                  </a:lnTo>
+                  <a:lnTo>
+                    <a:pt x="2673090" y="195178"/>
+                  </a:lnTo>
+                  <a:lnTo>
+                    <a:pt x="2743435" y="199154"/>
+                  </a:lnTo>
+                  <a:lnTo>
+                    <a:pt x="2813779" y="203079"/>
+                  </a:lnTo>
+                  <a:lnTo>
+                    <a:pt x="2884124" y="206955"/>
+                  </a:lnTo>
+                  <a:lnTo>
+                    <a:pt x="2954468" y="210782"/>
+                  </a:lnTo>
+                  <a:lnTo>
+                    <a:pt x="3024813" y="212263"/>
+                  </a:lnTo>
+                  <a:lnTo>
+                    <a:pt x="3095157" y="212442"/>
+                  </a:lnTo>
+                  <a:lnTo>
+                    <a:pt x="3165502" y="212621"/>
+                  </a:lnTo>
+                  <a:lnTo>
+                    <a:pt x="3235846" y="212799"/>
+                  </a:lnTo>
+                  <a:lnTo>
+                    <a:pt x="3306191" y="212978"/>
+                  </a:lnTo>
+                  <a:lnTo>
+                    <a:pt x="3376535" y="213157"/>
+                  </a:lnTo>
+                  <a:lnTo>
+                    <a:pt x="3446880" y="213335"/>
+                  </a:lnTo>
+                  <a:lnTo>
+                    <a:pt x="3517224" y="213513"/>
+                  </a:lnTo>
+                  <a:lnTo>
+                    <a:pt x="3587569" y="213692"/>
+                  </a:lnTo>
+                  <a:lnTo>
+                    <a:pt x="3657913" y="213870"/>
+                  </a:lnTo>
+                  <a:lnTo>
+                    <a:pt x="3728257" y="214048"/>
+                  </a:lnTo>
+                  <a:lnTo>
+                    <a:pt x="3798602" y="214226"/>
+                  </a:lnTo>
+                  <a:lnTo>
+                    <a:pt x="3868946" y="214403"/>
+                  </a:lnTo>
+                  <a:lnTo>
+                    <a:pt x="3939291" y="214581"/>
+                  </a:lnTo>
+                  <a:lnTo>
+                    <a:pt x="4009635" y="214759"/>
+                  </a:lnTo>
+                  <a:lnTo>
+                    <a:pt x="4079980" y="214936"/>
+                  </a:lnTo>
+                  <a:lnTo>
+                    <a:pt x="4150324" y="215114"/>
+                  </a:lnTo>
+                  <a:lnTo>
+                    <a:pt x="4220669" y="215291"/>
+                  </a:lnTo>
+                  <a:lnTo>
+                    <a:pt x="4291013" y="215468"/>
+                  </a:lnTo>
+                  <a:lnTo>
+                    <a:pt x="4361358" y="215645"/>
+                  </a:lnTo>
+                  <a:lnTo>
+                    <a:pt x="4431702" y="215822"/>
+                  </a:lnTo>
+                  <a:lnTo>
+                    <a:pt x="4502047" y="215999"/>
+                  </a:lnTo>
+                  <a:lnTo>
+                    <a:pt x="4572391" y="216176"/>
+                  </a:lnTo>
+                  <a:lnTo>
+                    <a:pt x="4642736" y="216352"/>
+                  </a:lnTo>
+                  <a:lnTo>
+                    <a:pt x="4713080" y="216529"/>
+                  </a:lnTo>
+                  <a:lnTo>
+                    <a:pt x="4783425" y="216705"/>
+                  </a:lnTo>
+                  <a:lnTo>
+                    <a:pt x="4853769" y="216882"/>
+                  </a:lnTo>
+                  <a:lnTo>
+                    <a:pt x="4924114" y="217058"/>
+                  </a:lnTo>
+                  <a:lnTo>
+                    <a:pt x="4994458" y="217234"/>
+                  </a:lnTo>
+                  <a:lnTo>
+                    <a:pt x="5064803" y="217410"/>
+                  </a:lnTo>
+                  <a:lnTo>
+                    <a:pt x="5135147" y="217586"/>
+                  </a:lnTo>
+                  <a:lnTo>
+                    <a:pt x="5205492" y="217762"/>
+                  </a:lnTo>
+                  <a:lnTo>
+                    <a:pt x="5275836" y="217937"/>
+                  </a:lnTo>
+                  <a:lnTo>
+                    <a:pt x="5346181" y="218113"/>
+                  </a:lnTo>
+                  <a:lnTo>
+                    <a:pt x="5416525" y="218288"/>
+                  </a:lnTo>
+                  <a:lnTo>
+                    <a:pt x="5486870" y="218464"/>
+                  </a:lnTo>
+                  <a:lnTo>
+                    <a:pt x="5557214" y="218639"/>
+                  </a:lnTo>
+                  <a:lnTo>
+                    <a:pt x="5627559" y="218814"/>
+                  </a:lnTo>
+                  <a:lnTo>
+                    <a:pt x="5697903" y="218989"/>
+                  </a:lnTo>
+                  <a:lnTo>
+                    <a:pt x="5768248" y="219164"/>
+                  </a:lnTo>
+                  <a:lnTo>
+                    <a:pt x="5838592" y="219339"/>
+                  </a:lnTo>
+                  <a:lnTo>
+                    <a:pt x="5908937" y="219514"/>
+                  </a:lnTo>
+                  <a:lnTo>
+                    <a:pt x="5979281" y="219688"/>
+                  </a:lnTo>
+                  <a:lnTo>
+                    <a:pt x="6049626" y="219863"/>
+                  </a:lnTo>
+                  <a:lnTo>
+                    <a:pt x="6119970" y="220037"/>
+                  </a:lnTo>
+                  <a:lnTo>
+                    <a:pt x="6190315" y="220212"/>
+                  </a:lnTo>
+                  <a:lnTo>
+                    <a:pt x="6260659" y="220386"/>
+                  </a:lnTo>
+                  <a:lnTo>
+                    <a:pt x="6331004" y="220560"/>
+                  </a:lnTo>
+                  <a:lnTo>
+                    <a:pt x="6401348" y="220734"/>
+                  </a:lnTo>
+                  <a:lnTo>
+                    <a:pt x="6471693" y="220908"/>
+                  </a:lnTo>
+                  <a:lnTo>
+                    <a:pt x="6542037" y="221082"/>
+                  </a:lnTo>
+                  <a:lnTo>
+                    <a:pt x="6612382" y="221255"/>
+                  </a:lnTo>
+                  <a:lnTo>
+                    <a:pt x="6682726" y="221429"/>
+                  </a:lnTo>
+                  <a:lnTo>
+                    <a:pt x="6753071" y="221603"/>
+                  </a:lnTo>
+                  <a:lnTo>
+                    <a:pt x="6823415" y="221776"/>
+                  </a:lnTo>
+                  <a:lnTo>
+                    <a:pt x="6893760" y="221949"/>
+                  </a:lnTo>
+                  <a:lnTo>
+                    <a:pt x="6964104" y="222122"/>
+                  </a:lnTo>
+                  <a:lnTo>
+                    <a:pt x="6964104" y="365250"/>
+                  </a:lnTo>
+                  <a:lnTo>
+                    <a:pt x="6893760" y="363389"/>
+                  </a:lnTo>
+                  <a:lnTo>
+                    <a:pt x="6823415" y="361504"/>
+                  </a:lnTo>
+                  <a:lnTo>
+                    <a:pt x="6753071" y="359595"/>
+                  </a:lnTo>
+                  <a:lnTo>
+                    <a:pt x="6682726" y="357662"/>
+                  </a:lnTo>
+                  <a:lnTo>
+                    <a:pt x="6612382" y="355704"/>
+                  </a:lnTo>
+                  <a:lnTo>
+                    <a:pt x="6542037" y="353721"/>
+                  </a:lnTo>
+                  <a:lnTo>
+                    <a:pt x="6471693" y="351713"/>
+                  </a:lnTo>
+                  <a:lnTo>
+                    <a:pt x="6401348" y="349679"/>
+                  </a:lnTo>
+                  <a:lnTo>
+                    <a:pt x="6331004" y="347620"/>
+                  </a:lnTo>
+                  <a:lnTo>
+                    <a:pt x="6260659" y="345534"/>
+                  </a:lnTo>
+                  <a:lnTo>
+                    <a:pt x="6190315" y="343422"/>
+                  </a:lnTo>
+                  <a:lnTo>
+                    <a:pt x="6119970" y="341283"/>
+                  </a:lnTo>
+                  <a:lnTo>
+                    <a:pt x="6049626" y="339117"/>
+                  </a:lnTo>
+                  <a:lnTo>
+                    <a:pt x="5979281" y="336923"/>
+                  </a:lnTo>
+                  <a:lnTo>
+                    <a:pt x="5908937" y="334701"/>
+                  </a:lnTo>
+                  <a:lnTo>
+                    <a:pt x="5838592" y="332451"/>
+                  </a:lnTo>
+                  <a:lnTo>
+                    <a:pt x="5768248" y="330172"/>
+                  </a:lnTo>
+                  <a:lnTo>
+                    <a:pt x="5697903" y="327865"/>
+                  </a:lnTo>
+                  <a:lnTo>
+                    <a:pt x="5627559" y="325528"/>
+                  </a:lnTo>
+                  <a:lnTo>
+                    <a:pt x="5557214" y="323161"/>
+                  </a:lnTo>
+                  <a:lnTo>
+                    <a:pt x="5486870" y="320764"/>
+                  </a:lnTo>
+                  <a:lnTo>
+                    <a:pt x="5416525" y="318336"/>
+                  </a:lnTo>
+                  <a:lnTo>
+                    <a:pt x="5346181" y="315878"/>
+                  </a:lnTo>
+                  <a:lnTo>
+                    <a:pt x="5275836" y="313388"/>
+                  </a:lnTo>
+                  <a:lnTo>
+                    <a:pt x="5205492" y="310867"/>
+                  </a:lnTo>
+                  <a:lnTo>
+                    <a:pt x="5135147" y="308314"/>
+                  </a:lnTo>
+                  <a:lnTo>
+                    <a:pt x="5064803" y="305728"/>
+                  </a:lnTo>
+                  <a:lnTo>
+                    <a:pt x="4994458" y="303109"/>
+                  </a:lnTo>
+                  <a:lnTo>
+                    <a:pt x="4924114" y="300457"/>
+                  </a:lnTo>
+                  <a:lnTo>
+                    <a:pt x="4853769" y="297771"/>
+                  </a:lnTo>
+                  <a:lnTo>
+                    <a:pt x="4783425" y="295051"/>
+                  </a:lnTo>
+                  <a:lnTo>
+                    <a:pt x="4713080" y="292296"/>
+                  </a:lnTo>
+                  <a:lnTo>
+                    <a:pt x="4642736" y="289506"/>
+                  </a:lnTo>
+                  <a:lnTo>
+                    <a:pt x="4572391" y="286681"/>
+                  </a:lnTo>
+                  <a:lnTo>
+                    <a:pt x="4502047" y="283820"/>
+                  </a:lnTo>
+                  <a:lnTo>
+                    <a:pt x="4431702" y="280922"/>
+                  </a:lnTo>
+                  <a:lnTo>
+                    <a:pt x="4361358" y="277987"/>
+                  </a:lnTo>
+                  <a:lnTo>
+                    <a:pt x="4291013" y="275016"/>
+                  </a:lnTo>
+                  <a:lnTo>
+                    <a:pt x="4220669" y="272006"/>
+                  </a:lnTo>
+                  <a:lnTo>
+                    <a:pt x="4150324" y="268958"/>
+                  </a:lnTo>
+                  <a:lnTo>
+                    <a:pt x="4079980" y="265871"/>
+                  </a:lnTo>
+                  <a:lnTo>
+                    <a:pt x="4009635" y="262745"/>
+                  </a:lnTo>
+                  <a:lnTo>
+                    <a:pt x="3939291" y="259579"/>
+                  </a:lnTo>
+                  <a:lnTo>
+                    <a:pt x="3868946" y="256373"/>
+                  </a:lnTo>
+                  <a:lnTo>
+                    <a:pt x="3798602" y="253126"/>
+                  </a:lnTo>
+                  <a:lnTo>
+                    <a:pt x="3728257" y="249837"/>
+                  </a:lnTo>
+                  <a:lnTo>
+                    <a:pt x="3657913" y="246507"/>
+                  </a:lnTo>
+                  <a:lnTo>
+                    <a:pt x="3587569" y="243134"/>
+                  </a:lnTo>
+                  <a:lnTo>
+                    <a:pt x="3517224" y="239719"/>
+                  </a:lnTo>
+                  <a:lnTo>
+                    <a:pt x="3446880" y="236260"/>
+                  </a:lnTo>
+                  <a:lnTo>
+                    <a:pt x="3376535" y="232757"/>
+                  </a:lnTo>
+                  <a:lnTo>
+                    <a:pt x="3306191" y="229209"/>
+                  </a:lnTo>
+                  <a:lnTo>
+                    <a:pt x="3235846" y="225617"/>
+                  </a:lnTo>
+                  <a:lnTo>
+                    <a:pt x="3165502" y="221978"/>
+                  </a:lnTo>
+                  <a:lnTo>
+                    <a:pt x="3095157" y="218293"/>
+                  </a:lnTo>
+                  <a:lnTo>
+                    <a:pt x="3024813" y="214562"/>
+                  </a:lnTo>
+                  <a:lnTo>
+                    <a:pt x="2954468" y="212084"/>
+                  </a:lnTo>
+                  <a:lnTo>
+                    <a:pt x="2884124" y="211904"/>
+                  </a:lnTo>
+                  <a:lnTo>
+                    <a:pt x="2813779" y="211725"/>
+                  </a:lnTo>
+                  <a:lnTo>
+                    <a:pt x="2743435" y="211546"/>
+                  </a:lnTo>
+                  <a:lnTo>
+                    <a:pt x="2673090" y="211366"/>
+                  </a:lnTo>
+                  <a:lnTo>
+                    <a:pt x="2602746" y="211187"/>
+                  </a:lnTo>
+                  <a:lnTo>
+                    <a:pt x="2532401" y="211007"/>
+                  </a:lnTo>
+                  <a:lnTo>
+                    <a:pt x="2462057" y="210827"/>
+                  </a:lnTo>
+                  <a:lnTo>
+                    <a:pt x="2391712" y="210647"/>
+                  </a:lnTo>
+                  <a:lnTo>
+                    <a:pt x="2321368" y="210467"/>
+                  </a:lnTo>
+                  <a:lnTo>
+                    <a:pt x="2251023" y="210287"/>
+                  </a:lnTo>
+                  <a:lnTo>
+                    <a:pt x="2180679" y="210107"/>
+                  </a:lnTo>
+                  <a:lnTo>
+                    <a:pt x="2110334" y="209926"/>
+                  </a:lnTo>
+                  <a:lnTo>
+                    <a:pt x="2039990" y="209746"/>
+                  </a:lnTo>
+                  <a:lnTo>
+                    <a:pt x="1969645" y="209565"/>
+                  </a:lnTo>
+                  <a:lnTo>
+                    <a:pt x="1899301" y="209385"/>
+                  </a:lnTo>
+                  <a:lnTo>
+                    <a:pt x="1828956" y="209204"/>
+                  </a:lnTo>
+                  <a:lnTo>
+                    <a:pt x="1758612" y="209023"/>
+                  </a:lnTo>
+                  <a:lnTo>
+                    <a:pt x="1688267" y="208842"/>
+                  </a:lnTo>
+                  <a:lnTo>
+                    <a:pt x="1617923" y="208661"/>
+                  </a:lnTo>
+                  <a:lnTo>
+                    <a:pt x="1547578" y="208479"/>
+                  </a:lnTo>
+                  <a:lnTo>
+                    <a:pt x="1477234" y="208298"/>
+                  </a:lnTo>
+                  <a:lnTo>
+                    <a:pt x="1406889" y="208117"/>
+                  </a:lnTo>
+                  <a:lnTo>
+                    <a:pt x="1336545" y="207935"/>
+                  </a:lnTo>
+                  <a:lnTo>
+                    <a:pt x="1266200" y="207753"/>
+                  </a:lnTo>
+                  <a:lnTo>
+                    <a:pt x="1195856" y="207572"/>
+                  </a:lnTo>
+                  <a:lnTo>
+                    <a:pt x="1125511" y="207390"/>
+                  </a:lnTo>
+                  <a:lnTo>
+                    <a:pt x="1055167" y="207208"/>
+                  </a:lnTo>
+                  <a:lnTo>
+                    <a:pt x="984822" y="207026"/>
+                  </a:lnTo>
+                  <a:lnTo>
+                    <a:pt x="914478" y="206843"/>
+                  </a:lnTo>
+                  <a:lnTo>
+                    <a:pt x="844133" y="206661"/>
+                  </a:lnTo>
+                  <a:lnTo>
+                    <a:pt x="773789" y="206479"/>
+                  </a:lnTo>
+                  <a:lnTo>
+                    <a:pt x="703444" y="206296"/>
+                  </a:lnTo>
+                  <a:lnTo>
+                    <a:pt x="633100" y="206113"/>
+                  </a:lnTo>
+                  <a:lnTo>
+                    <a:pt x="562755" y="205931"/>
+                  </a:lnTo>
+                  <a:lnTo>
+                    <a:pt x="492411" y="205748"/>
+                  </a:lnTo>
+                  <a:lnTo>
+                    <a:pt x="422066" y="205565"/>
+                  </a:lnTo>
+                  <a:lnTo>
+                    <a:pt x="351722" y="205382"/>
+                  </a:lnTo>
+                  <a:lnTo>
+                    <a:pt x="281377" y="205198"/>
+                  </a:lnTo>
+                  <a:lnTo>
+                    <a:pt x="211033" y="205015"/>
+                  </a:lnTo>
+                  <a:lnTo>
+                    <a:pt x="140688" y="204832"/>
+                  </a:lnTo>
+                  <a:lnTo>
+                    <a:pt x="70344" y="204648"/>
+                  </a:lnTo>
+                  <a:lnTo>
+                    <a:pt x="0" y="204465"/>
                   </a:lnTo>
                   <a:close/>
                 </a:path>
@@ -3670,643 +3705,318 @@
         </p:sp>
         <p:sp>
           <p:nvSpPr>
-            <p:cNvPr id="23" name="pl23"/>
-            <p:cNvSpPr/>
-            <p:nvPr/>
-          </p:nvSpPr>
-          <p:spPr>
-            <a:xfrm>
-              <a:off x="1172049" y="4139915"/>
-              <a:ext cx="7090630" cy="615509"/>
-            </a:xfrm>
-            <a:custGeom>
-              <a:avLst/>
-              <a:pathLst>
-                <a:path w="7090630" h="615509">
-                  <a:moveTo>
-                    <a:pt x="0" y="0"/>
-                  </a:moveTo>
-                  <a:lnTo>
-                    <a:pt x="71622" y="17813"/>
-                  </a:lnTo>
-                  <a:lnTo>
-                    <a:pt x="143245" y="35402"/>
-                  </a:lnTo>
-                  <a:lnTo>
-                    <a:pt x="214867" y="52770"/>
-                  </a:lnTo>
-                  <a:lnTo>
-                    <a:pt x="286490" y="69920"/>
-                  </a:lnTo>
-                  <a:lnTo>
-                    <a:pt x="358112" y="86854"/>
-                  </a:lnTo>
-                  <a:lnTo>
-                    <a:pt x="429735" y="103576"/>
-                  </a:lnTo>
-                  <a:lnTo>
-                    <a:pt x="501357" y="120087"/>
-                  </a:lnTo>
-                  <a:lnTo>
-                    <a:pt x="572980" y="136391"/>
-                  </a:lnTo>
-                  <a:lnTo>
-                    <a:pt x="644602" y="152490"/>
-                  </a:lnTo>
-                  <a:lnTo>
-                    <a:pt x="716225" y="168386"/>
-                  </a:lnTo>
-                  <a:lnTo>
-                    <a:pt x="787847" y="184083"/>
-                  </a:lnTo>
-                  <a:lnTo>
-                    <a:pt x="859470" y="199582"/>
-                  </a:lnTo>
-                  <a:lnTo>
-                    <a:pt x="931092" y="214887"/>
-                  </a:lnTo>
-                  <a:lnTo>
-                    <a:pt x="1002715" y="229999"/>
-                  </a:lnTo>
-                  <a:lnTo>
-                    <a:pt x="1074337" y="244922"/>
-                  </a:lnTo>
-                  <a:lnTo>
-                    <a:pt x="1145960" y="259657"/>
-                  </a:lnTo>
-                  <a:lnTo>
-                    <a:pt x="1217582" y="274206"/>
-                  </a:lnTo>
-                  <a:lnTo>
-                    <a:pt x="1289205" y="288573"/>
-                  </a:lnTo>
-                  <a:lnTo>
-                    <a:pt x="1360827" y="302760"/>
-                  </a:lnTo>
-                  <a:lnTo>
-                    <a:pt x="1432450" y="316768"/>
-                  </a:lnTo>
-                  <a:lnTo>
-                    <a:pt x="1504073" y="330599"/>
-                  </a:lnTo>
-                  <a:lnTo>
-                    <a:pt x="1575695" y="344258"/>
-                  </a:lnTo>
-                  <a:lnTo>
-                    <a:pt x="1647318" y="357744"/>
-                  </a:lnTo>
-                  <a:lnTo>
-                    <a:pt x="1718940" y="371061"/>
-                  </a:lnTo>
-                  <a:lnTo>
-                    <a:pt x="1790563" y="384210"/>
-                  </a:lnTo>
-                  <a:lnTo>
-                    <a:pt x="1862185" y="397195"/>
-                  </a:lnTo>
-                  <a:lnTo>
-                    <a:pt x="1933808" y="410016"/>
-                  </a:lnTo>
-                  <a:lnTo>
-                    <a:pt x="2005430" y="422676"/>
-                  </a:lnTo>
-                  <a:lnTo>
-                    <a:pt x="2077053" y="435177"/>
-                  </a:lnTo>
-                  <a:lnTo>
-                    <a:pt x="2148675" y="447520"/>
-                  </a:lnTo>
-                  <a:lnTo>
-                    <a:pt x="2220298" y="459709"/>
-                  </a:lnTo>
-                  <a:lnTo>
-                    <a:pt x="2291920" y="471745"/>
-                  </a:lnTo>
-                  <a:lnTo>
-                    <a:pt x="2363543" y="483629"/>
-                  </a:lnTo>
-                  <a:lnTo>
-                    <a:pt x="2435165" y="495363"/>
-                  </a:lnTo>
-                  <a:lnTo>
-                    <a:pt x="2506788" y="506951"/>
-                  </a:lnTo>
-                  <a:lnTo>
-                    <a:pt x="2578410" y="518393"/>
-                  </a:lnTo>
-                  <a:lnTo>
-                    <a:pt x="2650033" y="529690"/>
-                  </a:lnTo>
-                  <a:lnTo>
-                    <a:pt x="2721655" y="540846"/>
-                  </a:lnTo>
-                  <a:lnTo>
-                    <a:pt x="2793278" y="551862"/>
-                  </a:lnTo>
-                  <a:lnTo>
-                    <a:pt x="2864901" y="562739"/>
-                  </a:lnTo>
-                  <a:lnTo>
-                    <a:pt x="2936523" y="573480"/>
-                  </a:lnTo>
-                  <a:lnTo>
-                    <a:pt x="3008146" y="584085"/>
-                  </a:lnTo>
-                  <a:lnTo>
-                    <a:pt x="3079768" y="588188"/>
-                  </a:lnTo>
-                  <a:lnTo>
-                    <a:pt x="3151391" y="588684"/>
-                  </a:lnTo>
-                  <a:lnTo>
-                    <a:pt x="3223013" y="589179"/>
-                  </a:lnTo>
-                  <a:lnTo>
-                    <a:pt x="3294636" y="589675"/>
-                  </a:lnTo>
-                  <a:lnTo>
-                    <a:pt x="3366258" y="590170"/>
-                  </a:lnTo>
-                  <a:lnTo>
-                    <a:pt x="3437881" y="590664"/>
-                  </a:lnTo>
-                  <a:lnTo>
-                    <a:pt x="3509503" y="591159"/>
-                  </a:lnTo>
-                  <a:lnTo>
-                    <a:pt x="3581126" y="591653"/>
-                  </a:lnTo>
-                  <a:lnTo>
-                    <a:pt x="3652748" y="592147"/>
-                  </a:lnTo>
-                  <a:lnTo>
-                    <a:pt x="3724371" y="592641"/>
-                  </a:lnTo>
-                  <a:lnTo>
-                    <a:pt x="3795993" y="593134"/>
-                  </a:lnTo>
-                  <a:lnTo>
-                    <a:pt x="3867616" y="593627"/>
-                  </a:lnTo>
-                  <a:lnTo>
-                    <a:pt x="3939238" y="594120"/>
-                  </a:lnTo>
-                  <a:lnTo>
-                    <a:pt x="4010861" y="594612"/>
-                  </a:lnTo>
-                  <a:lnTo>
-                    <a:pt x="4082483" y="595104"/>
-                  </a:lnTo>
-                  <a:lnTo>
-                    <a:pt x="4154106" y="595596"/>
-                  </a:lnTo>
-                  <a:lnTo>
-                    <a:pt x="4225729" y="596087"/>
-                  </a:lnTo>
-                  <a:lnTo>
-                    <a:pt x="4297351" y="596579"/>
-                  </a:lnTo>
-                  <a:lnTo>
-                    <a:pt x="4368974" y="597070"/>
-                  </a:lnTo>
-                  <a:lnTo>
-                    <a:pt x="4440596" y="597560"/>
-                  </a:lnTo>
-                  <a:lnTo>
-                    <a:pt x="4512219" y="598051"/>
-                  </a:lnTo>
-                  <a:lnTo>
-                    <a:pt x="4583841" y="598541"/>
-                  </a:lnTo>
-                  <a:lnTo>
-                    <a:pt x="4655464" y="599030"/>
-                  </a:lnTo>
-                  <a:lnTo>
-                    <a:pt x="4727086" y="599520"/>
-                  </a:lnTo>
-                  <a:lnTo>
-                    <a:pt x="4798709" y="600009"/>
-                  </a:lnTo>
-                  <a:lnTo>
-                    <a:pt x="4870331" y="600498"/>
-                  </a:lnTo>
-                  <a:lnTo>
-                    <a:pt x="4941954" y="600986"/>
-                  </a:lnTo>
-                  <a:lnTo>
-                    <a:pt x="5013576" y="601475"/>
-                  </a:lnTo>
-                  <a:lnTo>
-                    <a:pt x="5085199" y="601963"/>
-                  </a:lnTo>
-                  <a:lnTo>
-                    <a:pt x="5156821" y="602450"/>
-                  </a:lnTo>
-                  <a:lnTo>
-                    <a:pt x="5228444" y="602938"/>
-                  </a:lnTo>
-                  <a:lnTo>
-                    <a:pt x="5300066" y="603425"/>
-                  </a:lnTo>
-                  <a:lnTo>
-                    <a:pt x="5371689" y="603912"/>
-                  </a:lnTo>
-                  <a:lnTo>
-                    <a:pt x="5443311" y="604398"/>
-                  </a:lnTo>
-                  <a:lnTo>
-                    <a:pt x="5514934" y="604885"/>
-                  </a:lnTo>
-                  <a:lnTo>
-                    <a:pt x="5586557" y="605371"/>
-                  </a:lnTo>
-                  <a:lnTo>
-                    <a:pt x="5658179" y="605856"/>
-                  </a:lnTo>
-                  <a:lnTo>
-                    <a:pt x="5729802" y="606342"/>
-                  </a:lnTo>
-                  <a:lnTo>
-                    <a:pt x="5801424" y="606827"/>
-                  </a:lnTo>
-                  <a:lnTo>
-                    <a:pt x="5873047" y="607312"/>
-                  </a:lnTo>
-                  <a:lnTo>
-                    <a:pt x="5944669" y="607796"/>
-                  </a:lnTo>
-                  <a:lnTo>
-                    <a:pt x="6016292" y="608280"/>
-                  </a:lnTo>
-                  <a:lnTo>
-                    <a:pt x="6087914" y="608764"/>
-                  </a:lnTo>
-                  <a:lnTo>
-                    <a:pt x="6159537" y="609248"/>
-                  </a:lnTo>
-                  <a:lnTo>
-                    <a:pt x="6231159" y="609731"/>
-                  </a:lnTo>
-                  <a:lnTo>
-                    <a:pt x="6302782" y="610214"/>
-                  </a:lnTo>
-                  <a:lnTo>
-                    <a:pt x="6374404" y="610697"/>
-                  </a:lnTo>
-                  <a:lnTo>
-                    <a:pt x="6446027" y="611180"/>
-                  </a:lnTo>
-                  <a:lnTo>
-                    <a:pt x="6517649" y="611662"/>
-                  </a:lnTo>
-                  <a:lnTo>
-                    <a:pt x="6589272" y="612144"/>
-                  </a:lnTo>
-                  <a:lnTo>
-                    <a:pt x="6660894" y="612625"/>
-                  </a:lnTo>
-                  <a:lnTo>
-                    <a:pt x="6732517" y="613107"/>
-                  </a:lnTo>
-                  <a:lnTo>
-                    <a:pt x="6804139" y="613588"/>
-                  </a:lnTo>
-                  <a:lnTo>
-                    <a:pt x="6875762" y="614068"/>
-                  </a:lnTo>
-                  <a:lnTo>
-                    <a:pt x="6947385" y="614549"/>
-                  </a:lnTo>
-                  <a:lnTo>
-                    <a:pt x="7019007" y="615029"/>
-                  </a:lnTo>
-                  <a:lnTo>
-                    <a:pt x="7090630" y="615509"/>
-                  </a:lnTo>
-                </a:path>
-              </a:pathLst>
-            </a:custGeom>
-          </p:spPr>
-          <p:txBody>
-            <a:bodyPr/>
-            <a:lstStyle/>
-            <a:p/>
-          </p:txBody>
-        </p:sp>
-        <p:sp>
-          <p:nvSpPr>
             <p:cNvPr id="24" name="pl24"/>
             <p:cNvSpPr/>
             <p:nvPr/>
           </p:nvSpPr>
           <p:spPr>
             <a:xfrm>
-              <a:off x="1172049" y="4706494"/>
-              <a:ext cx="7090630" cy="445541"/>
+              <a:off x="1235312" y="2888811"/>
+              <a:ext cx="6964104" cy="222122"/>
             </a:xfrm>
             <a:custGeom>
               <a:avLst/>
               <a:pathLst>
-                <a:path w="7090630" h="445541">
+                <a:path w="6964104" h="222122">
                   <a:moveTo>
-                    <a:pt x="7090630" y="445541"/>
+                    <a:pt x="0" y="0"/>
                   </a:moveTo>
                   <a:lnTo>
-                    <a:pt x="7019007" y="440383"/>
-                  </a:lnTo>
-                  <a:lnTo>
-                    <a:pt x="6947385" y="435160"/>
-                  </a:lnTo>
-                  <a:lnTo>
-                    <a:pt x="6875762" y="429870"/>
-                  </a:lnTo>
-                  <a:lnTo>
-                    <a:pt x="6804139" y="424513"/>
-                  </a:lnTo>
-                  <a:lnTo>
-                    <a:pt x="6732517" y="419088"/>
-                  </a:lnTo>
-                  <a:lnTo>
-                    <a:pt x="6660894" y="413594"/>
-                  </a:lnTo>
-                  <a:lnTo>
-                    <a:pt x="6589272" y="408029"/>
-                  </a:lnTo>
-                  <a:lnTo>
-                    <a:pt x="6517649" y="402395"/>
-                  </a:lnTo>
-                  <a:lnTo>
-                    <a:pt x="6446027" y="396688"/>
-                  </a:lnTo>
-                  <a:lnTo>
-                    <a:pt x="6374404" y="390908"/>
-                  </a:lnTo>
-                  <a:lnTo>
-                    <a:pt x="6302782" y="385056"/>
-                  </a:lnTo>
-                  <a:lnTo>
-                    <a:pt x="6231159" y="379128"/>
-                  </a:lnTo>
-                  <a:lnTo>
-                    <a:pt x="6159537" y="373125"/>
-                  </a:lnTo>
-                  <a:lnTo>
-                    <a:pt x="6087914" y="367046"/>
-                  </a:lnTo>
-                  <a:lnTo>
-                    <a:pt x="6016292" y="360889"/>
-                  </a:lnTo>
-                  <a:lnTo>
-                    <a:pt x="5944669" y="354654"/>
-                  </a:lnTo>
-                  <a:lnTo>
-                    <a:pt x="5873047" y="348340"/>
-                  </a:lnTo>
-                  <a:lnTo>
-                    <a:pt x="5801424" y="341945"/>
-                  </a:lnTo>
-                  <a:lnTo>
-                    <a:pt x="5729802" y="335469"/>
-                  </a:lnTo>
-                  <a:lnTo>
-                    <a:pt x="5658179" y="328911"/>
-                  </a:lnTo>
-                  <a:lnTo>
-                    <a:pt x="5586557" y="322269"/>
-                  </a:lnTo>
-                  <a:lnTo>
-                    <a:pt x="5514934" y="315542"/>
-                  </a:lnTo>
-                  <a:lnTo>
-                    <a:pt x="5443311" y="308730"/>
-                  </a:lnTo>
-                  <a:lnTo>
-                    <a:pt x="5371689" y="301831"/>
-                  </a:lnTo>
-                  <a:lnTo>
-                    <a:pt x="5300066" y="294844"/>
-                  </a:lnTo>
-                  <a:lnTo>
-                    <a:pt x="5228444" y="287769"/>
-                  </a:lnTo>
-                  <a:lnTo>
-                    <a:pt x="5156821" y="280603"/>
-                  </a:lnTo>
-                  <a:lnTo>
-                    <a:pt x="5085199" y="273346"/>
-                  </a:lnTo>
-                  <a:lnTo>
-                    <a:pt x="5013576" y="265997"/>
-                  </a:lnTo>
-                  <a:lnTo>
-                    <a:pt x="4941954" y="258554"/>
-                  </a:lnTo>
-                  <a:lnTo>
-                    <a:pt x="4870331" y="251017"/>
-                  </a:lnTo>
-                  <a:lnTo>
-                    <a:pt x="4798709" y="243383"/>
-                  </a:lnTo>
-                  <a:lnTo>
-                    <a:pt x="4727086" y="235653"/>
-                  </a:lnTo>
-                  <a:lnTo>
-                    <a:pt x="4655464" y="227824"/>
-                  </a:lnTo>
-                  <a:lnTo>
-                    <a:pt x="4583841" y="219895"/>
-                  </a:lnTo>
-                  <a:lnTo>
-                    <a:pt x="4512219" y="211865"/>
-                  </a:lnTo>
-                  <a:lnTo>
-                    <a:pt x="4440596" y="203734"/>
-                  </a:lnTo>
-                  <a:lnTo>
-                    <a:pt x="4368974" y="195498"/>
-                  </a:lnTo>
-                  <a:lnTo>
-                    <a:pt x="4297351" y="187158"/>
-                  </a:lnTo>
-                  <a:lnTo>
-                    <a:pt x="4225729" y="178712"/>
-                  </a:lnTo>
-                  <a:lnTo>
-                    <a:pt x="4154106" y="170158"/>
-                  </a:lnTo>
-                  <a:lnTo>
-                    <a:pt x="4082483" y="161496"/>
-                  </a:lnTo>
-                  <a:lnTo>
-                    <a:pt x="4010861" y="152723"/>
-                  </a:lnTo>
-                  <a:lnTo>
-                    <a:pt x="3939238" y="143838"/>
-                  </a:lnTo>
-                  <a:lnTo>
-                    <a:pt x="3867616" y="134841"/>
-                  </a:lnTo>
-                  <a:lnTo>
-                    <a:pt x="3795993" y="125729"/>
-                  </a:lnTo>
-                  <a:lnTo>
-                    <a:pt x="3724371" y="116501"/>
-                  </a:lnTo>
-                  <a:lnTo>
-                    <a:pt x="3652748" y="107155"/>
-                  </a:lnTo>
-                  <a:lnTo>
-                    <a:pt x="3581126" y="97690"/>
-                  </a:lnTo>
-                  <a:lnTo>
-                    <a:pt x="3509503" y="88105"/>
-                  </a:lnTo>
-                  <a:lnTo>
-                    <a:pt x="3437881" y="78398"/>
-                  </a:lnTo>
-                  <a:lnTo>
-                    <a:pt x="3366258" y="68568"/>
-                  </a:lnTo>
-                  <a:lnTo>
-                    <a:pt x="3294636" y="58612"/>
-                  </a:lnTo>
-                  <a:lnTo>
-                    <a:pt x="3223013" y="48530"/>
-                  </a:lnTo>
-                  <a:lnTo>
-                    <a:pt x="3151391" y="38319"/>
-                  </a:lnTo>
-                  <a:lnTo>
-                    <a:pt x="3079768" y="27979"/>
-                  </a:lnTo>
-                  <a:lnTo>
-                    <a:pt x="3008146" y="21112"/>
-                  </a:lnTo>
-                  <a:lnTo>
-                    <a:pt x="2936523" y="20616"/>
-                  </a:lnTo>
-                  <a:lnTo>
-                    <a:pt x="2864901" y="20119"/>
-                  </a:lnTo>
-                  <a:lnTo>
-                    <a:pt x="2793278" y="19622"/>
-                  </a:lnTo>
-                  <a:lnTo>
-                    <a:pt x="2721655" y="19124"/>
-                  </a:lnTo>
-                  <a:lnTo>
-                    <a:pt x="2650033" y="18627"/>
-                  </a:lnTo>
-                  <a:lnTo>
-                    <a:pt x="2578410" y="18129"/>
-                  </a:lnTo>
-                  <a:lnTo>
-                    <a:pt x="2506788" y="17630"/>
-                  </a:lnTo>
-                  <a:lnTo>
-                    <a:pt x="2435165" y="17132"/>
-                  </a:lnTo>
-                  <a:lnTo>
-                    <a:pt x="2363543" y="16633"/>
-                  </a:lnTo>
-                  <a:lnTo>
-                    <a:pt x="2291920" y="16133"/>
-                  </a:lnTo>
-                  <a:lnTo>
-                    <a:pt x="2220298" y="15634"/>
-                  </a:lnTo>
-                  <a:lnTo>
-                    <a:pt x="2148675" y="15134"/>
-                  </a:lnTo>
-                  <a:lnTo>
-                    <a:pt x="2077053" y="14634"/>
-                  </a:lnTo>
-                  <a:lnTo>
-                    <a:pt x="2005430" y="14134"/>
-                  </a:lnTo>
-                  <a:lnTo>
-                    <a:pt x="1933808" y="13633"/>
-                  </a:lnTo>
-                  <a:lnTo>
-                    <a:pt x="1862185" y="13132"/>
-                  </a:lnTo>
-                  <a:lnTo>
-                    <a:pt x="1790563" y="12631"/>
-                  </a:lnTo>
-                  <a:lnTo>
-                    <a:pt x="1718940" y="12129"/>
-                  </a:lnTo>
-                  <a:lnTo>
-                    <a:pt x="1647318" y="11627"/>
-                  </a:lnTo>
-                  <a:lnTo>
-                    <a:pt x="1575695" y="11125"/>
-                  </a:lnTo>
-                  <a:lnTo>
-                    <a:pt x="1504073" y="10622"/>
-                  </a:lnTo>
-                  <a:lnTo>
-                    <a:pt x="1432450" y="10119"/>
-                  </a:lnTo>
-                  <a:lnTo>
-                    <a:pt x="1360827" y="9616"/>
-                  </a:lnTo>
-                  <a:lnTo>
-                    <a:pt x="1289205" y="9113"/>
-                  </a:lnTo>
-                  <a:lnTo>
-                    <a:pt x="1217582" y="8609"/>
-                  </a:lnTo>
-                  <a:lnTo>
-                    <a:pt x="1145960" y="8105"/>
-                  </a:lnTo>
-                  <a:lnTo>
-                    <a:pt x="1074337" y="7601"/>
-                  </a:lnTo>
-                  <a:lnTo>
-                    <a:pt x="1002715" y="7096"/>
-                  </a:lnTo>
-                  <a:lnTo>
-                    <a:pt x="931092" y="6591"/>
-                  </a:lnTo>
-                  <a:lnTo>
-                    <a:pt x="859470" y="6086"/>
-                  </a:lnTo>
-                  <a:lnTo>
-                    <a:pt x="787847" y="5580"/>
-                  </a:lnTo>
-                  <a:lnTo>
-                    <a:pt x="716225" y="5075"/>
-                  </a:lnTo>
-                  <a:lnTo>
-                    <a:pt x="644602" y="4568"/>
-                  </a:lnTo>
-                  <a:lnTo>
-                    <a:pt x="572980" y="4062"/>
-                  </a:lnTo>
-                  <a:lnTo>
-                    <a:pt x="501357" y="3555"/>
-                  </a:lnTo>
-                  <a:lnTo>
-                    <a:pt x="429735" y="3048"/>
-                  </a:lnTo>
-                  <a:lnTo>
-                    <a:pt x="358112" y="2541"/>
-                  </a:lnTo>
-                  <a:lnTo>
-                    <a:pt x="286490" y="2033"/>
-                  </a:lnTo>
-                  <a:lnTo>
-                    <a:pt x="214867" y="1525"/>
-                  </a:lnTo>
-                  <a:lnTo>
-                    <a:pt x="143245" y="1017"/>
-                  </a:lnTo>
-                  <a:lnTo>
-                    <a:pt x="71622" y="508"/>
-                  </a:lnTo>
-                  <a:lnTo>
-                    <a:pt x="0" y="0"/>
+                    <a:pt x="70344" y="6428"/>
+                  </a:lnTo>
+                  <a:lnTo>
+                    <a:pt x="140688" y="12775"/>
+                  </a:lnTo>
+                  <a:lnTo>
+                    <a:pt x="211033" y="19043"/>
+                  </a:lnTo>
+                  <a:lnTo>
+                    <a:pt x="281377" y="25232"/>
+                  </a:lnTo>
+                  <a:lnTo>
+                    <a:pt x="351722" y="31343"/>
+                  </a:lnTo>
+                  <a:lnTo>
+                    <a:pt x="422066" y="37378"/>
+                  </a:lnTo>
+                  <a:lnTo>
+                    <a:pt x="492411" y="43336"/>
+                  </a:lnTo>
+                  <a:lnTo>
+                    <a:pt x="562755" y="49220"/>
+                  </a:lnTo>
+                  <a:lnTo>
+                    <a:pt x="633100" y="55030"/>
+                  </a:lnTo>
+                  <a:lnTo>
+                    <a:pt x="703444" y="60766"/>
+                  </a:lnTo>
+                  <a:lnTo>
+                    <a:pt x="773789" y="66431"/>
+                  </a:lnTo>
+                  <a:lnTo>
+                    <a:pt x="844133" y="72024"/>
+                  </a:lnTo>
+                  <a:lnTo>
+                    <a:pt x="914478" y="77547"/>
+                  </a:lnTo>
+                  <a:lnTo>
+                    <a:pt x="984822" y="83001"/>
+                  </a:lnTo>
+                  <a:lnTo>
+                    <a:pt x="1055167" y="88386"/>
+                  </a:lnTo>
+                  <a:lnTo>
+                    <a:pt x="1125511" y="93704"/>
+                  </a:lnTo>
+                  <a:lnTo>
+                    <a:pt x="1195856" y="98954"/>
+                  </a:lnTo>
+                  <a:lnTo>
+                    <a:pt x="1266200" y="104139"/>
+                  </a:lnTo>
+                  <a:lnTo>
+                    <a:pt x="1336545" y="109258"/>
+                  </a:lnTo>
+                  <a:lnTo>
+                    <a:pt x="1406889" y="114314"/>
+                  </a:lnTo>
+                  <a:lnTo>
+                    <a:pt x="1477234" y="119305"/>
+                  </a:lnTo>
+                  <a:lnTo>
+                    <a:pt x="1547578" y="124234"/>
+                  </a:lnTo>
+                  <a:lnTo>
+                    <a:pt x="1617923" y="129101"/>
+                  </a:lnTo>
+                  <a:lnTo>
+                    <a:pt x="1688267" y="133907"/>
+                  </a:lnTo>
+                  <a:lnTo>
+                    <a:pt x="1758612" y="138652"/>
+                  </a:lnTo>
+                  <a:lnTo>
+                    <a:pt x="1828956" y="143338"/>
+                  </a:lnTo>
+                  <a:lnTo>
+                    <a:pt x="1899301" y="147965"/>
+                  </a:lnTo>
+                  <a:lnTo>
+                    <a:pt x="1969645" y="152533"/>
+                  </a:lnTo>
+                  <a:lnTo>
+                    <a:pt x="2039990" y="157045"/>
+                  </a:lnTo>
+                  <a:lnTo>
+                    <a:pt x="2110334" y="161499"/>
+                  </a:lnTo>
+                  <a:lnTo>
+                    <a:pt x="2180679" y="165898"/>
+                  </a:lnTo>
+                  <a:lnTo>
+                    <a:pt x="2251023" y="170241"/>
+                  </a:lnTo>
+                  <a:lnTo>
+                    <a:pt x="2321368" y="174530"/>
+                  </a:lnTo>
+                  <a:lnTo>
+                    <a:pt x="2391712" y="178765"/>
+                  </a:lnTo>
+                  <a:lnTo>
+                    <a:pt x="2462057" y="182946"/>
+                  </a:lnTo>
+                  <a:lnTo>
+                    <a:pt x="2532401" y="187075"/>
+                  </a:lnTo>
+                  <a:lnTo>
+                    <a:pt x="2602746" y="191152"/>
+                  </a:lnTo>
+                  <a:lnTo>
+                    <a:pt x="2673090" y="195178"/>
+                  </a:lnTo>
+                  <a:lnTo>
+                    <a:pt x="2743435" y="199154"/>
+                  </a:lnTo>
+                  <a:lnTo>
+                    <a:pt x="2813779" y="203079"/>
+                  </a:lnTo>
+                  <a:lnTo>
+                    <a:pt x="2884124" y="206955"/>
+                  </a:lnTo>
+                  <a:lnTo>
+                    <a:pt x="2954468" y="210782"/>
+                  </a:lnTo>
+                  <a:lnTo>
+                    <a:pt x="3024813" y="212263"/>
+                  </a:lnTo>
+                  <a:lnTo>
+                    <a:pt x="3095157" y="212442"/>
+                  </a:lnTo>
+                  <a:lnTo>
+                    <a:pt x="3165502" y="212621"/>
+                  </a:lnTo>
+                  <a:lnTo>
+                    <a:pt x="3235846" y="212799"/>
+                  </a:lnTo>
+                  <a:lnTo>
+                    <a:pt x="3306191" y="212978"/>
+                  </a:lnTo>
+                  <a:lnTo>
+                    <a:pt x="3376535" y="213157"/>
+                  </a:lnTo>
+                  <a:lnTo>
+                    <a:pt x="3446880" y="213335"/>
+                  </a:lnTo>
+                  <a:lnTo>
+                    <a:pt x="3517224" y="213513"/>
+                  </a:lnTo>
+                  <a:lnTo>
+                    <a:pt x="3587569" y="213692"/>
+                  </a:lnTo>
+                  <a:lnTo>
+                    <a:pt x="3657913" y="213870"/>
+                  </a:lnTo>
+                  <a:lnTo>
+                    <a:pt x="3728257" y="214048"/>
+                  </a:lnTo>
+                  <a:lnTo>
+                    <a:pt x="3798602" y="214226"/>
+                  </a:lnTo>
+                  <a:lnTo>
+                    <a:pt x="3868946" y="214403"/>
+                  </a:lnTo>
+                  <a:lnTo>
+                    <a:pt x="3939291" y="214581"/>
+                  </a:lnTo>
+                  <a:lnTo>
+                    <a:pt x="4009635" y="214759"/>
+                  </a:lnTo>
+                  <a:lnTo>
+                    <a:pt x="4079980" y="214936"/>
+                  </a:lnTo>
+                  <a:lnTo>
+                    <a:pt x="4150324" y="215114"/>
+                  </a:lnTo>
+                  <a:lnTo>
+                    <a:pt x="4220669" y="215291"/>
+                  </a:lnTo>
+                  <a:lnTo>
+                    <a:pt x="4291013" y="215468"/>
+                  </a:lnTo>
+                  <a:lnTo>
+                    <a:pt x="4361358" y="215645"/>
+                  </a:lnTo>
+                  <a:lnTo>
+                    <a:pt x="4431702" y="215822"/>
+                  </a:lnTo>
+                  <a:lnTo>
+                    <a:pt x="4502047" y="215999"/>
+                  </a:lnTo>
+                  <a:lnTo>
+                    <a:pt x="4572391" y="216176"/>
+                  </a:lnTo>
+                  <a:lnTo>
+                    <a:pt x="4642736" y="216352"/>
+                  </a:lnTo>
+                  <a:lnTo>
+                    <a:pt x="4713080" y="216529"/>
+                  </a:lnTo>
+                  <a:lnTo>
+                    <a:pt x="4783425" y="216705"/>
+                  </a:lnTo>
+                  <a:lnTo>
+                    <a:pt x="4853769" y="216882"/>
+                  </a:lnTo>
+                  <a:lnTo>
+                    <a:pt x="4924114" y="217058"/>
+                  </a:lnTo>
+                  <a:lnTo>
+                    <a:pt x="4994458" y="217234"/>
+                  </a:lnTo>
+                  <a:lnTo>
+                    <a:pt x="5064803" y="217410"/>
+                  </a:lnTo>
+                  <a:lnTo>
+                    <a:pt x="5135147" y="217586"/>
+                  </a:lnTo>
+                  <a:lnTo>
+                    <a:pt x="5205492" y="217762"/>
+                  </a:lnTo>
+                  <a:lnTo>
+                    <a:pt x="5275836" y="217937"/>
+                  </a:lnTo>
+                  <a:lnTo>
+                    <a:pt x="5346181" y="218113"/>
+                  </a:lnTo>
+                  <a:lnTo>
+                    <a:pt x="5416525" y="218288"/>
+                  </a:lnTo>
+                  <a:lnTo>
+                    <a:pt x="5486870" y="218464"/>
+                  </a:lnTo>
+                  <a:lnTo>
+                    <a:pt x="5557214" y="218639"/>
+                  </a:lnTo>
+                  <a:lnTo>
+                    <a:pt x="5627559" y="218814"/>
+                  </a:lnTo>
+                  <a:lnTo>
+                    <a:pt x="5697903" y="218989"/>
+                  </a:lnTo>
+                  <a:lnTo>
+                    <a:pt x="5768248" y="219164"/>
+                  </a:lnTo>
+                  <a:lnTo>
+                    <a:pt x="5838592" y="219339"/>
+                  </a:lnTo>
+                  <a:lnTo>
+                    <a:pt x="5908937" y="219514"/>
+                  </a:lnTo>
+                  <a:lnTo>
+                    <a:pt x="5979281" y="219688"/>
+                  </a:lnTo>
+                  <a:lnTo>
+                    <a:pt x="6049626" y="219863"/>
+                  </a:lnTo>
+                  <a:lnTo>
+                    <a:pt x="6119970" y="220037"/>
+                  </a:lnTo>
+                  <a:lnTo>
+                    <a:pt x="6190315" y="220212"/>
+                  </a:lnTo>
+                  <a:lnTo>
+                    <a:pt x="6260659" y="220386"/>
+                  </a:lnTo>
+                  <a:lnTo>
+                    <a:pt x="6331004" y="220560"/>
+                  </a:lnTo>
+                  <a:lnTo>
+                    <a:pt x="6401348" y="220734"/>
+                  </a:lnTo>
+                  <a:lnTo>
+                    <a:pt x="6471693" y="220908"/>
+                  </a:lnTo>
+                  <a:lnTo>
+                    <a:pt x="6542037" y="221082"/>
+                  </a:lnTo>
+                  <a:lnTo>
+                    <a:pt x="6612382" y="221255"/>
+                  </a:lnTo>
+                  <a:lnTo>
+                    <a:pt x="6682726" y="221429"/>
+                  </a:lnTo>
+                  <a:lnTo>
+                    <a:pt x="6753071" y="221603"/>
+                  </a:lnTo>
+                  <a:lnTo>
+                    <a:pt x="6823415" y="221776"/>
+                  </a:lnTo>
+                  <a:lnTo>
+                    <a:pt x="6893760" y="221949"/>
+                  </a:lnTo>
+                  <a:lnTo>
+                    <a:pt x="6964104" y="222122"/>
                   </a:lnTo>
                 </a:path>
               </a:pathLst>
@@ -4326,312 +4036,637 @@
           </p:nvSpPr>
           <p:spPr>
             <a:xfrm>
-              <a:off x="1172049" y="4459158"/>
-              <a:ext cx="7090630" cy="528081"/>
+              <a:off x="1235312" y="3093276"/>
+              <a:ext cx="6964104" cy="160785"/>
             </a:xfrm>
             <a:custGeom>
               <a:avLst/>
               <a:pathLst>
-                <a:path w="7090630" h="528081">
+                <a:path w="6964104" h="160785">
+                  <a:moveTo>
+                    <a:pt x="6964104" y="160785"/>
+                  </a:moveTo>
+                  <a:lnTo>
+                    <a:pt x="6893760" y="158924"/>
+                  </a:lnTo>
+                  <a:lnTo>
+                    <a:pt x="6823415" y="157039"/>
+                  </a:lnTo>
+                  <a:lnTo>
+                    <a:pt x="6753071" y="155130"/>
+                  </a:lnTo>
+                  <a:lnTo>
+                    <a:pt x="6682726" y="153196"/>
+                  </a:lnTo>
+                  <a:lnTo>
+                    <a:pt x="6612382" y="151239"/>
+                  </a:lnTo>
+                  <a:lnTo>
+                    <a:pt x="6542037" y="149256"/>
+                  </a:lnTo>
+                  <a:lnTo>
+                    <a:pt x="6471693" y="147248"/>
+                  </a:lnTo>
+                  <a:lnTo>
+                    <a:pt x="6401348" y="145214"/>
+                  </a:lnTo>
+                  <a:lnTo>
+                    <a:pt x="6331004" y="143155"/>
+                  </a:lnTo>
+                  <a:lnTo>
+                    <a:pt x="6260659" y="141069"/>
+                  </a:lnTo>
+                  <a:lnTo>
+                    <a:pt x="6190315" y="138957"/>
+                  </a:lnTo>
+                  <a:lnTo>
+                    <a:pt x="6119970" y="136818"/>
+                  </a:lnTo>
+                  <a:lnTo>
+                    <a:pt x="6049626" y="134652"/>
+                  </a:lnTo>
+                  <a:lnTo>
+                    <a:pt x="5979281" y="132458"/>
+                  </a:lnTo>
+                  <a:lnTo>
+                    <a:pt x="5908937" y="130236"/>
+                  </a:lnTo>
+                  <a:lnTo>
+                    <a:pt x="5838592" y="127986"/>
+                  </a:lnTo>
+                  <a:lnTo>
+                    <a:pt x="5768248" y="125707"/>
+                  </a:lnTo>
+                  <a:lnTo>
+                    <a:pt x="5697903" y="123400"/>
+                  </a:lnTo>
+                  <a:lnTo>
+                    <a:pt x="5627559" y="121063"/>
+                  </a:lnTo>
+                  <a:lnTo>
+                    <a:pt x="5557214" y="118696"/>
+                  </a:lnTo>
+                  <a:lnTo>
+                    <a:pt x="5486870" y="116299"/>
+                  </a:lnTo>
+                  <a:lnTo>
+                    <a:pt x="5416525" y="113871"/>
+                  </a:lnTo>
+                  <a:lnTo>
+                    <a:pt x="5346181" y="111413"/>
+                  </a:lnTo>
+                  <a:lnTo>
+                    <a:pt x="5275836" y="108923"/>
+                  </a:lnTo>
+                  <a:lnTo>
+                    <a:pt x="5205492" y="106402"/>
+                  </a:lnTo>
+                  <a:lnTo>
+                    <a:pt x="5135147" y="103849"/>
+                  </a:lnTo>
+                  <a:lnTo>
+                    <a:pt x="5064803" y="101263"/>
+                  </a:lnTo>
+                  <a:lnTo>
+                    <a:pt x="4994458" y="98644"/>
+                  </a:lnTo>
+                  <a:lnTo>
+                    <a:pt x="4924114" y="95992"/>
+                  </a:lnTo>
+                  <a:lnTo>
+                    <a:pt x="4853769" y="93306"/>
+                  </a:lnTo>
+                  <a:lnTo>
+                    <a:pt x="4783425" y="90586"/>
+                  </a:lnTo>
+                  <a:lnTo>
+                    <a:pt x="4713080" y="87831"/>
+                  </a:lnTo>
+                  <a:lnTo>
+                    <a:pt x="4642736" y="85041"/>
+                  </a:lnTo>
+                  <a:lnTo>
+                    <a:pt x="4572391" y="82216"/>
+                  </a:lnTo>
+                  <a:lnTo>
+                    <a:pt x="4502047" y="79355"/>
+                  </a:lnTo>
+                  <a:lnTo>
+                    <a:pt x="4431702" y="76457"/>
+                  </a:lnTo>
+                  <a:lnTo>
+                    <a:pt x="4361358" y="73522"/>
+                  </a:lnTo>
+                  <a:lnTo>
+                    <a:pt x="4291013" y="70550"/>
+                  </a:lnTo>
+                  <a:lnTo>
+                    <a:pt x="4220669" y="67541"/>
+                  </a:lnTo>
+                  <a:lnTo>
+                    <a:pt x="4150324" y="64493"/>
+                  </a:lnTo>
+                  <a:lnTo>
+                    <a:pt x="4079980" y="61406"/>
+                  </a:lnTo>
+                  <a:lnTo>
+                    <a:pt x="4009635" y="58280"/>
+                  </a:lnTo>
+                  <a:lnTo>
+                    <a:pt x="3939291" y="55114"/>
+                  </a:lnTo>
+                  <a:lnTo>
+                    <a:pt x="3868946" y="51908"/>
+                  </a:lnTo>
+                  <a:lnTo>
+                    <a:pt x="3798602" y="48661"/>
+                  </a:lnTo>
+                  <a:lnTo>
+                    <a:pt x="3728257" y="45372"/>
+                  </a:lnTo>
+                  <a:lnTo>
+                    <a:pt x="3657913" y="42042"/>
+                  </a:lnTo>
+                  <a:lnTo>
+                    <a:pt x="3587569" y="38669"/>
+                  </a:lnTo>
+                  <a:lnTo>
+                    <a:pt x="3517224" y="35254"/>
+                  </a:lnTo>
+                  <a:lnTo>
+                    <a:pt x="3446880" y="31795"/>
+                  </a:lnTo>
+                  <a:lnTo>
+                    <a:pt x="3376535" y="28292"/>
+                  </a:lnTo>
+                  <a:lnTo>
+                    <a:pt x="3306191" y="24744"/>
+                  </a:lnTo>
+                  <a:lnTo>
+                    <a:pt x="3235846" y="21151"/>
+                  </a:lnTo>
+                  <a:lnTo>
+                    <a:pt x="3165502" y="17513"/>
+                  </a:lnTo>
+                  <a:lnTo>
+                    <a:pt x="3095157" y="13828"/>
+                  </a:lnTo>
+                  <a:lnTo>
+                    <a:pt x="3024813" y="10097"/>
+                  </a:lnTo>
+                  <a:lnTo>
+                    <a:pt x="2954468" y="7619"/>
+                  </a:lnTo>
+                  <a:lnTo>
+                    <a:pt x="2884124" y="7439"/>
+                  </a:lnTo>
+                  <a:lnTo>
+                    <a:pt x="2813779" y="7260"/>
+                  </a:lnTo>
+                  <a:lnTo>
+                    <a:pt x="2743435" y="7081"/>
+                  </a:lnTo>
+                  <a:lnTo>
+                    <a:pt x="2673090" y="6901"/>
+                  </a:lnTo>
+                  <a:lnTo>
+                    <a:pt x="2602746" y="6722"/>
+                  </a:lnTo>
+                  <a:lnTo>
+                    <a:pt x="2532401" y="6542"/>
+                  </a:lnTo>
+                  <a:lnTo>
+                    <a:pt x="2462057" y="6362"/>
+                  </a:lnTo>
+                  <a:lnTo>
+                    <a:pt x="2391712" y="6182"/>
+                  </a:lnTo>
+                  <a:lnTo>
+                    <a:pt x="2321368" y="6002"/>
+                  </a:lnTo>
+                  <a:lnTo>
+                    <a:pt x="2251023" y="5822"/>
+                  </a:lnTo>
+                  <a:lnTo>
+                    <a:pt x="2180679" y="5642"/>
+                  </a:lnTo>
+                  <a:lnTo>
+                    <a:pt x="2110334" y="5461"/>
+                  </a:lnTo>
+                  <a:lnTo>
+                    <a:pt x="2039990" y="5281"/>
+                  </a:lnTo>
+                  <a:lnTo>
+                    <a:pt x="1969645" y="5100"/>
+                  </a:lnTo>
+                  <a:lnTo>
+                    <a:pt x="1899301" y="4919"/>
+                  </a:lnTo>
+                  <a:lnTo>
+                    <a:pt x="1828956" y="4739"/>
+                  </a:lnTo>
+                  <a:lnTo>
+                    <a:pt x="1758612" y="4558"/>
+                  </a:lnTo>
+                  <a:lnTo>
+                    <a:pt x="1688267" y="4377"/>
+                  </a:lnTo>
+                  <a:lnTo>
+                    <a:pt x="1617923" y="4196"/>
+                  </a:lnTo>
+                  <a:lnTo>
+                    <a:pt x="1547578" y="4014"/>
+                  </a:lnTo>
+                  <a:lnTo>
+                    <a:pt x="1477234" y="3833"/>
+                  </a:lnTo>
+                  <a:lnTo>
+                    <a:pt x="1406889" y="3652"/>
+                  </a:lnTo>
+                  <a:lnTo>
+                    <a:pt x="1336545" y="3470"/>
+                  </a:lnTo>
+                  <a:lnTo>
+                    <a:pt x="1266200" y="3288"/>
+                  </a:lnTo>
+                  <a:lnTo>
+                    <a:pt x="1195856" y="3107"/>
+                  </a:lnTo>
+                  <a:lnTo>
+                    <a:pt x="1125511" y="2925"/>
+                  </a:lnTo>
+                  <a:lnTo>
+                    <a:pt x="1055167" y="2743"/>
+                  </a:lnTo>
+                  <a:lnTo>
+                    <a:pt x="984822" y="2561"/>
+                  </a:lnTo>
+                  <a:lnTo>
+                    <a:pt x="914478" y="2378"/>
+                  </a:lnTo>
+                  <a:lnTo>
+                    <a:pt x="844133" y="2196"/>
+                  </a:lnTo>
+                  <a:lnTo>
+                    <a:pt x="773789" y="2014"/>
+                  </a:lnTo>
+                  <a:lnTo>
+                    <a:pt x="703444" y="1831"/>
+                  </a:lnTo>
+                  <a:lnTo>
+                    <a:pt x="633100" y="1648"/>
+                  </a:lnTo>
+                  <a:lnTo>
+                    <a:pt x="562755" y="1466"/>
+                  </a:lnTo>
+                  <a:lnTo>
+                    <a:pt x="492411" y="1283"/>
+                  </a:lnTo>
+                  <a:lnTo>
+                    <a:pt x="422066" y="1100"/>
+                  </a:lnTo>
+                  <a:lnTo>
+                    <a:pt x="351722" y="917"/>
+                  </a:lnTo>
+                  <a:lnTo>
+                    <a:pt x="281377" y="733"/>
+                  </a:lnTo>
+                  <a:lnTo>
+                    <a:pt x="211033" y="550"/>
+                  </a:lnTo>
+                  <a:lnTo>
+                    <a:pt x="140688" y="367"/>
+                  </a:lnTo>
+                  <a:lnTo>
+                    <a:pt x="70344" y="183"/>
+                  </a:lnTo>
+                  <a:lnTo>
+                    <a:pt x="0" y="0"/>
+                  </a:lnTo>
+                </a:path>
+              </a:pathLst>
+            </a:custGeom>
+          </p:spPr>
+          <p:txBody>
+            <a:bodyPr/>
+            <a:lstStyle/>
+            <a:p/>
+          </p:txBody>
+        </p:sp>
+        <p:sp>
+          <p:nvSpPr>
+            <p:cNvPr id="26" name="pl26"/>
+            <p:cNvSpPr/>
+            <p:nvPr/>
+          </p:nvSpPr>
+          <p:spPr>
+            <a:xfrm>
+              <a:off x="1235312" y="3004019"/>
+              <a:ext cx="6964104" cy="190572"/>
+            </a:xfrm>
+            <a:custGeom>
+              <a:avLst/>
+              <a:pathLst>
+                <a:path w="6964104" h="190572">
                   <a:moveTo>
                     <a:pt x="0" y="0"/>
                   </a:moveTo>
                   <a:lnTo>
-                    <a:pt x="71622" y="7248"/>
-                  </a:lnTo>
-                  <a:lnTo>
-                    <a:pt x="143245" y="14449"/>
-                  </a:lnTo>
-                  <a:lnTo>
-                    <a:pt x="214867" y="21602"/>
-                  </a:lnTo>
-                  <a:lnTo>
-                    <a:pt x="286490" y="28708"/>
-                  </a:lnTo>
-                  <a:lnTo>
-                    <a:pt x="358112" y="35767"/>
-                  </a:lnTo>
-                  <a:lnTo>
-                    <a:pt x="429735" y="42780"/>
-                  </a:lnTo>
-                  <a:lnTo>
-                    <a:pt x="501357" y="49746"/>
-                  </a:lnTo>
-                  <a:lnTo>
-                    <a:pt x="572980" y="56666"/>
-                  </a:lnTo>
-                  <a:lnTo>
-                    <a:pt x="644602" y="63541"/>
-                  </a:lnTo>
-                  <a:lnTo>
-                    <a:pt x="716225" y="70370"/>
-                  </a:lnTo>
-                  <a:lnTo>
-                    <a:pt x="787847" y="77154"/>
-                  </a:lnTo>
-                  <a:lnTo>
-                    <a:pt x="859470" y="83893"/>
-                  </a:lnTo>
-                  <a:lnTo>
-                    <a:pt x="931092" y="90588"/>
-                  </a:lnTo>
-                  <a:lnTo>
-                    <a:pt x="1002715" y="97239"/>
-                  </a:lnTo>
-                  <a:lnTo>
-                    <a:pt x="1074337" y="103846"/>
-                  </a:lnTo>
-                  <a:lnTo>
-                    <a:pt x="1145960" y="110409"/>
-                  </a:lnTo>
-                  <a:lnTo>
-                    <a:pt x="1217582" y="116928"/>
-                  </a:lnTo>
-                  <a:lnTo>
-                    <a:pt x="1289205" y="123405"/>
-                  </a:lnTo>
-                  <a:lnTo>
-                    <a:pt x="1360827" y="129839"/>
-                  </a:lnTo>
-                  <a:lnTo>
-                    <a:pt x="1432450" y="136231"/>
-                  </a:lnTo>
-                  <a:lnTo>
-                    <a:pt x="1504073" y="142580"/>
-                  </a:lnTo>
-                  <a:lnTo>
-                    <a:pt x="1575695" y="148887"/>
-                  </a:lnTo>
-                  <a:lnTo>
-                    <a:pt x="1647318" y="155153"/>
-                  </a:lnTo>
-                  <a:lnTo>
-                    <a:pt x="1718940" y="161378"/>
-                  </a:lnTo>
-                  <a:lnTo>
-                    <a:pt x="1790563" y="167561"/>
-                  </a:lnTo>
-                  <a:lnTo>
-                    <a:pt x="1862185" y="173704"/>
-                  </a:lnTo>
-                  <a:lnTo>
-                    <a:pt x="1933808" y="179806"/>
-                  </a:lnTo>
-                  <a:lnTo>
-                    <a:pt x="2005430" y="185867"/>
-                  </a:lnTo>
-                  <a:lnTo>
-                    <a:pt x="2077053" y="191889"/>
-                  </a:lnTo>
-                  <a:lnTo>
-                    <a:pt x="2148675" y="197871"/>
-                  </a:lnTo>
-                  <a:lnTo>
-                    <a:pt x="2220298" y="203813"/>
-                  </a:lnTo>
-                  <a:lnTo>
-                    <a:pt x="2291920" y="209717"/>
-                  </a:lnTo>
-                  <a:lnTo>
-                    <a:pt x="2363543" y="215581"/>
-                  </a:lnTo>
-                  <a:lnTo>
-                    <a:pt x="2435165" y="221406"/>
-                  </a:lnTo>
-                  <a:lnTo>
-                    <a:pt x="2506788" y="227193"/>
-                  </a:lnTo>
-                  <a:lnTo>
-                    <a:pt x="2578410" y="232942"/>
-                  </a:lnTo>
-                  <a:lnTo>
-                    <a:pt x="2650033" y="238653"/>
-                  </a:lnTo>
-                  <a:lnTo>
-                    <a:pt x="2721655" y="244326"/>
-                  </a:lnTo>
-                  <a:lnTo>
-                    <a:pt x="2793278" y="249962"/>
-                  </a:lnTo>
-                  <a:lnTo>
-                    <a:pt x="2864901" y="255561"/>
-                  </a:lnTo>
-                  <a:lnTo>
-                    <a:pt x="2936523" y="261122"/>
-                  </a:lnTo>
-                  <a:lnTo>
-                    <a:pt x="3008146" y="266647"/>
-                  </a:lnTo>
-                  <a:lnTo>
-                    <a:pt x="3079768" y="272136"/>
-                  </a:lnTo>
-                  <a:lnTo>
-                    <a:pt x="3151391" y="277588"/>
-                  </a:lnTo>
-                  <a:lnTo>
-                    <a:pt x="3223013" y="283004"/>
-                  </a:lnTo>
-                  <a:lnTo>
-                    <a:pt x="3294636" y="288385"/>
-                  </a:lnTo>
-                  <a:lnTo>
-                    <a:pt x="3366258" y="293730"/>
-                  </a:lnTo>
-                  <a:lnTo>
-                    <a:pt x="3437881" y="299039"/>
-                  </a:lnTo>
-                  <a:lnTo>
-                    <a:pt x="3509503" y="304314"/>
-                  </a:lnTo>
-                  <a:lnTo>
-                    <a:pt x="3581126" y="309554"/>
-                  </a:lnTo>
-                  <a:lnTo>
-                    <a:pt x="3652748" y="314759"/>
-                  </a:lnTo>
-                  <a:lnTo>
-                    <a:pt x="3724371" y="319930"/>
-                  </a:lnTo>
-                  <a:lnTo>
-                    <a:pt x="3795993" y="325067"/>
-                  </a:lnTo>
-                  <a:lnTo>
-                    <a:pt x="3867616" y="330169"/>
-                  </a:lnTo>
-                  <a:lnTo>
-                    <a:pt x="3939238" y="335239"/>
-                  </a:lnTo>
-                  <a:lnTo>
-                    <a:pt x="4010861" y="340274"/>
-                  </a:lnTo>
-                  <a:lnTo>
-                    <a:pt x="4082483" y="345277"/>
-                  </a:lnTo>
-                  <a:lnTo>
-                    <a:pt x="4154106" y="350246"/>
-                  </a:lnTo>
-                  <a:lnTo>
-                    <a:pt x="4225729" y="355183"/>
-                  </a:lnTo>
-                  <a:lnTo>
-                    <a:pt x="4297351" y="360087"/>
-                  </a:lnTo>
-                  <a:lnTo>
-                    <a:pt x="4368974" y="364958"/>
-                  </a:lnTo>
-                  <a:lnTo>
-                    <a:pt x="4440596" y="369798"/>
-                  </a:lnTo>
-                  <a:lnTo>
-                    <a:pt x="4512219" y="374605"/>
-                  </a:lnTo>
-                  <a:lnTo>
-                    <a:pt x="4583841" y="379381"/>
-                  </a:lnTo>
-                  <a:lnTo>
-                    <a:pt x="4655464" y="384125"/>
-                  </a:lnTo>
-                  <a:lnTo>
-                    <a:pt x="4727086" y="388838"/>
-                  </a:lnTo>
-                  <a:lnTo>
-                    <a:pt x="4798709" y="393520"/>
-                  </a:lnTo>
-                  <a:lnTo>
-                    <a:pt x="4870331" y="398171"/>
-                  </a:lnTo>
-                  <a:lnTo>
-                    <a:pt x="4941954" y="402791"/>
-                  </a:lnTo>
-                  <a:lnTo>
-                    <a:pt x="5013576" y="407381"/>
-                  </a:lnTo>
-                  <a:lnTo>
-                    <a:pt x="5085199" y="411941"/>
-                  </a:lnTo>
-                  <a:lnTo>
-                    <a:pt x="5156821" y="416470"/>
-                  </a:lnTo>
-                  <a:lnTo>
-                    <a:pt x="5228444" y="420969"/>
-                  </a:lnTo>
-                  <a:lnTo>
-                    <a:pt x="5300066" y="425439"/>
-                  </a:lnTo>
-                  <a:lnTo>
-                    <a:pt x="5371689" y="429879"/>
-                  </a:lnTo>
-                  <a:lnTo>
-                    <a:pt x="5443311" y="434290"/>
-                  </a:lnTo>
-                  <a:lnTo>
-                    <a:pt x="5514934" y="438672"/>
-                  </a:lnTo>
-                  <a:lnTo>
-                    <a:pt x="5586557" y="443025"/>
-                  </a:lnTo>
-                  <a:lnTo>
-                    <a:pt x="5658179" y="447349"/>
-                  </a:lnTo>
-                  <a:lnTo>
-                    <a:pt x="5729802" y="451645"/>
-                  </a:lnTo>
-                  <a:lnTo>
-                    <a:pt x="5801424" y="455912"/>
-                  </a:lnTo>
-                  <a:lnTo>
-                    <a:pt x="5873047" y="460151"/>
-                  </a:lnTo>
-                  <a:lnTo>
-                    <a:pt x="5944669" y="464362"/>
-                  </a:lnTo>
-                  <a:lnTo>
-                    <a:pt x="6016292" y="468546"/>
-                  </a:lnTo>
-                  <a:lnTo>
-                    <a:pt x="6087914" y="472701"/>
-                  </a:lnTo>
-                  <a:lnTo>
-                    <a:pt x="6159537" y="476829"/>
-                  </a:lnTo>
-                  <a:lnTo>
-                    <a:pt x="6231159" y="480931"/>
-                  </a:lnTo>
-                  <a:lnTo>
-                    <a:pt x="6302782" y="485004"/>
-                  </a:lnTo>
-                  <a:lnTo>
-                    <a:pt x="6374404" y="489051"/>
-                  </a:lnTo>
-                  <a:lnTo>
-                    <a:pt x="6446027" y="493072"/>
-                  </a:lnTo>
-                  <a:lnTo>
-                    <a:pt x="6517649" y="497066"/>
-                  </a:lnTo>
-                  <a:lnTo>
-                    <a:pt x="6589272" y="501033"/>
-                  </a:lnTo>
-                  <a:lnTo>
-                    <a:pt x="6660894" y="504974"/>
-                  </a:lnTo>
-                  <a:lnTo>
-                    <a:pt x="6732517" y="508890"/>
-                  </a:lnTo>
-                  <a:lnTo>
-                    <a:pt x="6804139" y="512779"/>
-                  </a:lnTo>
-                  <a:lnTo>
-                    <a:pt x="6875762" y="516643"/>
-                  </a:lnTo>
-                  <a:lnTo>
-                    <a:pt x="6947385" y="520481"/>
-                  </a:lnTo>
-                  <a:lnTo>
-                    <a:pt x="7019007" y="524294"/>
-                  </a:lnTo>
-                  <a:lnTo>
-                    <a:pt x="7090630" y="528081"/>
+                    <a:pt x="70344" y="2615"/>
+                  </a:lnTo>
+                  <a:lnTo>
+                    <a:pt x="140688" y="5214"/>
+                  </a:lnTo>
+                  <a:lnTo>
+                    <a:pt x="211033" y="7795"/>
+                  </a:lnTo>
+                  <a:lnTo>
+                    <a:pt x="281377" y="10360"/>
+                  </a:lnTo>
+                  <a:lnTo>
+                    <a:pt x="351722" y="12907"/>
+                  </a:lnTo>
+                  <a:lnTo>
+                    <a:pt x="422066" y="15438"/>
+                  </a:lnTo>
+                  <a:lnTo>
+                    <a:pt x="492411" y="17952"/>
+                  </a:lnTo>
+                  <a:lnTo>
+                    <a:pt x="562755" y="20449"/>
+                  </a:lnTo>
+                  <a:lnTo>
+                    <a:pt x="633100" y="22930"/>
+                  </a:lnTo>
+                  <a:lnTo>
+                    <a:pt x="703444" y="25395"/>
+                  </a:lnTo>
+                  <a:lnTo>
+                    <a:pt x="773789" y="27843"/>
+                  </a:lnTo>
+                  <a:lnTo>
+                    <a:pt x="844133" y="30275"/>
+                  </a:lnTo>
+                  <a:lnTo>
+                    <a:pt x="914478" y="32691"/>
+                  </a:lnTo>
+                  <a:lnTo>
+                    <a:pt x="984822" y="35091"/>
+                  </a:lnTo>
+                  <a:lnTo>
+                    <a:pt x="1055167" y="37475"/>
+                  </a:lnTo>
+                  <a:lnTo>
+                    <a:pt x="1125511" y="39844"/>
+                  </a:lnTo>
+                  <a:lnTo>
+                    <a:pt x="1195856" y="42196"/>
+                  </a:lnTo>
+                  <a:lnTo>
+                    <a:pt x="1266200" y="44534"/>
+                  </a:lnTo>
+                  <a:lnTo>
+                    <a:pt x="1336545" y="46856"/>
+                  </a:lnTo>
+                  <a:lnTo>
+                    <a:pt x="1406889" y="49162"/>
+                  </a:lnTo>
+                  <a:lnTo>
+                    <a:pt x="1477234" y="51453"/>
+                  </a:lnTo>
+                  <a:lnTo>
+                    <a:pt x="1547578" y="53730"/>
+                  </a:lnTo>
+                  <a:lnTo>
+                    <a:pt x="1617923" y="55991"/>
+                  </a:lnTo>
+                  <a:lnTo>
+                    <a:pt x="1688267" y="58237"/>
+                  </a:lnTo>
+                  <a:lnTo>
+                    <a:pt x="1758612" y="60469"/>
+                  </a:lnTo>
+                  <a:lnTo>
+                    <a:pt x="1828956" y="62685"/>
+                  </a:lnTo>
+                  <a:lnTo>
+                    <a:pt x="1899301" y="64887"/>
+                  </a:lnTo>
+                  <a:lnTo>
+                    <a:pt x="1969645" y="67075"/>
+                  </a:lnTo>
+                  <a:lnTo>
+                    <a:pt x="2039990" y="69248"/>
+                  </a:lnTo>
+                  <a:lnTo>
+                    <a:pt x="2110334" y="71407"/>
+                  </a:lnTo>
+                  <a:lnTo>
+                    <a:pt x="2180679" y="73551"/>
+                  </a:lnTo>
+                  <a:lnTo>
+                    <a:pt x="2251023" y="75681"/>
+                  </a:lnTo>
+                  <a:lnTo>
+                    <a:pt x="2321368" y="77798"/>
+                  </a:lnTo>
+                  <a:lnTo>
+                    <a:pt x="2391712" y="79900"/>
+                  </a:lnTo>
+                  <a:lnTo>
+                    <a:pt x="2462057" y="81988"/>
+                  </a:lnTo>
+                  <a:lnTo>
+                    <a:pt x="2532401" y="84063"/>
+                  </a:lnTo>
+                  <a:lnTo>
+                    <a:pt x="2602746" y="86124"/>
+                  </a:lnTo>
+                  <a:lnTo>
+                    <a:pt x="2673090" y="88171"/>
+                  </a:lnTo>
+                  <a:lnTo>
+                    <a:pt x="2743435" y="90205"/>
+                  </a:lnTo>
+                  <a:lnTo>
+                    <a:pt x="2813779" y="92226"/>
+                  </a:lnTo>
+                  <a:lnTo>
+                    <a:pt x="2884124" y="94233"/>
+                  </a:lnTo>
+                  <a:lnTo>
+                    <a:pt x="2954468" y="96226"/>
+                  </a:lnTo>
+                  <a:lnTo>
+                    <a:pt x="3024813" y="98207"/>
+                  </a:lnTo>
+                  <a:lnTo>
+                    <a:pt x="3095157" y="100175"/>
+                  </a:lnTo>
+                  <a:lnTo>
+                    <a:pt x="3165502" y="102129"/>
+                  </a:lnTo>
+                  <a:lnTo>
+                    <a:pt x="3235846" y="104071"/>
+                  </a:lnTo>
+                  <a:lnTo>
+                    <a:pt x="3306191" y="106000"/>
+                  </a:lnTo>
+                  <a:lnTo>
+                    <a:pt x="3376535" y="107916"/>
+                  </a:lnTo>
+                  <a:lnTo>
+                    <a:pt x="3446880" y="109819"/>
+                  </a:lnTo>
+                  <a:lnTo>
+                    <a:pt x="3517224" y="111710"/>
+                  </a:lnTo>
+                  <a:lnTo>
+                    <a:pt x="3587569" y="113589"/>
+                  </a:lnTo>
+                  <a:lnTo>
+                    <a:pt x="3657913" y="115455"/>
+                  </a:lnTo>
+                  <a:lnTo>
+                    <a:pt x="3728257" y="117309"/>
+                  </a:lnTo>
+                  <a:lnTo>
+                    <a:pt x="3798602" y="119150"/>
+                  </a:lnTo>
+                  <a:lnTo>
+                    <a:pt x="3868946" y="120979"/>
+                  </a:lnTo>
+                  <a:lnTo>
+                    <a:pt x="3939291" y="122797"/>
+                  </a:lnTo>
+                  <a:lnTo>
+                    <a:pt x="4009635" y="124602"/>
+                  </a:lnTo>
+                  <a:lnTo>
+                    <a:pt x="4079980" y="126395"/>
+                  </a:lnTo>
+                  <a:lnTo>
+                    <a:pt x="4150324" y="128177"/>
+                  </a:lnTo>
+                  <a:lnTo>
+                    <a:pt x="4220669" y="129946"/>
+                  </a:lnTo>
+                  <a:lnTo>
+                    <a:pt x="4291013" y="131705"/>
+                  </a:lnTo>
+                  <a:lnTo>
+                    <a:pt x="4361358" y="133451"/>
+                  </a:lnTo>
+                  <a:lnTo>
+                    <a:pt x="4431702" y="135186"/>
+                  </a:lnTo>
+                  <a:lnTo>
+                    <a:pt x="4502047" y="136909"/>
+                  </a:lnTo>
+                  <a:lnTo>
+                    <a:pt x="4572391" y="138621"/>
+                  </a:lnTo>
+                  <a:lnTo>
+                    <a:pt x="4642736" y="140322"/>
+                  </a:lnTo>
+                  <a:lnTo>
+                    <a:pt x="4713080" y="142012"/>
+                  </a:lnTo>
+                  <a:lnTo>
+                    <a:pt x="4783425" y="143690"/>
+                  </a:lnTo>
+                  <a:lnTo>
+                    <a:pt x="4853769" y="145358"/>
+                  </a:lnTo>
+                  <a:lnTo>
+                    <a:pt x="4924114" y="147014"/>
+                  </a:lnTo>
+                  <a:lnTo>
+                    <a:pt x="4994458" y="148659"/>
+                  </a:lnTo>
+                  <a:lnTo>
+                    <a:pt x="5064803" y="150294"/>
+                  </a:lnTo>
+                  <a:lnTo>
+                    <a:pt x="5135147" y="151918"/>
+                  </a:lnTo>
+                  <a:lnTo>
+                    <a:pt x="5205492" y="153531"/>
+                  </a:lnTo>
+                  <a:lnTo>
+                    <a:pt x="5275836" y="155133"/>
+                  </a:lnTo>
+                  <a:lnTo>
+                    <a:pt x="5346181" y="156725"/>
+                  </a:lnTo>
+                  <a:lnTo>
+                    <a:pt x="5416525" y="158306"/>
+                  </a:lnTo>
+                  <a:lnTo>
+                    <a:pt x="5486870" y="159877"/>
+                  </a:lnTo>
+                  <a:lnTo>
+                    <a:pt x="5557214" y="161437"/>
+                  </a:lnTo>
+                  <a:lnTo>
+                    <a:pt x="5627559" y="162988"/>
+                  </a:lnTo>
+                  <a:lnTo>
+                    <a:pt x="5697903" y="164528"/>
+                  </a:lnTo>
+                  <a:lnTo>
+                    <a:pt x="5768248" y="166057"/>
+                  </a:lnTo>
+                  <a:lnTo>
+                    <a:pt x="5838592" y="167577"/>
+                  </a:lnTo>
+                  <a:lnTo>
+                    <a:pt x="5908937" y="169087"/>
+                  </a:lnTo>
+                  <a:lnTo>
+                    <a:pt x="5979281" y="170586"/>
+                  </a:lnTo>
+                  <a:lnTo>
+                    <a:pt x="6049626" y="172076"/>
+                  </a:lnTo>
+                  <a:lnTo>
+                    <a:pt x="6119970" y="173556"/>
+                  </a:lnTo>
+                  <a:lnTo>
+                    <a:pt x="6190315" y="175026"/>
+                  </a:lnTo>
+                  <a:lnTo>
+                    <a:pt x="6260659" y="176487"/>
+                  </a:lnTo>
+                  <a:lnTo>
+                    <a:pt x="6331004" y="177938"/>
+                  </a:lnTo>
+                  <a:lnTo>
+                    <a:pt x="6401348" y="179379"/>
+                  </a:lnTo>
+                  <a:lnTo>
+                    <a:pt x="6471693" y="180811"/>
+                  </a:lnTo>
+                  <a:lnTo>
+                    <a:pt x="6542037" y="182233"/>
+                  </a:lnTo>
+                  <a:lnTo>
+                    <a:pt x="6612382" y="183646"/>
+                  </a:lnTo>
+                  <a:lnTo>
+                    <a:pt x="6682726" y="185050"/>
+                  </a:lnTo>
+                  <a:lnTo>
+                    <a:pt x="6753071" y="186444"/>
+                  </a:lnTo>
+                  <a:lnTo>
+                    <a:pt x="6823415" y="187829"/>
+                  </a:lnTo>
+                  <a:lnTo>
+                    <a:pt x="6893760" y="189205"/>
+                  </a:lnTo>
+                  <a:lnTo>
+                    <a:pt x="6964104" y="190572"/>
                   </a:lnTo>
                 </a:path>
               </a:pathLst>
@@ -4654,27 +4689,27 @@
         </p:sp>
         <p:sp>
           <p:nvSpPr>
-            <p:cNvPr id="26" name="pl26"/>
+            <p:cNvPr id="27" name="pl27"/>
             <p:cNvSpPr/>
             <p:nvPr/>
           </p:nvSpPr>
           <p:spPr>
             <a:xfrm>
-              <a:off x="817517" y="4727786"/>
-              <a:ext cx="7799693" cy="0"/>
+              <a:off x="887106" y="3100960"/>
+              <a:ext cx="7660515" cy="0"/>
             </a:xfrm>
             <a:custGeom>
               <a:avLst/>
               <a:pathLst>
-                <a:path w="7799693" h="0">
+                <a:path w="7660515" h="0">
                   <a:moveTo>
                     <a:pt x="0" y="0"/>
                   </a:moveTo>
                   <a:lnTo>
-                    <a:pt x="7799693" y="0"/>
-                  </a:lnTo>
-                  <a:lnTo>
-                    <a:pt x="7799693" y="0"/>
+                    <a:pt x="7660515" y="0"/>
+                  </a:lnTo>
+                  <a:lnTo>
+                    <a:pt x="7660515" y="0"/>
                   </a:lnTo>
                 </a:path>
               </a:pathLst>
@@ -4697,21 +4732,21 @@
         </p:sp>
         <p:sp>
           <p:nvSpPr>
-            <p:cNvPr id="27" name="pl27"/>
+            <p:cNvPr id="28" name="pl28"/>
             <p:cNvSpPr/>
             <p:nvPr/>
           </p:nvSpPr>
           <p:spPr>
             <a:xfrm>
-              <a:off x="4205975" y="2073503"/>
-              <a:ext cx="0" cy="3649639"/>
+              <a:off x="4215100" y="2143092"/>
+              <a:ext cx="0" cy="1317069"/>
             </a:xfrm>
             <a:custGeom>
               <a:avLst/>
               <a:pathLst>
-                <a:path w="0" h="3649639">
+                <a:path w="0" h="1317069">
                   <a:moveTo>
-                    <a:pt x="0" y="3649639"/>
+                    <a:pt x="0" y="1317069"/>
                   </a:moveTo>
                   <a:lnTo>
                     <a:pt x="0" y="0"/>
@@ -4740,21 +4775,21 @@
         </p:sp>
         <p:sp>
           <p:nvSpPr>
-            <p:cNvPr id="28" name="pl28"/>
+            <p:cNvPr id="29" name="pl29"/>
             <p:cNvSpPr/>
             <p:nvPr/>
           </p:nvSpPr>
           <p:spPr>
             <a:xfrm>
-              <a:off x="3016442" y="2073503"/>
-              <a:ext cx="0" cy="3649639"/>
+              <a:off x="3046793" y="2143092"/>
+              <a:ext cx="0" cy="1317069"/>
             </a:xfrm>
             <a:custGeom>
               <a:avLst/>
               <a:pathLst>
-                <a:path w="0" h="3649639">
+                <a:path w="0" h="1317069">
                   <a:moveTo>
-                    <a:pt x="0" y="3649639"/>
+                    <a:pt x="0" y="1317069"/>
                   </a:moveTo>
                   <a:lnTo>
                     <a:pt x="0" y="0"/>
@@ -4783,21 +4818,21 @@
         </p:sp>
         <p:sp>
           <p:nvSpPr>
-            <p:cNvPr id="29" name="pl29"/>
+            <p:cNvPr id="30" name="pl30"/>
             <p:cNvSpPr/>
             <p:nvPr/>
           </p:nvSpPr>
           <p:spPr>
             <a:xfrm>
-              <a:off x="5421760" y="2073503"/>
-              <a:ext cx="0" cy="3649639"/>
+              <a:off x="5409191" y="2143092"/>
+              <a:ext cx="0" cy="1317069"/>
             </a:xfrm>
             <a:custGeom>
               <a:avLst/>
               <a:pathLst>
-                <a:path w="0" h="3649639">
+                <a:path w="0" h="1317069">
                   <a:moveTo>
-                    <a:pt x="0" y="3649639"/>
+                    <a:pt x="0" y="1317069"/>
                   </a:moveTo>
                   <a:lnTo>
                     <a:pt x="0" y="0"/>
@@ -4826,13 +4861,13 @@
         </p:sp>
         <p:sp>
           <p:nvSpPr>
-            <p:cNvPr id="30" name="tx30"/>
+            <p:cNvPr id="31" name="tx31"/>
             <p:cNvSpPr/>
             <p:nvPr/>
           </p:nvSpPr>
           <p:spPr>
             <a:xfrm>
-              <a:off x="692708" y="5517199"/>
+              <a:off x="762297" y="3360243"/>
               <a:ext cx="62179" cy="80101"/>
             </a:xfrm>
             <a:prstGeom prst="rect">
@@ -4872,13 +4907,13 @@
         </p:sp>
         <p:sp>
           <p:nvSpPr>
-            <p:cNvPr id="31" name="tx31"/>
+            <p:cNvPr id="32" name="tx32"/>
             <p:cNvSpPr/>
             <p:nvPr/>
           </p:nvSpPr>
           <p:spPr>
             <a:xfrm>
-              <a:off x="692708" y="4687735"/>
+              <a:off x="762297" y="3060909"/>
               <a:ext cx="62179" cy="80101"/>
             </a:xfrm>
             <a:prstGeom prst="rect">
@@ -4918,13 +4953,13 @@
         </p:sp>
         <p:sp>
           <p:nvSpPr>
-            <p:cNvPr id="32" name="tx32"/>
+            <p:cNvPr id="33" name="tx33"/>
             <p:cNvSpPr/>
             <p:nvPr/>
           </p:nvSpPr>
           <p:spPr>
             <a:xfrm>
-              <a:off x="692708" y="3858272"/>
+              <a:off x="762297" y="2761575"/>
               <a:ext cx="62179" cy="80101"/>
             </a:xfrm>
             <a:prstGeom prst="rect">
@@ -4964,13 +4999,13 @@
         </p:sp>
         <p:sp>
           <p:nvSpPr>
-            <p:cNvPr id="33" name="tx33"/>
+            <p:cNvPr id="34" name="tx34"/>
             <p:cNvSpPr/>
             <p:nvPr/>
           </p:nvSpPr>
           <p:spPr>
             <a:xfrm>
-              <a:off x="692708" y="3028808"/>
+              <a:off x="762297" y="2462242"/>
               <a:ext cx="62179" cy="80101"/>
             </a:xfrm>
             <a:prstGeom prst="rect">
@@ -5010,13 +5045,13 @@
         </p:sp>
         <p:sp>
           <p:nvSpPr>
-            <p:cNvPr id="34" name="tx34"/>
+            <p:cNvPr id="35" name="tx35"/>
             <p:cNvSpPr/>
             <p:nvPr/>
           </p:nvSpPr>
           <p:spPr>
             <a:xfrm>
-              <a:off x="692708" y="2199345"/>
+              <a:off x="762297" y="2162908"/>
               <a:ext cx="62179" cy="80101"/>
             </a:xfrm>
             <a:prstGeom prst="rect">
@@ -5056,13 +5091,13 @@
         </p:sp>
         <p:sp>
           <p:nvSpPr>
-            <p:cNvPr id="35" name="tx35"/>
+            <p:cNvPr id="36" name="tx36"/>
             <p:cNvSpPr/>
             <p:nvPr/>
           </p:nvSpPr>
           <p:spPr>
             <a:xfrm>
-              <a:off x="1977028" y="5785772"/>
+              <a:off x="2024485" y="3522791"/>
               <a:ext cx="161574" cy="80101"/>
             </a:xfrm>
             <a:prstGeom prst="rect">
@@ -5102,13 +5137,13 @@
         </p:sp>
         <p:sp>
           <p:nvSpPr>
-            <p:cNvPr id="36" name="tx36"/>
+            <p:cNvPr id="37" name="tx37"/>
             <p:cNvSpPr/>
             <p:nvPr/>
           </p:nvSpPr>
           <p:spPr>
             <a:xfrm>
-              <a:off x="3728813" y="5785772"/>
+              <a:off x="3745012" y="3522791"/>
               <a:ext cx="161574" cy="80101"/>
             </a:xfrm>
             <a:prstGeom prst="rect">
@@ -5148,13 +5183,13 @@
         </p:sp>
         <p:sp>
           <p:nvSpPr>
-            <p:cNvPr id="37" name="tx37"/>
+            <p:cNvPr id="38" name="tx38"/>
             <p:cNvSpPr/>
             <p:nvPr/>
           </p:nvSpPr>
           <p:spPr>
             <a:xfrm>
-              <a:off x="5530296" y="5785772"/>
+              <a:off x="5515235" y="3522791"/>
               <a:ext cx="62179" cy="80101"/>
             </a:xfrm>
             <a:prstGeom prst="rect">
@@ -5194,13 +5229,13 @@
         </p:sp>
         <p:sp>
           <p:nvSpPr>
-            <p:cNvPr id="38" name="tx38"/>
+            <p:cNvPr id="39" name="tx39"/>
             <p:cNvSpPr/>
             <p:nvPr/>
           </p:nvSpPr>
           <p:spPr>
             <a:xfrm>
-              <a:off x="7250992" y="5785772"/>
+              <a:off x="7204672" y="3522791"/>
               <a:ext cx="124358" cy="80101"/>
             </a:xfrm>
             <a:prstGeom prst="rect">
@@ -5240,13 +5275,13 @@
         </p:sp>
         <p:sp>
           <p:nvSpPr>
-            <p:cNvPr id="39" name="tx39"/>
+            <p:cNvPr id="40" name="tx40"/>
             <p:cNvSpPr/>
             <p:nvPr/>
           </p:nvSpPr>
           <p:spPr>
             <a:xfrm>
-              <a:off x="1561815" y="5925448"/>
+              <a:off x="1561815" y="3662467"/>
               <a:ext cx="6311097" cy="100218"/>
             </a:xfrm>
             <a:prstGeom prst="rect">
@@ -5286,13 +5321,13 @@
         </p:sp>
         <p:sp>
           <p:nvSpPr>
-            <p:cNvPr id="40" name="tx40"/>
+            <p:cNvPr id="41" name="tx41"/>
             <p:cNvSpPr/>
             <p:nvPr/>
           </p:nvSpPr>
           <p:spPr>
             <a:xfrm rot="-5400000">
-              <a:off x="68446" y="3848213"/>
+              <a:off x="138035" y="2751517"/>
               <a:ext cx="1016904" cy="100218"/>
             </a:xfrm>
             <a:prstGeom prst="rect">
@@ -5332,13 +5367,13 @@
         </p:sp>
         <p:sp>
           <p:nvSpPr>
-            <p:cNvPr id="41" name="tx41"/>
+            <p:cNvPr id="42" name="tx42"/>
             <p:cNvSpPr/>
             <p:nvPr/>
           </p:nvSpPr>
           <p:spPr>
             <a:xfrm>
-              <a:off x="817517" y="1896563"/>
+              <a:off x="887106" y="1966152"/>
               <a:ext cx="6959864" cy="82021"/>
             </a:xfrm>
             <a:prstGeom prst="rect">
@@ -5378,13 +5413,3746 @@
         </p:sp>
         <p:sp>
           <p:nvSpPr>
-            <p:cNvPr id="42" name="tx42"/>
+            <p:cNvPr id="43" name="tx43"/>
             <p:cNvSpPr/>
             <p:nvPr/>
           </p:nvSpPr>
           <p:spPr>
             <a:xfrm>
-              <a:off x="817517" y="1669789"/>
+              <a:off x="887106" y="1739378"/>
+              <a:ext cx="2578882" cy="120152"/>
+            </a:xfrm>
+            <a:prstGeom prst="rect">
+              <a:avLst/>
+            </a:prstGeom>
+            <a:noFill/>
+          </p:spPr>
+          <p:txBody>
+            <a:bodyPr lIns="0" rIns="0" tIns="0" bIns="0" anchorCtr="1" anchor="ctr" wrap="none"/>
+            <a:lstStyle/>
+            <a:p>
+              <a:pPr algn="l" marL="0" marR="0" indent="0">
+                <a:lnSpc>
+                  <a:spcPts val="1320"/>
+                </a:lnSpc>
+                <a:spcBef>
+                  <a:spcPts val="0"/>
+                </a:spcBef>
+                <a:spcAft>
+                  <a:spcPts val="0"/>
+                </a:spcAft>
+              </a:pPr>
+              <a:r>
+                <a:rPr sz="1320">
+                  <a:solidFill>
+                    <a:srgbClr val="000000">
+                      <a:alpha val="100000"/>
+                    </a:srgbClr>
+                  </a:solidFill>
+                  <a:latin typeface="Helvetica"/>
+                  <a:cs typeface="Helvetica"/>
+                </a:rPr>
+                <a:t>Overall Hospitalization (Sensitivity)</a:t>
+              </a:r>
+            </a:p>
+          </p:txBody>
+        </p:sp>
+        <p:sp>
+          <p:nvSpPr>
+            <p:cNvPr id="44" name="pl44"/>
+            <p:cNvSpPr/>
+            <p:nvPr/>
+          </p:nvSpPr>
+          <p:spPr>
+            <a:xfrm>
+              <a:off x="887106" y="5444019"/>
+              <a:ext cx="7660515" cy="0"/>
+            </a:xfrm>
+            <a:custGeom>
+              <a:avLst/>
+              <a:pathLst>
+                <a:path w="7660515" h="0">
+                  <a:moveTo>
+                    <a:pt x="0" y="0"/>
+                  </a:moveTo>
+                  <a:lnTo>
+                    <a:pt x="7660515" y="0"/>
+                  </a:lnTo>
+                  <a:lnTo>
+                    <a:pt x="7660515" y="0"/>
+                  </a:lnTo>
+                </a:path>
+              </a:pathLst>
+            </a:custGeom>
+            <a:ln w="6775" cap="flat">
+              <a:solidFill>
+                <a:srgbClr val="EBEBEB">
+                  <a:alpha val="100000"/>
+                </a:srgbClr>
+              </a:solidFill>
+              <a:prstDash val="solid"/>
+              <a:round/>
+            </a:ln>
+          </p:spPr>
+          <p:txBody>
+            <a:bodyPr/>
+            <a:lstStyle/>
+            <a:p/>
+          </p:txBody>
+        </p:sp>
+        <p:sp>
+          <p:nvSpPr>
+            <p:cNvPr id="45" name="pl45"/>
+            <p:cNvSpPr/>
+            <p:nvPr/>
+          </p:nvSpPr>
+          <p:spPr>
+            <a:xfrm>
+              <a:off x="887106" y="5144686"/>
+              <a:ext cx="7660515" cy="0"/>
+            </a:xfrm>
+            <a:custGeom>
+              <a:avLst/>
+              <a:pathLst>
+                <a:path w="7660515" h="0">
+                  <a:moveTo>
+                    <a:pt x="0" y="0"/>
+                  </a:moveTo>
+                  <a:lnTo>
+                    <a:pt x="7660515" y="0"/>
+                  </a:lnTo>
+                  <a:lnTo>
+                    <a:pt x="7660515" y="0"/>
+                  </a:lnTo>
+                </a:path>
+              </a:pathLst>
+            </a:custGeom>
+            <a:ln w="6775" cap="flat">
+              <a:solidFill>
+                <a:srgbClr val="EBEBEB">
+                  <a:alpha val="100000"/>
+                </a:srgbClr>
+              </a:solidFill>
+              <a:prstDash val="solid"/>
+              <a:round/>
+            </a:ln>
+          </p:spPr>
+          <p:txBody>
+            <a:bodyPr/>
+            <a:lstStyle/>
+            <a:p/>
+          </p:txBody>
+        </p:sp>
+        <p:sp>
+          <p:nvSpPr>
+            <p:cNvPr id="46" name="pl46"/>
+            <p:cNvSpPr/>
+            <p:nvPr/>
+          </p:nvSpPr>
+          <p:spPr>
+            <a:xfrm>
+              <a:off x="887106" y="4845352"/>
+              <a:ext cx="7660515" cy="0"/>
+            </a:xfrm>
+            <a:custGeom>
+              <a:avLst/>
+              <a:pathLst>
+                <a:path w="7660515" h="0">
+                  <a:moveTo>
+                    <a:pt x="0" y="0"/>
+                  </a:moveTo>
+                  <a:lnTo>
+                    <a:pt x="7660515" y="0"/>
+                  </a:lnTo>
+                  <a:lnTo>
+                    <a:pt x="7660515" y="0"/>
+                  </a:lnTo>
+                </a:path>
+              </a:pathLst>
+            </a:custGeom>
+            <a:ln w="6775" cap="flat">
+              <a:solidFill>
+                <a:srgbClr val="EBEBEB">
+                  <a:alpha val="100000"/>
+                </a:srgbClr>
+              </a:solidFill>
+              <a:prstDash val="solid"/>
+              <a:round/>
+            </a:ln>
+          </p:spPr>
+          <p:txBody>
+            <a:bodyPr/>
+            <a:lstStyle/>
+            <a:p/>
+          </p:txBody>
+        </p:sp>
+        <p:sp>
+          <p:nvSpPr>
+            <p:cNvPr id="47" name="pl47"/>
+            <p:cNvSpPr/>
+            <p:nvPr/>
+          </p:nvSpPr>
+          <p:spPr>
+            <a:xfrm>
+              <a:off x="887106" y="4546018"/>
+              <a:ext cx="7660515" cy="0"/>
+            </a:xfrm>
+            <a:custGeom>
+              <a:avLst/>
+              <a:pathLst>
+                <a:path w="7660515" h="0">
+                  <a:moveTo>
+                    <a:pt x="0" y="0"/>
+                  </a:moveTo>
+                  <a:lnTo>
+                    <a:pt x="7660515" y="0"/>
+                  </a:lnTo>
+                  <a:lnTo>
+                    <a:pt x="7660515" y="0"/>
+                  </a:lnTo>
+                </a:path>
+              </a:pathLst>
+            </a:custGeom>
+            <a:ln w="6775" cap="flat">
+              <a:solidFill>
+                <a:srgbClr val="EBEBEB">
+                  <a:alpha val="100000"/>
+                </a:srgbClr>
+              </a:solidFill>
+              <a:prstDash val="solid"/>
+              <a:round/>
+            </a:ln>
+          </p:spPr>
+          <p:txBody>
+            <a:bodyPr/>
+            <a:lstStyle/>
+            <a:p/>
+          </p:txBody>
+        </p:sp>
+        <p:sp>
+          <p:nvSpPr>
+            <p:cNvPr id="48" name="pl48"/>
+            <p:cNvSpPr/>
+            <p:nvPr/>
+          </p:nvSpPr>
+          <p:spPr>
+            <a:xfrm>
+              <a:off x="1675141" y="4336484"/>
+              <a:ext cx="0" cy="1317069"/>
+            </a:xfrm>
+            <a:custGeom>
+              <a:avLst/>
+              <a:pathLst>
+                <a:path w="0" h="1317069">
+                  <a:moveTo>
+                    <a:pt x="0" y="1317069"/>
+                  </a:moveTo>
+                  <a:lnTo>
+                    <a:pt x="0" y="0"/>
+                  </a:lnTo>
+                  <a:lnTo>
+                    <a:pt x="0" y="0"/>
+                  </a:lnTo>
+                </a:path>
+              </a:pathLst>
+            </a:custGeom>
+            <a:ln w="6775" cap="flat">
+              <a:solidFill>
+                <a:srgbClr val="EBEBEB">
+                  <a:alpha val="100000"/>
+                </a:srgbClr>
+              </a:solidFill>
+              <a:prstDash val="solid"/>
+              <a:round/>
+            </a:ln>
+          </p:spPr>
+          <p:txBody>
+            <a:bodyPr/>
+            <a:lstStyle/>
+            <a:p/>
+          </p:txBody>
+        </p:sp>
+        <p:sp>
+          <p:nvSpPr>
+            <p:cNvPr id="49" name="pl49"/>
+            <p:cNvSpPr/>
+            <p:nvPr/>
+          </p:nvSpPr>
+          <p:spPr>
+            <a:xfrm>
+              <a:off x="2535404" y="4336484"/>
+              <a:ext cx="0" cy="1317069"/>
+            </a:xfrm>
+            <a:custGeom>
+              <a:avLst/>
+              <a:pathLst>
+                <a:path w="0" h="1317069">
+                  <a:moveTo>
+                    <a:pt x="0" y="1317069"/>
+                  </a:moveTo>
+                  <a:lnTo>
+                    <a:pt x="0" y="0"/>
+                  </a:lnTo>
+                  <a:lnTo>
+                    <a:pt x="0" y="0"/>
+                  </a:lnTo>
+                </a:path>
+              </a:pathLst>
+            </a:custGeom>
+            <a:ln w="6775" cap="flat">
+              <a:solidFill>
+                <a:srgbClr val="EBEBEB">
+                  <a:alpha val="100000"/>
+                </a:srgbClr>
+              </a:solidFill>
+              <a:prstDash val="solid"/>
+              <a:round/>
+            </a:ln>
+          </p:spPr>
+          <p:txBody>
+            <a:bodyPr/>
+            <a:lstStyle/>
+            <a:p/>
+          </p:txBody>
+        </p:sp>
+        <p:sp>
+          <p:nvSpPr>
+            <p:cNvPr id="50" name="pl50"/>
+            <p:cNvSpPr/>
+            <p:nvPr/>
+          </p:nvSpPr>
+          <p:spPr>
+            <a:xfrm>
+              <a:off x="3395667" y="4336484"/>
+              <a:ext cx="0" cy="1317069"/>
+            </a:xfrm>
+            <a:custGeom>
+              <a:avLst/>
+              <a:pathLst>
+                <a:path w="0" h="1317069">
+                  <a:moveTo>
+                    <a:pt x="0" y="1317069"/>
+                  </a:moveTo>
+                  <a:lnTo>
+                    <a:pt x="0" y="0"/>
+                  </a:lnTo>
+                  <a:lnTo>
+                    <a:pt x="0" y="0"/>
+                  </a:lnTo>
+                </a:path>
+              </a:pathLst>
+            </a:custGeom>
+            <a:ln w="6775" cap="flat">
+              <a:solidFill>
+                <a:srgbClr val="EBEBEB">
+                  <a:alpha val="100000"/>
+                </a:srgbClr>
+              </a:solidFill>
+              <a:prstDash val="solid"/>
+              <a:round/>
+            </a:ln>
+          </p:spPr>
+          <p:txBody>
+            <a:bodyPr/>
+            <a:lstStyle/>
+            <a:p/>
+          </p:txBody>
+        </p:sp>
+        <p:sp>
+          <p:nvSpPr>
+            <p:cNvPr id="51" name="pl51"/>
+            <p:cNvSpPr/>
+            <p:nvPr/>
+          </p:nvSpPr>
+          <p:spPr>
+            <a:xfrm>
+              <a:off x="4255930" y="4336484"/>
+              <a:ext cx="0" cy="1317069"/>
+            </a:xfrm>
+            <a:custGeom>
+              <a:avLst/>
+              <a:pathLst>
+                <a:path w="0" h="1317069">
+                  <a:moveTo>
+                    <a:pt x="0" y="1317069"/>
+                  </a:moveTo>
+                  <a:lnTo>
+                    <a:pt x="0" y="0"/>
+                  </a:lnTo>
+                  <a:lnTo>
+                    <a:pt x="0" y="0"/>
+                  </a:lnTo>
+                </a:path>
+              </a:pathLst>
+            </a:custGeom>
+            <a:ln w="6775" cap="flat">
+              <a:solidFill>
+                <a:srgbClr val="EBEBEB">
+                  <a:alpha val="100000"/>
+                </a:srgbClr>
+              </a:solidFill>
+              <a:prstDash val="solid"/>
+              <a:round/>
+            </a:ln>
+          </p:spPr>
+          <p:txBody>
+            <a:bodyPr/>
+            <a:lstStyle/>
+            <a:p/>
+          </p:txBody>
+        </p:sp>
+        <p:sp>
+          <p:nvSpPr>
+            <p:cNvPr id="52" name="pl52"/>
+            <p:cNvSpPr/>
+            <p:nvPr/>
+          </p:nvSpPr>
+          <p:spPr>
+            <a:xfrm>
+              <a:off x="5116193" y="4336484"/>
+              <a:ext cx="0" cy="1317069"/>
+            </a:xfrm>
+            <a:custGeom>
+              <a:avLst/>
+              <a:pathLst>
+                <a:path w="0" h="1317069">
+                  <a:moveTo>
+                    <a:pt x="0" y="1317069"/>
+                  </a:moveTo>
+                  <a:lnTo>
+                    <a:pt x="0" y="0"/>
+                  </a:lnTo>
+                  <a:lnTo>
+                    <a:pt x="0" y="0"/>
+                  </a:lnTo>
+                </a:path>
+              </a:pathLst>
+            </a:custGeom>
+            <a:ln w="6775" cap="flat">
+              <a:solidFill>
+                <a:srgbClr val="EBEBEB">
+                  <a:alpha val="100000"/>
+                </a:srgbClr>
+              </a:solidFill>
+              <a:prstDash val="solid"/>
+              <a:round/>
+            </a:ln>
+          </p:spPr>
+          <p:txBody>
+            <a:bodyPr/>
+            <a:lstStyle/>
+            <a:p/>
+          </p:txBody>
+        </p:sp>
+        <p:sp>
+          <p:nvSpPr>
+            <p:cNvPr id="53" name="pl53"/>
+            <p:cNvSpPr/>
+            <p:nvPr/>
+          </p:nvSpPr>
+          <p:spPr>
+            <a:xfrm>
+              <a:off x="5976457" y="4336484"/>
+              <a:ext cx="0" cy="1317069"/>
+            </a:xfrm>
+            <a:custGeom>
+              <a:avLst/>
+              <a:pathLst>
+                <a:path w="0" h="1317069">
+                  <a:moveTo>
+                    <a:pt x="0" y="1317069"/>
+                  </a:moveTo>
+                  <a:lnTo>
+                    <a:pt x="0" y="0"/>
+                  </a:lnTo>
+                  <a:lnTo>
+                    <a:pt x="0" y="0"/>
+                  </a:lnTo>
+                </a:path>
+              </a:pathLst>
+            </a:custGeom>
+            <a:ln w="6775" cap="flat">
+              <a:solidFill>
+                <a:srgbClr val="EBEBEB">
+                  <a:alpha val="100000"/>
+                </a:srgbClr>
+              </a:solidFill>
+              <a:prstDash val="solid"/>
+              <a:round/>
+            </a:ln>
+          </p:spPr>
+          <p:txBody>
+            <a:bodyPr/>
+            <a:lstStyle/>
+            <a:p/>
+          </p:txBody>
+        </p:sp>
+        <p:sp>
+          <p:nvSpPr>
+            <p:cNvPr id="54" name="pl54"/>
+            <p:cNvSpPr/>
+            <p:nvPr/>
+          </p:nvSpPr>
+          <p:spPr>
+            <a:xfrm>
+              <a:off x="6836720" y="4336484"/>
+              <a:ext cx="0" cy="1317069"/>
+            </a:xfrm>
+            <a:custGeom>
+              <a:avLst/>
+              <a:pathLst>
+                <a:path w="0" h="1317069">
+                  <a:moveTo>
+                    <a:pt x="0" y="1317069"/>
+                  </a:moveTo>
+                  <a:lnTo>
+                    <a:pt x="0" y="0"/>
+                  </a:lnTo>
+                  <a:lnTo>
+                    <a:pt x="0" y="0"/>
+                  </a:lnTo>
+                </a:path>
+              </a:pathLst>
+            </a:custGeom>
+            <a:ln w="6775" cap="flat">
+              <a:solidFill>
+                <a:srgbClr val="EBEBEB">
+                  <a:alpha val="100000"/>
+                </a:srgbClr>
+              </a:solidFill>
+              <a:prstDash val="solid"/>
+              <a:round/>
+            </a:ln>
+          </p:spPr>
+          <p:txBody>
+            <a:bodyPr/>
+            <a:lstStyle/>
+            <a:p/>
+          </p:txBody>
+        </p:sp>
+        <p:sp>
+          <p:nvSpPr>
+            <p:cNvPr id="55" name="pl55"/>
+            <p:cNvSpPr/>
+            <p:nvPr/>
+          </p:nvSpPr>
+          <p:spPr>
+            <a:xfrm>
+              <a:off x="7696983" y="4336484"/>
+              <a:ext cx="0" cy="1317069"/>
+            </a:xfrm>
+            <a:custGeom>
+              <a:avLst/>
+              <a:pathLst>
+                <a:path w="0" h="1317069">
+                  <a:moveTo>
+                    <a:pt x="0" y="1317069"/>
+                  </a:moveTo>
+                  <a:lnTo>
+                    <a:pt x="0" y="0"/>
+                  </a:lnTo>
+                  <a:lnTo>
+                    <a:pt x="0" y="0"/>
+                  </a:lnTo>
+                </a:path>
+              </a:pathLst>
+            </a:custGeom>
+            <a:ln w="6775" cap="flat">
+              <a:solidFill>
+                <a:srgbClr val="EBEBEB">
+                  <a:alpha val="100000"/>
+                </a:srgbClr>
+              </a:solidFill>
+              <a:prstDash val="solid"/>
+              <a:round/>
+            </a:ln>
+          </p:spPr>
+          <p:txBody>
+            <a:bodyPr/>
+            <a:lstStyle/>
+            <a:p/>
+          </p:txBody>
+        </p:sp>
+        <p:sp>
+          <p:nvSpPr>
+            <p:cNvPr id="56" name="pl56"/>
+            <p:cNvSpPr/>
+            <p:nvPr/>
+          </p:nvSpPr>
+          <p:spPr>
+            <a:xfrm>
+              <a:off x="887106" y="5593686"/>
+              <a:ext cx="7660515" cy="0"/>
+            </a:xfrm>
+            <a:custGeom>
+              <a:avLst/>
+              <a:pathLst>
+                <a:path w="7660515" h="0">
+                  <a:moveTo>
+                    <a:pt x="0" y="0"/>
+                  </a:moveTo>
+                  <a:lnTo>
+                    <a:pt x="7660515" y="0"/>
+                  </a:lnTo>
+                  <a:lnTo>
+                    <a:pt x="7660515" y="0"/>
+                  </a:lnTo>
+                </a:path>
+              </a:pathLst>
+            </a:custGeom>
+            <a:ln w="13550" cap="flat">
+              <a:solidFill>
+                <a:srgbClr val="EBEBEB">
+                  <a:alpha val="100000"/>
+                </a:srgbClr>
+              </a:solidFill>
+              <a:prstDash val="solid"/>
+              <a:round/>
+            </a:ln>
+          </p:spPr>
+          <p:txBody>
+            <a:bodyPr/>
+            <a:lstStyle/>
+            <a:p/>
+          </p:txBody>
+        </p:sp>
+        <p:sp>
+          <p:nvSpPr>
+            <p:cNvPr id="57" name="pl57"/>
+            <p:cNvSpPr/>
+            <p:nvPr/>
+          </p:nvSpPr>
+          <p:spPr>
+            <a:xfrm>
+              <a:off x="887106" y="5294352"/>
+              <a:ext cx="7660515" cy="0"/>
+            </a:xfrm>
+            <a:custGeom>
+              <a:avLst/>
+              <a:pathLst>
+                <a:path w="7660515" h="0">
+                  <a:moveTo>
+                    <a:pt x="0" y="0"/>
+                  </a:moveTo>
+                  <a:lnTo>
+                    <a:pt x="7660515" y="0"/>
+                  </a:lnTo>
+                  <a:lnTo>
+                    <a:pt x="7660515" y="0"/>
+                  </a:lnTo>
+                </a:path>
+              </a:pathLst>
+            </a:custGeom>
+            <a:ln w="13550" cap="flat">
+              <a:solidFill>
+                <a:srgbClr val="EBEBEB">
+                  <a:alpha val="100000"/>
+                </a:srgbClr>
+              </a:solidFill>
+              <a:prstDash val="solid"/>
+              <a:round/>
+            </a:ln>
+          </p:spPr>
+          <p:txBody>
+            <a:bodyPr/>
+            <a:lstStyle/>
+            <a:p/>
+          </p:txBody>
+        </p:sp>
+        <p:sp>
+          <p:nvSpPr>
+            <p:cNvPr id="58" name="pl58"/>
+            <p:cNvSpPr/>
+            <p:nvPr/>
+          </p:nvSpPr>
+          <p:spPr>
+            <a:xfrm>
+              <a:off x="887106" y="4995019"/>
+              <a:ext cx="7660515" cy="0"/>
+            </a:xfrm>
+            <a:custGeom>
+              <a:avLst/>
+              <a:pathLst>
+                <a:path w="7660515" h="0">
+                  <a:moveTo>
+                    <a:pt x="0" y="0"/>
+                  </a:moveTo>
+                  <a:lnTo>
+                    <a:pt x="7660515" y="0"/>
+                  </a:lnTo>
+                  <a:lnTo>
+                    <a:pt x="7660515" y="0"/>
+                  </a:lnTo>
+                </a:path>
+              </a:pathLst>
+            </a:custGeom>
+            <a:ln w="13550" cap="flat">
+              <a:solidFill>
+                <a:srgbClr val="EBEBEB">
+                  <a:alpha val="100000"/>
+                </a:srgbClr>
+              </a:solidFill>
+              <a:prstDash val="solid"/>
+              <a:round/>
+            </a:ln>
+          </p:spPr>
+          <p:txBody>
+            <a:bodyPr/>
+            <a:lstStyle/>
+            <a:p/>
+          </p:txBody>
+        </p:sp>
+        <p:sp>
+          <p:nvSpPr>
+            <p:cNvPr id="59" name="pl59"/>
+            <p:cNvSpPr/>
+            <p:nvPr/>
+          </p:nvSpPr>
+          <p:spPr>
+            <a:xfrm>
+              <a:off x="887106" y="4695685"/>
+              <a:ext cx="7660515" cy="0"/>
+            </a:xfrm>
+            <a:custGeom>
+              <a:avLst/>
+              <a:pathLst>
+                <a:path w="7660515" h="0">
+                  <a:moveTo>
+                    <a:pt x="0" y="0"/>
+                  </a:moveTo>
+                  <a:lnTo>
+                    <a:pt x="7660515" y="0"/>
+                  </a:lnTo>
+                  <a:lnTo>
+                    <a:pt x="7660515" y="0"/>
+                  </a:lnTo>
+                </a:path>
+              </a:pathLst>
+            </a:custGeom>
+            <a:ln w="13550" cap="flat">
+              <a:solidFill>
+                <a:srgbClr val="EBEBEB">
+                  <a:alpha val="100000"/>
+                </a:srgbClr>
+              </a:solidFill>
+              <a:prstDash val="solid"/>
+              <a:round/>
+            </a:ln>
+          </p:spPr>
+          <p:txBody>
+            <a:bodyPr/>
+            <a:lstStyle/>
+            <a:p/>
+          </p:txBody>
+        </p:sp>
+        <p:sp>
+          <p:nvSpPr>
+            <p:cNvPr id="60" name="pl60"/>
+            <p:cNvSpPr/>
+            <p:nvPr/>
+          </p:nvSpPr>
+          <p:spPr>
+            <a:xfrm>
+              <a:off x="887106" y="4396351"/>
+              <a:ext cx="7660515" cy="0"/>
+            </a:xfrm>
+            <a:custGeom>
+              <a:avLst/>
+              <a:pathLst>
+                <a:path w="7660515" h="0">
+                  <a:moveTo>
+                    <a:pt x="0" y="0"/>
+                  </a:moveTo>
+                  <a:lnTo>
+                    <a:pt x="7660515" y="0"/>
+                  </a:lnTo>
+                  <a:lnTo>
+                    <a:pt x="7660515" y="0"/>
+                  </a:lnTo>
+                </a:path>
+              </a:pathLst>
+            </a:custGeom>
+            <a:ln w="13550" cap="flat">
+              <a:solidFill>
+                <a:srgbClr val="EBEBEB">
+                  <a:alpha val="100000"/>
+                </a:srgbClr>
+              </a:solidFill>
+              <a:prstDash val="solid"/>
+              <a:round/>
+            </a:ln>
+          </p:spPr>
+          <p:txBody>
+            <a:bodyPr/>
+            <a:lstStyle/>
+            <a:p/>
+          </p:txBody>
+        </p:sp>
+        <p:sp>
+          <p:nvSpPr>
+            <p:cNvPr id="61" name="pl61"/>
+            <p:cNvSpPr/>
+            <p:nvPr/>
+          </p:nvSpPr>
+          <p:spPr>
+            <a:xfrm>
+              <a:off x="1245010" y="4336484"/>
+              <a:ext cx="0" cy="1317069"/>
+            </a:xfrm>
+            <a:custGeom>
+              <a:avLst/>
+              <a:pathLst>
+                <a:path w="0" h="1317069">
+                  <a:moveTo>
+                    <a:pt x="0" y="1317069"/>
+                  </a:moveTo>
+                  <a:lnTo>
+                    <a:pt x="0" y="0"/>
+                  </a:lnTo>
+                  <a:lnTo>
+                    <a:pt x="0" y="0"/>
+                  </a:lnTo>
+                </a:path>
+              </a:pathLst>
+            </a:custGeom>
+            <a:ln w="13550" cap="flat">
+              <a:solidFill>
+                <a:srgbClr val="EBEBEB">
+                  <a:alpha val="100000"/>
+                </a:srgbClr>
+              </a:solidFill>
+              <a:prstDash val="solid"/>
+              <a:round/>
+            </a:ln>
+          </p:spPr>
+          <p:txBody>
+            <a:bodyPr/>
+            <a:lstStyle/>
+            <a:p/>
+          </p:txBody>
+        </p:sp>
+        <p:sp>
+          <p:nvSpPr>
+            <p:cNvPr id="62" name="pl62"/>
+            <p:cNvSpPr/>
+            <p:nvPr/>
+          </p:nvSpPr>
+          <p:spPr>
+            <a:xfrm>
+              <a:off x="2105273" y="4336484"/>
+              <a:ext cx="0" cy="1317069"/>
+            </a:xfrm>
+            <a:custGeom>
+              <a:avLst/>
+              <a:pathLst>
+                <a:path w="0" h="1317069">
+                  <a:moveTo>
+                    <a:pt x="0" y="1317069"/>
+                  </a:moveTo>
+                  <a:lnTo>
+                    <a:pt x="0" y="0"/>
+                  </a:lnTo>
+                  <a:lnTo>
+                    <a:pt x="0" y="0"/>
+                  </a:lnTo>
+                </a:path>
+              </a:pathLst>
+            </a:custGeom>
+            <a:ln w="13550" cap="flat">
+              <a:solidFill>
+                <a:srgbClr val="EBEBEB">
+                  <a:alpha val="100000"/>
+                </a:srgbClr>
+              </a:solidFill>
+              <a:prstDash val="solid"/>
+              <a:round/>
+            </a:ln>
+          </p:spPr>
+          <p:txBody>
+            <a:bodyPr/>
+            <a:lstStyle/>
+            <a:p/>
+          </p:txBody>
+        </p:sp>
+        <p:sp>
+          <p:nvSpPr>
+            <p:cNvPr id="63" name="pl63"/>
+            <p:cNvSpPr/>
+            <p:nvPr/>
+          </p:nvSpPr>
+          <p:spPr>
+            <a:xfrm>
+              <a:off x="2965536" y="4336484"/>
+              <a:ext cx="0" cy="1317069"/>
+            </a:xfrm>
+            <a:custGeom>
+              <a:avLst/>
+              <a:pathLst>
+                <a:path w="0" h="1317069">
+                  <a:moveTo>
+                    <a:pt x="0" y="1317069"/>
+                  </a:moveTo>
+                  <a:lnTo>
+                    <a:pt x="0" y="0"/>
+                  </a:lnTo>
+                  <a:lnTo>
+                    <a:pt x="0" y="0"/>
+                  </a:lnTo>
+                </a:path>
+              </a:pathLst>
+            </a:custGeom>
+            <a:ln w="13550" cap="flat">
+              <a:solidFill>
+                <a:srgbClr val="EBEBEB">
+                  <a:alpha val="100000"/>
+                </a:srgbClr>
+              </a:solidFill>
+              <a:prstDash val="solid"/>
+              <a:round/>
+            </a:ln>
+          </p:spPr>
+          <p:txBody>
+            <a:bodyPr/>
+            <a:lstStyle/>
+            <a:p/>
+          </p:txBody>
+        </p:sp>
+        <p:sp>
+          <p:nvSpPr>
+            <p:cNvPr id="64" name="pl64"/>
+            <p:cNvSpPr/>
+            <p:nvPr/>
+          </p:nvSpPr>
+          <p:spPr>
+            <a:xfrm>
+              <a:off x="3825799" y="4336484"/>
+              <a:ext cx="0" cy="1317069"/>
+            </a:xfrm>
+            <a:custGeom>
+              <a:avLst/>
+              <a:pathLst>
+                <a:path w="0" h="1317069">
+                  <a:moveTo>
+                    <a:pt x="0" y="1317069"/>
+                  </a:moveTo>
+                  <a:lnTo>
+                    <a:pt x="0" y="0"/>
+                  </a:lnTo>
+                  <a:lnTo>
+                    <a:pt x="0" y="0"/>
+                  </a:lnTo>
+                </a:path>
+              </a:pathLst>
+            </a:custGeom>
+            <a:ln w="13550" cap="flat">
+              <a:solidFill>
+                <a:srgbClr val="EBEBEB">
+                  <a:alpha val="100000"/>
+                </a:srgbClr>
+              </a:solidFill>
+              <a:prstDash val="solid"/>
+              <a:round/>
+            </a:ln>
+          </p:spPr>
+          <p:txBody>
+            <a:bodyPr/>
+            <a:lstStyle/>
+            <a:p/>
+          </p:txBody>
+        </p:sp>
+        <p:sp>
+          <p:nvSpPr>
+            <p:cNvPr id="65" name="pl65"/>
+            <p:cNvSpPr/>
+            <p:nvPr/>
+          </p:nvSpPr>
+          <p:spPr>
+            <a:xfrm>
+              <a:off x="4686062" y="4336484"/>
+              <a:ext cx="0" cy="1317069"/>
+            </a:xfrm>
+            <a:custGeom>
+              <a:avLst/>
+              <a:pathLst>
+                <a:path w="0" h="1317069">
+                  <a:moveTo>
+                    <a:pt x="0" y="1317069"/>
+                  </a:moveTo>
+                  <a:lnTo>
+                    <a:pt x="0" y="0"/>
+                  </a:lnTo>
+                  <a:lnTo>
+                    <a:pt x="0" y="0"/>
+                  </a:lnTo>
+                </a:path>
+              </a:pathLst>
+            </a:custGeom>
+            <a:ln w="13550" cap="flat">
+              <a:solidFill>
+                <a:srgbClr val="EBEBEB">
+                  <a:alpha val="100000"/>
+                </a:srgbClr>
+              </a:solidFill>
+              <a:prstDash val="solid"/>
+              <a:round/>
+            </a:ln>
+          </p:spPr>
+          <p:txBody>
+            <a:bodyPr/>
+            <a:lstStyle/>
+            <a:p/>
+          </p:txBody>
+        </p:sp>
+        <p:sp>
+          <p:nvSpPr>
+            <p:cNvPr id="66" name="pl66"/>
+            <p:cNvSpPr/>
+            <p:nvPr/>
+          </p:nvSpPr>
+          <p:spPr>
+            <a:xfrm>
+              <a:off x="5546325" y="4336484"/>
+              <a:ext cx="0" cy="1317069"/>
+            </a:xfrm>
+            <a:custGeom>
+              <a:avLst/>
+              <a:pathLst>
+                <a:path w="0" h="1317069">
+                  <a:moveTo>
+                    <a:pt x="0" y="1317069"/>
+                  </a:moveTo>
+                  <a:lnTo>
+                    <a:pt x="0" y="0"/>
+                  </a:lnTo>
+                  <a:lnTo>
+                    <a:pt x="0" y="0"/>
+                  </a:lnTo>
+                </a:path>
+              </a:pathLst>
+            </a:custGeom>
+            <a:ln w="13550" cap="flat">
+              <a:solidFill>
+                <a:srgbClr val="EBEBEB">
+                  <a:alpha val="100000"/>
+                </a:srgbClr>
+              </a:solidFill>
+              <a:prstDash val="solid"/>
+              <a:round/>
+            </a:ln>
+          </p:spPr>
+          <p:txBody>
+            <a:bodyPr/>
+            <a:lstStyle/>
+            <a:p/>
+          </p:txBody>
+        </p:sp>
+        <p:sp>
+          <p:nvSpPr>
+            <p:cNvPr id="67" name="pl67"/>
+            <p:cNvSpPr/>
+            <p:nvPr/>
+          </p:nvSpPr>
+          <p:spPr>
+            <a:xfrm>
+              <a:off x="6406588" y="4336484"/>
+              <a:ext cx="0" cy="1317069"/>
+            </a:xfrm>
+            <a:custGeom>
+              <a:avLst/>
+              <a:pathLst>
+                <a:path w="0" h="1317069">
+                  <a:moveTo>
+                    <a:pt x="0" y="1317069"/>
+                  </a:moveTo>
+                  <a:lnTo>
+                    <a:pt x="0" y="0"/>
+                  </a:lnTo>
+                  <a:lnTo>
+                    <a:pt x="0" y="0"/>
+                  </a:lnTo>
+                </a:path>
+              </a:pathLst>
+            </a:custGeom>
+            <a:ln w="13550" cap="flat">
+              <a:solidFill>
+                <a:srgbClr val="EBEBEB">
+                  <a:alpha val="100000"/>
+                </a:srgbClr>
+              </a:solidFill>
+              <a:prstDash val="solid"/>
+              <a:round/>
+            </a:ln>
+          </p:spPr>
+          <p:txBody>
+            <a:bodyPr/>
+            <a:lstStyle/>
+            <a:p/>
+          </p:txBody>
+        </p:sp>
+        <p:sp>
+          <p:nvSpPr>
+            <p:cNvPr id="68" name="pl68"/>
+            <p:cNvSpPr/>
+            <p:nvPr/>
+          </p:nvSpPr>
+          <p:spPr>
+            <a:xfrm>
+              <a:off x="7266851" y="4336484"/>
+              <a:ext cx="0" cy="1317069"/>
+            </a:xfrm>
+            <a:custGeom>
+              <a:avLst/>
+              <a:pathLst>
+                <a:path w="0" h="1317069">
+                  <a:moveTo>
+                    <a:pt x="0" y="1317069"/>
+                  </a:moveTo>
+                  <a:lnTo>
+                    <a:pt x="0" y="0"/>
+                  </a:lnTo>
+                  <a:lnTo>
+                    <a:pt x="0" y="0"/>
+                  </a:lnTo>
+                </a:path>
+              </a:pathLst>
+            </a:custGeom>
+            <a:ln w="13550" cap="flat">
+              <a:solidFill>
+                <a:srgbClr val="EBEBEB">
+                  <a:alpha val="100000"/>
+                </a:srgbClr>
+              </a:solidFill>
+              <a:prstDash val="solid"/>
+              <a:round/>
+            </a:ln>
+          </p:spPr>
+          <p:txBody>
+            <a:bodyPr/>
+            <a:lstStyle/>
+            <a:p/>
+          </p:txBody>
+        </p:sp>
+        <p:sp>
+          <p:nvSpPr>
+            <p:cNvPr id="69" name="pl69"/>
+            <p:cNvSpPr/>
+            <p:nvPr/>
+          </p:nvSpPr>
+          <p:spPr>
+            <a:xfrm>
+              <a:off x="8127114" y="4336484"/>
+              <a:ext cx="0" cy="1317069"/>
+            </a:xfrm>
+            <a:custGeom>
+              <a:avLst/>
+              <a:pathLst>
+                <a:path w="0" h="1317069">
+                  <a:moveTo>
+                    <a:pt x="0" y="1317069"/>
+                  </a:moveTo>
+                  <a:lnTo>
+                    <a:pt x="0" y="0"/>
+                  </a:lnTo>
+                  <a:lnTo>
+                    <a:pt x="0" y="0"/>
+                  </a:lnTo>
+                </a:path>
+              </a:pathLst>
+            </a:custGeom>
+            <a:ln w="13550" cap="flat">
+              <a:solidFill>
+                <a:srgbClr val="EBEBEB">
+                  <a:alpha val="100000"/>
+                </a:srgbClr>
+              </a:solidFill>
+              <a:prstDash val="solid"/>
+              <a:round/>
+            </a:ln>
+          </p:spPr>
+          <p:txBody>
+            <a:bodyPr/>
+            <a:lstStyle/>
+            <a:p/>
+          </p:txBody>
+        </p:sp>
+        <p:sp>
+          <p:nvSpPr>
+            <p:cNvPr id="70" name="pg70"/>
+            <p:cNvSpPr/>
+            <p:nvPr/>
+          </p:nvSpPr>
+          <p:spPr>
+            <a:xfrm>
+              <a:off x="1235312" y="5082204"/>
+              <a:ext cx="6964104" cy="365250"/>
+            </a:xfrm>
+            <a:custGeom>
+              <a:avLst/>
+              <a:pathLst>
+                <a:path w="6964104" h="365250">
+                  <a:moveTo>
+                    <a:pt x="0" y="0"/>
+                  </a:moveTo>
+                  <a:lnTo>
+                    <a:pt x="70344" y="6428"/>
+                  </a:lnTo>
+                  <a:lnTo>
+                    <a:pt x="140688" y="12775"/>
+                  </a:lnTo>
+                  <a:lnTo>
+                    <a:pt x="211033" y="19043"/>
+                  </a:lnTo>
+                  <a:lnTo>
+                    <a:pt x="281377" y="25232"/>
+                  </a:lnTo>
+                  <a:lnTo>
+                    <a:pt x="351722" y="31343"/>
+                  </a:lnTo>
+                  <a:lnTo>
+                    <a:pt x="422066" y="37378"/>
+                  </a:lnTo>
+                  <a:lnTo>
+                    <a:pt x="492411" y="43336"/>
+                  </a:lnTo>
+                  <a:lnTo>
+                    <a:pt x="562755" y="49220"/>
+                  </a:lnTo>
+                  <a:lnTo>
+                    <a:pt x="633100" y="55030"/>
+                  </a:lnTo>
+                  <a:lnTo>
+                    <a:pt x="703444" y="60766"/>
+                  </a:lnTo>
+                  <a:lnTo>
+                    <a:pt x="773789" y="66431"/>
+                  </a:lnTo>
+                  <a:lnTo>
+                    <a:pt x="844133" y="72024"/>
+                  </a:lnTo>
+                  <a:lnTo>
+                    <a:pt x="914478" y="77547"/>
+                  </a:lnTo>
+                  <a:lnTo>
+                    <a:pt x="984822" y="83001"/>
+                  </a:lnTo>
+                  <a:lnTo>
+                    <a:pt x="1055167" y="88386"/>
+                  </a:lnTo>
+                  <a:lnTo>
+                    <a:pt x="1125511" y="93704"/>
+                  </a:lnTo>
+                  <a:lnTo>
+                    <a:pt x="1195856" y="98954"/>
+                  </a:lnTo>
+                  <a:lnTo>
+                    <a:pt x="1266200" y="104139"/>
+                  </a:lnTo>
+                  <a:lnTo>
+                    <a:pt x="1336545" y="109258"/>
+                  </a:lnTo>
+                  <a:lnTo>
+                    <a:pt x="1406889" y="114314"/>
+                  </a:lnTo>
+                  <a:lnTo>
+                    <a:pt x="1477234" y="119305"/>
+                  </a:lnTo>
+                  <a:lnTo>
+                    <a:pt x="1547578" y="124234"/>
+                  </a:lnTo>
+                  <a:lnTo>
+                    <a:pt x="1617923" y="129101"/>
+                  </a:lnTo>
+                  <a:lnTo>
+                    <a:pt x="1688267" y="133907"/>
+                  </a:lnTo>
+                  <a:lnTo>
+                    <a:pt x="1758612" y="138652"/>
+                  </a:lnTo>
+                  <a:lnTo>
+                    <a:pt x="1828956" y="143338"/>
+                  </a:lnTo>
+                  <a:lnTo>
+                    <a:pt x="1899301" y="147965"/>
+                  </a:lnTo>
+                  <a:lnTo>
+                    <a:pt x="1969645" y="152533"/>
+                  </a:lnTo>
+                  <a:lnTo>
+                    <a:pt x="2039990" y="157045"/>
+                  </a:lnTo>
+                  <a:lnTo>
+                    <a:pt x="2110334" y="161499"/>
+                  </a:lnTo>
+                  <a:lnTo>
+                    <a:pt x="2180679" y="165898"/>
+                  </a:lnTo>
+                  <a:lnTo>
+                    <a:pt x="2251023" y="170241"/>
+                  </a:lnTo>
+                  <a:lnTo>
+                    <a:pt x="2321368" y="174530"/>
+                  </a:lnTo>
+                  <a:lnTo>
+                    <a:pt x="2391712" y="178765"/>
+                  </a:lnTo>
+                  <a:lnTo>
+                    <a:pt x="2462057" y="182946"/>
+                  </a:lnTo>
+                  <a:lnTo>
+                    <a:pt x="2532401" y="187075"/>
+                  </a:lnTo>
+                  <a:lnTo>
+                    <a:pt x="2602746" y="191152"/>
+                  </a:lnTo>
+                  <a:lnTo>
+                    <a:pt x="2673090" y="195178"/>
+                  </a:lnTo>
+                  <a:lnTo>
+                    <a:pt x="2743435" y="199154"/>
+                  </a:lnTo>
+                  <a:lnTo>
+                    <a:pt x="2813779" y="203079"/>
+                  </a:lnTo>
+                  <a:lnTo>
+                    <a:pt x="2884124" y="206955"/>
+                  </a:lnTo>
+                  <a:lnTo>
+                    <a:pt x="2954468" y="210782"/>
+                  </a:lnTo>
+                  <a:lnTo>
+                    <a:pt x="3024813" y="212263"/>
+                  </a:lnTo>
+                  <a:lnTo>
+                    <a:pt x="3095157" y="212442"/>
+                  </a:lnTo>
+                  <a:lnTo>
+                    <a:pt x="3165502" y="212621"/>
+                  </a:lnTo>
+                  <a:lnTo>
+                    <a:pt x="3235846" y="212799"/>
+                  </a:lnTo>
+                  <a:lnTo>
+                    <a:pt x="3306191" y="212978"/>
+                  </a:lnTo>
+                  <a:lnTo>
+                    <a:pt x="3376535" y="213157"/>
+                  </a:lnTo>
+                  <a:lnTo>
+                    <a:pt x="3446880" y="213335"/>
+                  </a:lnTo>
+                  <a:lnTo>
+                    <a:pt x="3517224" y="213513"/>
+                  </a:lnTo>
+                  <a:lnTo>
+                    <a:pt x="3587569" y="213692"/>
+                  </a:lnTo>
+                  <a:lnTo>
+                    <a:pt x="3657913" y="213870"/>
+                  </a:lnTo>
+                  <a:lnTo>
+                    <a:pt x="3728257" y="214048"/>
+                  </a:lnTo>
+                  <a:lnTo>
+                    <a:pt x="3798602" y="214226"/>
+                  </a:lnTo>
+                  <a:lnTo>
+                    <a:pt x="3868946" y="214403"/>
+                  </a:lnTo>
+                  <a:lnTo>
+                    <a:pt x="3939291" y="214581"/>
+                  </a:lnTo>
+                  <a:lnTo>
+                    <a:pt x="4009635" y="214759"/>
+                  </a:lnTo>
+                  <a:lnTo>
+                    <a:pt x="4079980" y="214936"/>
+                  </a:lnTo>
+                  <a:lnTo>
+                    <a:pt x="4150324" y="215114"/>
+                  </a:lnTo>
+                  <a:lnTo>
+                    <a:pt x="4220669" y="215291"/>
+                  </a:lnTo>
+                  <a:lnTo>
+                    <a:pt x="4291013" y="215468"/>
+                  </a:lnTo>
+                  <a:lnTo>
+                    <a:pt x="4361358" y="215645"/>
+                  </a:lnTo>
+                  <a:lnTo>
+                    <a:pt x="4431702" y="215822"/>
+                  </a:lnTo>
+                  <a:lnTo>
+                    <a:pt x="4502047" y="215999"/>
+                  </a:lnTo>
+                  <a:lnTo>
+                    <a:pt x="4572391" y="216176"/>
+                  </a:lnTo>
+                  <a:lnTo>
+                    <a:pt x="4642736" y="216352"/>
+                  </a:lnTo>
+                  <a:lnTo>
+                    <a:pt x="4713080" y="216529"/>
+                  </a:lnTo>
+                  <a:lnTo>
+                    <a:pt x="4783425" y="216705"/>
+                  </a:lnTo>
+                  <a:lnTo>
+                    <a:pt x="4853769" y="216882"/>
+                  </a:lnTo>
+                  <a:lnTo>
+                    <a:pt x="4924114" y="217058"/>
+                  </a:lnTo>
+                  <a:lnTo>
+                    <a:pt x="4994458" y="217234"/>
+                  </a:lnTo>
+                  <a:lnTo>
+                    <a:pt x="5064803" y="217410"/>
+                  </a:lnTo>
+                  <a:lnTo>
+                    <a:pt x="5135147" y="217586"/>
+                  </a:lnTo>
+                  <a:lnTo>
+                    <a:pt x="5205492" y="217762"/>
+                  </a:lnTo>
+                  <a:lnTo>
+                    <a:pt x="5275836" y="217937"/>
+                  </a:lnTo>
+                  <a:lnTo>
+                    <a:pt x="5346181" y="218113"/>
+                  </a:lnTo>
+                  <a:lnTo>
+                    <a:pt x="5416525" y="218288"/>
+                  </a:lnTo>
+                  <a:lnTo>
+                    <a:pt x="5486870" y="218464"/>
+                  </a:lnTo>
+                  <a:lnTo>
+                    <a:pt x="5557214" y="218639"/>
+                  </a:lnTo>
+                  <a:lnTo>
+                    <a:pt x="5627559" y="218814"/>
+                  </a:lnTo>
+                  <a:lnTo>
+                    <a:pt x="5697903" y="218989"/>
+                  </a:lnTo>
+                  <a:lnTo>
+                    <a:pt x="5768248" y="219164"/>
+                  </a:lnTo>
+                  <a:lnTo>
+                    <a:pt x="5838592" y="219339"/>
+                  </a:lnTo>
+                  <a:lnTo>
+                    <a:pt x="5908937" y="219514"/>
+                  </a:lnTo>
+                  <a:lnTo>
+                    <a:pt x="5979281" y="219688"/>
+                  </a:lnTo>
+                  <a:lnTo>
+                    <a:pt x="6049626" y="219863"/>
+                  </a:lnTo>
+                  <a:lnTo>
+                    <a:pt x="6119970" y="220037"/>
+                  </a:lnTo>
+                  <a:lnTo>
+                    <a:pt x="6190315" y="220212"/>
+                  </a:lnTo>
+                  <a:lnTo>
+                    <a:pt x="6260659" y="220386"/>
+                  </a:lnTo>
+                  <a:lnTo>
+                    <a:pt x="6331004" y="220560"/>
+                  </a:lnTo>
+                  <a:lnTo>
+                    <a:pt x="6401348" y="220734"/>
+                  </a:lnTo>
+                  <a:lnTo>
+                    <a:pt x="6471693" y="220908"/>
+                  </a:lnTo>
+                  <a:lnTo>
+                    <a:pt x="6542037" y="221082"/>
+                  </a:lnTo>
+                  <a:lnTo>
+                    <a:pt x="6612382" y="221255"/>
+                  </a:lnTo>
+                  <a:lnTo>
+                    <a:pt x="6682726" y="221429"/>
+                  </a:lnTo>
+                  <a:lnTo>
+                    <a:pt x="6753071" y="221603"/>
+                  </a:lnTo>
+                  <a:lnTo>
+                    <a:pt x="6823415" y="221776"/>
+                  </a:lnTo>
+                  <a:lnTo>
+                    <a:pt x="6893760" y="221949"/>
+                  </a:lnTo>
+                  <a:lnTo>
+                    <a:pt x="6964104" y="222122"/>
+                  </a:lnTo>
+                  <a:lnTo>
+                    <a:pt x="6964104" y="365250"/>
+                  </a:lnTo>
+                  <a:lnTo>
+                    <a:pt x="6893760" y="363389"/>
+                  </a:lnTo>
+                  <a:lnTo>
+                    <a:pt x="6823415" y="361504"/>
+                  </a:lnTo>
+                  <a:lnTo>
+                    <a:pt x="6753071" y="359595"/>
+                  </a:lnTo>
+                  <a:lnTo>
+                    <a:pt x="6682726" y="357662"/>
+                  </a:lnTo>
+                  <a:lnTo>
+                    <a:pt x="6612382" y="355704"/>
+                  </a:lnTo>
+                  <a:lnTo>
+                    <a:pt x="6542037" y="353721"/>
+                  </a:lnTo>
+                  <a:lnTo>
+                    <a:pt x="6471693" y="351713"/>
+                  </a:lnTo>
+                  <a:lnTo>
+                    <a:pt x="6401348" y="349679"/>
+                  </a:lnTo>
+                  <a:lnTo>
+                    <a:pt x="6331004" y="347620"/>
+                  </a:lnTo>
+                  <a:lnTo>
+                    <a:pt x="6260659" y="345534"/>
+                  </a:lnTo>
+                  <a:lnTo>
+                    <a:pt x="6190315" y="343422"/>
+                  </a:lnTo>
+                  <a:lnTo>
+                    <a:pt x="6119970" y="341283"/>
+                  </a:lnTo>
+                  <a:lnTo>
+                    <a:pt x="6049626" y="339117"/>
+                  </a:lnTo>
+                  <a:lnTo>
+                    <a:pt x="5979281" y="336923"/>
+                  </a:lnTo>
+                  <a:lnTo>
+                    <a:pt x="5908937" y="334701"/>
+                  </a:lnTo>
+                  <a:lnTo>
+                    <a:pt x="5838592" y="332451"/>
+                  </a:lnTo>
+                  <a:lnTo>
+                    <a:pt x="5768248" y="330172"/>
+                  </a:lnTo>
+                  <a:lnTo>
+                    <a:pt x="5697903" y="327865"/>
+                  </a:lnTo>
+                  <a:lnTo>
+                    <a:pt x="5627559" y="325528"/>
+                  </a:lnTo>
+                  <a:lnTo>
+                    <a:pt x="5557214" y="323161"/>
+                  </a:lnTo>
+                  <a:lnTo>
+                    <a:pt x="5486870" y="320764"/>
+                  </a:lnTo>
+                  <a:lnTo>
+                    <a:pt x="5416525" y="318336"/>
+                  </a:lnTo>
+                  <a:lnTo>
+                    <a:pt x="5346181" y="315878"/>
+                  </a:lnTo>
+                  <a:lnTo>
+                    <a:pt x="5275836" y="313388"/>
+                  </a:lnTo>
+                  <a:lnTo>
+                    <a:pt x="5205492" y="310867"/>
+                  </a:lnTo>
+                  <a:lnTo>
+                    <a:pt x="5135147" y="308314"/>
+                  </a:lnTo>
+                  <a:lnTo>
+                    <a:pt x="5064803" y="305728"/>
+                  </a:lnTo>
+                  <a:lnTo>
+                    <a:pt x="4994458" y="303109"/>
+                  </a:lnTo>
+                  <a:lnTo>
+                    <a:pt x="4924114" y="300457"/>
+                  </a:lnTo>
+                  <a:lnTo>
+                    <a:pt x="4853769" y="297771"/>
+                  </a:lnTo>
+                  <a:lnTo>
+                    <a:pt x="4783425" y="295051"/>
+                  </a:lnTo>
+                  <a:lnTo>
+                    <a:pt x="4713080" y="292296"/>
+                  </a:lnTo>
+                  <a:lnTo>
+                    <a:pt x="4642736" y="289506"/>
+                  </a:lnTo>
+                  <a:lnTo>
+                    <a:pt x="4572391" y="286681"/>
+                  </a:lnTo>
+                  <a:lnTo>
+                    <a:pt x="4502047" y="283820"/>
+                  </a:lnTo>
+                  <a:lnTo>
+                    <a:pt x="4431702" y="280922"/>
+                  </a:lnTo>
+                  <a:lnTo>
+                    <a:pt x="4361358" y="277987"/>
+                  </a:lnTo>
+                  <a:lnTo>
+                    <a:pt x="4291013" y="275016"/>
+                  </a:lnTo>
+                  <a:lnTo>
+                    <a:pt x="4220669" y="272006"/>
+                  </a:lnTo>
+                  <a:lnTo>
+                    <a:pt x="4150324" y="268958"/>
+                  </a:lnTo>
+                  <a:lnTo>
+                    <a:pt x="4079980" y="265871"/>
+                  </a:lnTo>
+                  <a:lnTo>
+                    <a:pt x="4009635" y="262745"/>
+                  </a:lnTo>
+                  <a:lnTo>
+                    <a:pt x="3939291" y="259579"/>
+                  </a:lnTo>
+                  <a:lnTo>
+                    <a:pt x="3868946" y="256373"/>
+                  </a:lnTo>
+                  <a:lnTo>
+                    <a:pt x="3798602" y="253126"/>
+                  </a:lnTo>
+                  <a:lnTo>
+                    <a:pt x="3728257" y="249837"/>
+                  </a:lnTo>
+                  <a:lnTo>
+                    <a:pt x="3657913" y="246507"/>
+                  </a:lnTo>
+                  <a:lnTo>
+                    <a:pt x="3587569" y="243134"/>
+                  </a:lnTo>
+                  <a:lnTo>
+                    <a:pt x="3517224" y="239719"/>
+                  </a:lnTo>
+                  <a:lnTo>
+                    <a:pt x="3446880" y="236260"/>
+                  </a:lnTo>
+                  <a:lnTo>
+                    <a:pt x="3376535" y="232757"/>
+                  </a:lnTo>
+                  <a:lnTo>
+                    <a:pt x="3306191" y="229209"/>
+                  </a:lnTo>
+                  <a:lnTo>
+                    <a:pt x="3235846" y="225617"/>
+                  </a:lnTo>
+                  <a:lnTo>
+                    <a:pt x="3165502" y="221978"/>
+                  </a:lnTo>
+                  <a:lnTo>
+                    <a:pt x="3095157" y="218293"/>
+                  </a:lnTo>
+                  <a:lnTo>
+                    <a:pt x="3024813" y="214562"/>
+                  </a:lnTo>
+                  <a:lnTo>
+                    <a:pt x="2954468" y="212084"/>
+                  </a:lnTo>
+                  <a:lnTo>
+                    <a:pt x="2884124" y="211904"/>
+                  </a:lnTo>
+                  <a:lnTo>
+                    <a:pt x="2813779" y="211725"/>
+                  </a:lnTo>
+                  <a:lnTo>
+                    <a:pt x="2743435" y="211546"/>
+                  </a:lnTo>
+                  <a:lnTo>
+                    <a:pt x="2673090" y="211366"/>
+                  </a:lnTo>
+                  <a:lnTo>
+                    <a:pt x="2602746" y="211187"/>
+                  </a:lnTo>
+                  <a:lnTo>
+                    <a:pt x="2532401" y="211007"/>
+                  </a:lnTo>
+                  <a:lnTo>
+                    <a:pt x="2462057" y="210827"/>
+                  </a:lnTo>
+                  <a:lnTo>
+                    <a:pt x="2391712" y="210647"/>
+                  </a:lnTo>
+                  <a:lnTo>
+                    <a:pt x="2321368" y="210467"/>
+                  </a:lnTo>
+                  <a:lnTo>
+                    <a:pt x="2251023" y="210287"/>
+                  </a:lnTo>
+                  <a:lnTo>
+                    <a:pt x="2180679" y="210107"/>
+                  </a:lnTo>
+                  <a:lnTo>
+                    <a:pt x="2110334" y="209926"/>
+                  </a:lnTo>
+                  <a:lnTo>
+                    <a:pt x="2039990" y="209746"/>
+                  </a:lnTo>
+                  <a:lnTo>
+                    <a:pt x="1969645" y="209565"/>
+                  </a:lnTo>
+                  <a:lnTo>
+                    <a:pt x="1899301" y="209385"/>
+                  </a:lnTo>
+                  <a:lnTo>
+                    <a:pt x="1828956" y="209204"/>
+                  </a:lnTo>
+                  <a:lnTo>
+                    <a:pt x="1758612" y="209023"/>
+                  </a:lnTo>
+                  <a:lnTo>
+                    <a:pt x="1688267" y="208842"/>
+                  </a:lnTo>
+                  <a:lnTo>
+                    <a:pt x="1617923" y="208661"/>
+                  </a:lnTo>
+                  <a:lnTo>
+                    <a:pt x="1547578" y="208479"/>
+                  </a:lnTo>
+                  <a:lnTo>
+                    <a:pt x="1477234" y="208298"/>
+                  </a:lnTo>
+                  <a:lnTo>
+                    <a:pt x="1406889" y="208117"/>
+                  </a:lnTo>
+                  <a:lnTo>
+                    <a:pt x="1336545" y="207935"/>
+                  </a:lnTo>
+                  <a:lnTo>
+                    <a:pt x="1266200" y="207753"/>
+                  </a:lnTo>
+                  <a:lnTo>
+                    <a:pt x="1195856" y="207572"/>
+                  </a:lnTo>
+                  <a:lnTo>
+                    <a:pt x="1125511" y="207390"/>
+                  </a:lnTo>
+                  <a:lnTo>
+                    <a:pt x="1055167" y="207208"/>
+                  </a:lnTo>
+                  <a:lnTo>
+                    <a:pt x="984822" y="207026"/>
+                  </a:lnTo>
+                  <a:lnTo>
+                    <a:pt x="914478" y="206843"/>
+                  </a:lnTo>
+                  <a:lnTo>
+                    <a:pt x="844133" y="206661"/>
+                  </a:lnTo>
+                  <a:lnTo>
+                    <a:pt x="773789" y="206479"/>
+                  </a:lnTo>
+                  <a:lnTo>
+                    <a:pt x="703444" y="206296"/>
+                  </a:lnTo>
+                  <a:lnTo>
+                    <a:pt x="633100" y="206113"/>
+                  </a:lnTo>
+                  <a:lnTo>
+                    <a:pt x="562755" y="205931"/>
+                  </a:lnTo>
+                  <a:lnTo>
+                    <a:pt x="492411" y="205748"/>
+                  </a:lnTo>
+                  <a:lnTo>
+                    <a:pt x="422066" y="205565"/>
+                  </a:lnTo>
+                  <a:lnTo>
+                    <a:pt x="351722" y="205382"/>
+                  </a:lnTo>
+                  <a:lnTo>
+                    <a:pt x="281377" y="205198"/>
+                  </a:lnTo>
+                  <a:lnTo>
+                    <a:pt x="211033" y="205015"/>
+                  </a:lnTo>
+                  <a:lnTo>
+                    <a:pt x="140688" y="204832"/>
+                  </a:lnTo>
+                  <a:lnTo>
+                    <a:pt x="70344" y="204648"/>
+                  </a:lnTo>
+                  <a:lnTo>
+                    <a:pt x="0" y="204465"/>
+                  </a:lnTo>
+                  <a:close/>
+                </a:path>
+              </a:pathLst>
+            </a:custGeom>
+            <a:solidFill>
+              <a:srgbClr val="FF8C00">
+                <a:alpha val="20000"/>
+              </a:srgbClr>
+            </a:solidFill>
+          </p:spPr>
+          <p:txBody>
+            <a:bodyPr/>
+            <a:lstStyle/>
+            <a:p/>
+          </p:txBody>
+        </p:sp>
+        <p:sp>
+          <p:nvSpPr>
+            <p:cNvPr id="71" name="pl71"/>
+            <p:cNvSpPr/>
+            <p:nvPr/>
+          </p:nvSpPr>
+          <p:spPr>
+            <a:xfrm>
+              <a:off x="1235312" y="5082204"/>
+              <a:ext cx="6964104" cy="222122"/>
+            </a:xfrm>
+            <a:custGeom>
+              <a:avLst/>
+              <a:pathLst>
+                <a:path w="6964104" h="222122">
+                  <a:moveTo>
+                    <a:pt x="0" y="0"/>
+                  </a:moveTo>
+                  <a:lnTo>
+                    <a:pt x="70344" y="6428"/>
+                  </a:lnTo>
+                  <a:lnTo>
+                    <a:pt x="140688" y="12775"/>
+                  </a:lnTo>
+                  <a:lnTo>
+                    <a:pt x="211033" y="19043"/>
+                  </a:lnTo>
+                  <a:lnTo>
+                    <a:pt x="281377" y="25232"/>
+                  </a:lnTo>
+                  <a:lnTo>
+                    <a:pt x="351722" y="31343"/>
+                  </a:lnTo>
+                  <a:lnTo>
+                    <a:pt x="422066" y="37378"/>
+                  </a:lnTo>
+                  <a:lnTo>
+                    <a:pt x="492411" y="43336"/>
+                  </a:lnTo>
+                  <a:lnTo>
+                    <a:pt x="562755" y="49220"/>
+                  </a:lnTo>
+                  <a:lnTo>
+                    <a:pt x="633100" y="55030"/>
+                  </a:lnTo>
+                  <a:lnTo>
+                    <a:pt x="703444" y="60766"/>
+                  </a:lnTo>
+                  <a:lnTo>
+                    <a:pt x="773789" y="66431"/>
+                  </a:lnTo>
+                  <a:lnTo>
+                    <a:pt x="844133" y="72024"/>
+                  </a:lnTo>
+                  <a:lnTo>
+                    <a:pt x="914478" y="77547"/>
+                  </a:lnTo>
+                  <a:lnTo>
+                    <a:pt x="984822" y="83001"/>
+                  </a:lnTo>
+                  <a:lnTo>
+                    <a:pt x="1055167" y="88386"/>
+                  </a:lnTo>
+                  <a:lnTo>
+                    <a:pt x="1125511" y="93704"/>
+                  </a:lnTo>
+                  <a:lnTo>
+                    <a:pt x="1195856" y="98954"/>
+                  </a:lnTo>
+                  <a:lnTo>
+                    <a:pt x="1266200" y="104139"/>
+                  </a:lnTo>
+                  <a:lnTo>
+                    <a:pt x="1336545" y="109258"/>
+                  </a:lnTo>
+                  <a:lnTo>
+                    <a:pt x="1406889" y="114314"/>
+                  </a:lnTo>
+                  <a:lnTo>
+                    <a:pt x="1477234" y="119305"/>
+                  </a:lnTo>
+                  <a:lnTo>
+                    <a:pt x="1547578" y="124234"/>
+                  </a:lnTo>
+                  <a:lnTo>
+                    <a:pt x="1617923" y="129101"/>
+                  </a:lnTo>
+                  <a:lnTo>
+                    <a:pt x="1688267" y="133907"/>
+                  </a:lnTo>
+                  <a:lnTo>
+                    <a:pt x="1758612" y="138652"/>
+                  </a:lnTo>
+                  <a:lnTo>
+                    <a:pt x="1828956" y="143338"/>
+                  </a:lnTo>
+                  <a:lnTo>
+                    <a:pt x="1899301" y="147965"/>
+                  </a:lnTo>
+                  <a:lnTo>
+                    <a:pt x="1969645" y="152533"/>
+                  </a:lnTo>
+                  <a:lnTo>
+                    <a:pt x="2039990" y="157045"/>
+                  </a:lnTo>
+                  <a:lnTo>
+                    <a:pt x="2110334" y="161499"/>
+                  </a:lnTo>
+                  <a:lnTo>
+                    <a:pt x="2180679" y="165898"/>
+                  </a:lnTo>
+                  <a:lnTo>
+                    <a:pt x="2251023" y="170241"/>
+                  </a:lnTo>
+                  <a:lnTo>
+                    <a:pt x="2321368" y="174530"/>
+                  </a:lnTo>
+                  <a:lnTo>
+                    <a:pt x="2391712" y="178765"/>
+                  </a:lnTo>
+                  <a:lnTo>
+                    <a:pt x="2462057" y="182946"/>
+                  </a:lnTo>
+                  <a:lnTo>
+                    <a:pt x="2532401" y="187075"/>
+                  </a:lnTo>
+                  <a:lnTo>
+                    <a:pt x="2602746" y="191152"/>
+                  </a:lnTo>
+                  <a:lnTo>
+                    <a:pt x="2673090" y="195178"/>
+                  </a:lnTo>
+                  <a:lnTo>
+                    <a:pt x="2743435" y="199154"/>
+                  </a:lnTo>
+                  <a:lnTo>
+                    <a:pt x="2813779" y="203079"/>
+                  </a:lnTo>
+                  <a:lnTo>
+                    <a:pt x="2884124" y="206955"/>
+                  </a:lnTo>
+                  <a:lnTo>
+                    <a:pt x="2954468" y="210782"/>
+                  </a:lnTo>
+                  <a:lnTo>
+                    <a:pt x="3024813" y="212263"/>
+                  </a:lnTo>
+                  <a:lnTo>
+                    <a:pt x="3095157" y="212442"/>
+                  </a:lnTo>
+                  <a:lnTo>
+                    <a:pt x="3165502" y="212621"/>
+                  </a:lnTo>
+                  <a:lnTo>
+                    <a:pt x="3235846" y="212799"/>
+                  </a:lnTo>
+                  <a:lnTo>
+                    <a:pt x="3306191" y="212978"/>
+                  </a:lnTo>
+                  <a:lnTo>
+                    <a:pt x="3376535" y="213157"/>
+                  </a:lnTo>
+                  <a:lnTo>
+                    <a:pt x="3446880" y="213335"/>
+                  </a:lnTo>
+                  <a:lnTo>
+                    <a:pt x="3517224" y="213513"/>
+                  </a:lnTo>
+                  <a:lnTo>
+                    <a:pt x="3587569" y="213692"/>
+                  </a:lnTo>
+                  <a:lnTo>
+                    <a:pt x="3657913" y="213870"/>
+                  </a:lnTo>
+                  <a:lnTo>
+                    <a:pt x="3728257" y="214048"/>
+                  </a:lnTo>
+                  <a:lnTo>
+                    <a:pt x="3798602" y="214226"/>
+                  </a:lnTo>
+                  <a:lnTo>
+                    <a:pt x="3868946" y="214403"/>
+                  </a:lnTo>
+                  <a:lnTo>
+                    <a:pt x="3939291" y="214581"/>
+                  </a:lnTo>
+                  <a:lnTo>
+                    <a:pt x="4009635" y="214759"/>
+                  </a:lnTo>
+                  <a:lnTo>
+                    <a:pt x="4079980" y="214936"/>
+                  </a:lnTo>
+                  <a:lnTo>
+                    <a:pt x="4150324" y="215114"/>
+                  </a:lnTo>
+                  <a:lnTo>
+                    <a:pt x="4220669" y="215291"/>
+                  </a:lnTo>
+                  <a:lnTo>
+                    <a:pt x="4291013" y="215468"/>
+                  </a:lnTo>
+                  <a:lnTo>
+                    <a:pt x="4361358" y="215645"/>
+                  </a:lnTo>
+                  <a:lnTo>
+                    <a:pt x="4431702" y="215822"/>
+                  </a:lnTo>
+                  <a:lnTo>
+                    <a:pt x="4502047" y="215999"/>
+                  </a:lnTo>
+                  <a:lnTo>
+                    <a:pt x="4572391" y="216176"/>
+                  </a:lnTo>
+                  <a:lnTo>
+                    <a:pt x="4642736" y="216352"/>
+                  </a:lnTo>
+                  <a:lnTo>
+                    <a:pt x="4713080" y="216529"/>
+                  </a:lnTo>
+                  <a:lnTo>
+                    <a:pt x="4783425" y="216705"/>
+                  </a:lnTo>
+                  <a:lnTo>
+                    <a:pt x="4853769" y="216882"/>
+                  </a:lnTo>
+                  <a:lnTo>
+                    <a:pt x="4924114" y="217058"/>
+                  </a:lnTo>
+                  <a:lnTo>
+                    <a:pt x="4994458" y="217234"/>
+                  </a:lnTo>
+                  <a:lnTo>
+                    <a:pt x="5064803" y="217410"/>
+                  </a:lnTo>
+                  <a:lnTo>
+                    <a:pt x="5135147" y="217586"/>
+                  </a:lnTo>
+                  <a:lnTo>
+                    <a:pt x="5205492" y="217762"/>
+                  </a:lnTo>
+                  <a:lnTo>
+                    <a:pt x="5275836" y="217937"/>
+                  </a:lnTo>
+                  <a:lnTo>
+                    <a:pt x="5346181" y="218113"/>
+                  </a:lnTo>
+                  <a:lnTo>
+                    <a:pt x="5416525" y="218288"/>
+                  </a:lnTo>
+                  <a:lnTo>
+                    <a:pt x="5486870" y="218464"/>
+                  </a:lnTo>
+                  <a:lnTo>
+                    <a:pt x="5557214" y="218639"/>
+                  </a:lnTo>
+                  <a:lnTo>
+                    <a:pt x="5627559" y="218814"/>
+                  </a:lnTo>
+                  <a:lnTo>
+                    <a:pt x="5697903" y="218989"/>
+                  </a:lnTo>
+                  <a:lnTo>
+                    <a:pt x="5768248" y="219164"/>
+                  </a:lnTo>
+                  <a:lnTo>
+                    <a:pt x="5838592" y="219339"/>
+                  </a:lnTo>
+                  <a:lnTo>
+                    <a:pt x="5908937" y="219514"/>
+                  </a:lnTo>
+                  <a:lnTo>
+                    <a:pt x="5979281" y="219688"/>
+                  </a:lnTo>
+                  <a:lnTo>
+                    <a:pt x="6049626" y="219863"/>
+                  </a:lnTo>
+                  <a:lnTo>
+                    <a:pt x="6119970" y="220037"/>
+                  </a:lnTo>
+                  <a:lnTo>
+                    <a:pt x="6190315" y="220212"/>
+                  </a:lnTo>
+                  <a:lnTo>
+                    <a:pt x="6260659" y="220386"/>
+                  </a:lnTo>
+                  <a:lnTo>
+                    <a:pt x="6331004" y="220560"/>
+                  </a:lnTo>
+                  <a:lnTo>
+                    <a:pt x="6401348" y="220734"/>
+                  </a:lnTo>
+                  <a:lnTo>
+                    <a:pt x="6471693" y="220908"/>
+                  </a:lnTo>
+                  <a:lnTo>
+                    <a:pt x="6542037" y="221082"/>
+                  </a:lnTo>
+                  <a:lnTo>
+                    <a:pt x="6612382" y="221255"/>
+                  </a:lnTo>
+                  <a:lnTo>
+                    <a:pt x="6682726" y="221429"/>
+                  </a:lnTo>
+                  <a:lnTo>
+                    <a:pt x="6753071" y="221603"/>
+                  </a:lnTo>
+                  <a:lnTo>
+                    <a:pt x="6823415" y="221776"/>
+                  </a:lnTo>
+                  <a:lnTo>
+                    <a:pt x="6893760" y="221949"/>
+                  </a:lnTo>
+                  <a:lnTo>
+                    <a:pt x="6964104" y="222122"/>
+                  </a:lnTo>
+                </a:path>
+              </a:pathLst>
+            </a:custGeom>
+          </p:spPr>
+          <p:txBody>
+            <a:bodyPr/>
+            <a:lstStyle/>
+            <a:p/>
+          </p:txBody>
+        </p:sp>
+        <p:sp>
+          <p:nvSpPr>
+            <p:cNvPr id="72" name="pl72"/>
+            <p:cNvSpPr/>
+            <p:nvPr/>
+          </p:nvSpPr>
+          <p:spPr>
+            <a:xfrm>
+              <a:off x="1235312" y="5286669"/>
+              <a:ext cx="6964104" cy="160785"/>
+            </a:xfrm>
+            <a:custGeom>
+              <a:avLst/>
+              <a:pathLst>
+                <a:path w="6964104" h="160785">
+                  <a:moveTo>
+                    <a:pt x="6964104" y="160785"/>
+                  </a:moveTo>
+                  <a:lnTo>
+                    <a:pt x="6893760" y="158924"/>
+                  </a:lnTo>
+                  <a:lnTo>
+                    <a:pt x="6823415" y="157039"/>
+                  </a:lnTo>
+                  <a:lnTo>
+                    <a:pt x="6753071" y="155130"/>
+                  </a:lnTo>
+                  <a:lnTo>
+                    <a:pt x="6682726" y="153196"/>
+                  </a:lnTo>
+                  <a:lnTo>
+                    <a:pt x="6612382" y="151239"/>
+                  </a:lnTo>
+                  <a:lnTo>
+                    <a:pt x="6542037" y="149256"/>
+                  </a:lnTo>
+                  <a:lnTo>
+                    <a:pt x="6471693" y="147248"/>
+                  </a:lnTo>
+                  <a:lnTo>
+                    <a:pt x="6401348" y="145214"/>
+                  </a:lnTo>
+                  <a:lnTo>
+                    <a:pt x="6331004" y="143155"/>
+                  </a:lnTo>
+                  <a:lnTo>
+                    <a:pt x="6260659" y="141069"/>
+                  </a:lnTo>
+                  <a:lnTo>
+                    <a:pt x="6190315" y="138957"/>
+                  </a:lnTo>
+                  <a:lnTo>
+                    <a:pt x="6119970" y="136818"/>
+                  </a:lnTo>
+                  <a:lnTo>
+                    <a:pt x="6049626" y="134652"/>
+                  </a:lnTo>
+                  <a:lnTo>
+                    <a:pt x="5979281" y="132458"/>
+                  </a:lnTo>
+                  <a:lnTo>
+                    <a:pt x="5908937" y="130236"/>
+                  </a:lnTo>
+                  <a:lnTo>
+                    <a:pt x="5838592" y="127986"/>
+                  </a:lnTo>
+                  <a:lnTo>
+                    <a:pt x="5768248" y="125707"/>
+                  </a:lnTo>
+                  <a:lnTo>
+                    <a:pt x="5697903" y="123400"/>
+                  </a:lnTo>
+                  <a:lnTo>
+                    <a:pt x="5627559" y="121063"/>
+                  </a:lnTo>
+                  <a:lnTo>
+                    <a:pt x="5557214" y="118696"/>
+                  </a:lnTo>
+                  <a:lnTo>
+                    <a:pt x="5486870" y="116299"/>
+                  </a:lnTo>
+                  <a:lnTo>
+                    <a:pt x="5416525" y="113871"/>
+                  </a:lnTo>
+                  <a:lnTo>
+                    <a:pt x="5346181" y="111413"/>
+                  </a:lnTo>
+                  <a:lnTo>
+                    <a:pt x="5275836" y="108923"/>
+                  </a:lnTo>
+                  <a:lnTo>
+                    <a:pt x="5205492" y="106402"/>
+                  </a:lnTo>
+                  <a:lnTo>
+                    <a:pt x="5135147" y="103849"/>
+                  </a:lnTo>
+                  <a:lnTo>
+                    <a:pt x="5064803" y="101263"/>
+                  </a:lnTo>
+                  <a:lnTo>
+                    <a:pt x="4994458" y="98644"/>
+                  </a:lnTo>
+                  <a:lnTo>
+                    <a:pt x="4924114" y="95992"/>
+                  </a:lnTo>
+                  <a:lnTo>
+                    <a:pt x="4853769" y="93306"/>
+                  </a:lnTo>
+                  <a:lnTo>
+                    <a:pt x="4783425" y="90586"/>
+                  </a:lnTo>
+                  <a:lnTo>
+                    <a:pt x="4713080" y="87831"/>
+                  </a:lnTo>
+                  <a:lnTo>
+                    <a:pt x="4642736" y="85041"/>
+                  </a:lnTo>
+                  <a:lnTo>
+                    <a:pt x="4572391" y="82216"/>
+                  </a:lnTo>
+                  <a:lnTo>
+                    <a:pt x="4502047" y="79355"/>
+                  </a:lnTo>
+                  <a:lnTo>
+                    <a:pt x="4431702" y="76457"/>
+                  </a:lnTo>
+                  <a:lnTo>
+                    <a:pt x="4361358" y="73522"/>
+                  </a:lnTo>
+                  <a:lnTo>
+                    <a:pt x="4291013" y="70550"/>
+                  </a:lnTo>
+                  <a:lnTo>
+                    <a:pt x="4220669" y="67541"/>
+                  </a:lnTo>
+                  <a:lnTo>
+                    <a:pt x="4150324" y="64493"/>
+                  </a:lnTo>
+                  <a:lnTo>
+                    <a:pt x="4079980" y="61406"/>
+                  </a:lnTo>
+                  <a:lnTo>
+                    <a:pt x="4009635" y="58280"/>
+                  </a:lnTo>
+                  <a:lnTo>
+                    <a:pt x="3939291" y="55114"/>
+                  </a:lnTo>
+                  <a:lnTo>
+                    <a:pt x="3868946" y="51908"/>
+                  </a:lnTo>
+                  <a:lnTo>
+                    <a:pt x="3798602" y="48661"/>
+                  </a:lnTo>
+                  <a:lnTo>
+                    <a:pt x="3728257" y="45372"/>
+                  </a:lnTo>
+                  <a:lnTo>
+                    <a:pt x="3657913" y="42042"/>
+                  </a:lnTo>
+                  <a:lnTo>
+                    <a:pt x="3587569" y="38669"/>
+                  </a:lnTo>
+                  <a:lnTo>
+                    <a:pt x="3517224" y="35254"/>
+                  </a:lnTo>
+                  <a:lnTo>
+                    <a:pt x="3446880" y="31795"/>
+                  </a:lnTo>
+                  <a:lnTo>
+                    <a:pt x="3376535" y="28292"/>
+                  </a:lnTo>
+                  <a:lnTo>
+                    <a:pt x="3306191" y="24744"/>
+                  </a:lnTo>
+                  <a:lnTo>
+                    <a:pt x="3235846" y="21151"/>
+                  </a:lnTo>
+                  <a:lnTo>
+                    <a:pt x="3165502" y="17513"/>
+                  </a:lnTo>
+                  <a:lnTo>
+                    <a:pt x="3095157" y="13828"/>
+                  </a:lnTo>
+                  <a:lnTo>
+                    <a:pt x="3024813" y="10097"/>
+                  </a:lnTo>
+                  <a:lnTo>
+                    <a:pt x="2954468" y="7619"/>
+                  </a:lnTo>
+                  <a:lnTo>
+                    <a:pt x="2884124" y="7439"/>
+                  </a:lnTo>
+                  <a:lnTo>
+                    <a:pt x="2813779" y="7260"/>
+                  </a:lnTo>
+                  <a:lnTo>
+                    <a:pt x="2743435" y="7081"/>
+                  </a:lnTo>
+                  <a:lnTo>
+                    <a:pt x="2673090" y="6901"/>
+                  </a:lnTo>
+                  <a:lnTo>
+                    <a:pt x="2602746" y="6722"/>
+                  </a:lnTo>
+                  <a:lnTo>
+                    <a:pt x="2532401" y="6542"/>
+                  </a:lnTo>
+                  <a:lnTo>
+                    <a:pt x="2462057" y="6362"/>
+                  </a:lnTo>
+                  <a:lnTo>
+                    <a:pt x="2391712" y="6182"/>
+                  </a:lnTo>
+                  <a:lnTo>
+                    <a:pt x="2321368" y="6002"/>
+                  </a:lnTo>
+                  <a:lnTo>
+                    <a:pt x="2251023" y="5822"/>
+                  </a:lnTo>
+                  <a:lnTo>
+                    <a:pt x="2180679" y="5642"/>
+                  </a:lnTo>
+                  <a:lnTo>
+                    <a:pt x="2110334" y="5461"/>
+                  </a:lnTo>
+                  <a:lnTo>
+                    <a:pt x="2039990" y="5281"/>
+                  </a:lnTo>
+                  <a:lnTo>
+                    <a:pt x="1969645" y="5100"/>
+                  </a:lnTo>
+                  <a:lnTo>
+                    <a:pt x="1899301" y="4919"/>
+                  </a:lnTo>
+                  <a:lnTo>
+                    <a:pt x="1828956" y="4739"/>
+                  </a:lnTo>
+                  <a:lnTo>
+                    <a:pt x="1758612" y="4558"/>
+                  </a:lnTo>
+                  <a:lnTo>
+                    <a:pt x="1688267" y="4377"/>
+                  </a:lnTo>
+                  <a:lnTo>
+                    <a:pt x="1617923" y="4196"/>
+                  </a:lnTo>
+                  <a:lnTo>
+                    <a:pt x="1547578" y="4014"/>
+                  </a:lnTo>
+                  <a:lnTo>
+                    <a:pt x="1477234" y="3833"/>
+                  </a:lnTo>
+                  <a:lnTo>
+                    <a:pt x="1406889" y="3652"/>
+                  </a:lnTo>
+                  <a:lnTo>
+                    <a:pt x="1336545" y="3470"/>
+                  </a:lnTo>
+                  <a:lnTo>
+                    <a:pt x="1266200" y="3288"/>
+                  </a:lnTo>
+                  <a:lnTo>
+                    <a:pt x="1195856" y="3107"/>
+                  </a:lnTo>
+                  <a:lnTo>
+                    <a:pt x="1125511" y="2925"/>
+                  </a:lnTo>
+                  <a:lnTo>
+                    <a:pt x="1055167" y="2743"/>
+                  </a:lnTo>
+                  <a:lnTo>
+                    <a:pt x="984822" y="2561"/>
+                  </a:lnTo>
+                  <a:lnTo>
+                    <a:pt x="914478" y="2378"/>
+                  </a:lnTo>
+                  <a:lnTo>
+                    <a:pt x="844133" y="2196"/>
+                  </a:lnTo>
+                  <a:lnTo>
+                    <a:pt x="773789" y="2014"/>
+                  </a:lnTo>
+                  <a:lnTo>
+                    <a:pt x="703444" y="1831"/>
+                  </a:lnTo>
+                  <a:lnTo>
+                    <a:pt x="633100" y="1648"/>
+                  </a:lnTo>
+                  <a:lnTo>
+                    <a:pt x="562755" y="1466"/>
+                  </a:lnTo>
+                  <a:lnTo>
+                    <a:pt x="492411" y="1283"/>
+                  </a:lnTo>
+                  <a:lnTo>
+                    <a:pt x="422066" y="1100"/>
+                  </a:lnTo>
+                  <a:lnTo>
+                    <a:pt x="351722" y="917"/>
+                  </a:lnTo>
+                  <a:lnTo>
+                    <a:pt x="281377" y="733"/>
+                  </a:lnTo>
+                  <a:lnTo>
+                    <a:pt x="211033" y="550"/>
+                  </a:lnTo>
+                  <a:lnTo>
+                    <a:pt x="140688" y="367"/>
+                  </a:lnTo>
+                  <a:lnTo>
+                    <a:pt x="70344" y="183"/>
+                  </a:lnTo>
+                  <a:lnTo>
+                    <a:pt x="0" y="0"/>
+                  </a:lnTo>
+                </a:path>
+              </a:pathLst>
+            </a:custGeom>
+          </p:spPr>
+          <p:txBody>
+            <a:bodyPr/>
+            <a:lstStyle/>
+            <a:p/>
+          </p:txBody>
+        </p:sp>
+        <p:sp>
+          <p:nvSpPr>
+            <p:cNvPr id="73" name="pl73"/>
+            <p:cNvSpPr/>
+            <p:nvPr/>
+          </p:nvSpPr>
+          <p:spPr>
+            <a:xfrm>
+              <a:off x="1235312" y="5197411"/>
+              <a:ext cx="6964104" cy="190572"/>
+            </a:xfrm>
+            <a:custGeom>
+              <a:avLst/>
+              <a:pathLst>
+                <a:path w="6964104" h="190572">
+                  <a:moveTo>
+                    <a:pt x="0" y="0"/>
+                  </a:moveTo>
+                  <a:lnTo>
+                    <a:pt x="70344" y="2615"/>
+                  </a:lnTo>
+                  <a:lnTo>
+                    <a:pt x="140688" y="5214"/>
+                  </a:lnTo>
+                  <a:lnTo>
+                    <a:pt x="211033" y="7795"/>
+                  </a:lnTo>
+                  <a:lnTo>
+                    <a:pt x="281377" y="10360"/>
+                  </a:lnTo>
+                  <a:lnTo>
+                    <a:pt x="351722" y="12907"/>
+                  </a:lnTo>
+                  <a:lnTo>
+                    <a:pt x="422066" y="15438"/>
+                  </a:lnTo>
+                  <a:lnTo>
+                    <a:pt x="492411" y="17952"/>
+                  </a:lnTo>
+                  <a:lnTo>
+                    <a:pt x="562755" y="20449"/>
+                  </a:lnTo>
+                  <a:lnTo>
+                    <a:pt x="633100" y="22930"/>
+                  </a:lnTo>
+                  <a:lnTo>
+                    <a:pt x="703444" y="25395"/>
+                  </a:lnTo>
+                  <a:lnTo>
+                    <a:pt x="773789" y="27843"/>
+                  </a:lnTo>
+                  <a:lnTo>
+                    <a:pt x="844133" y="30275"/>
+                  </a:lnTo>
+                  <a:lnTo>
+                    <a:pt x="914478" y="32691"/>
+                  </a:lnTo>
+                  <a:lnTo>
+                    <a:pt x="984822" y="35091"/>
+                  </a:lnTo>
+                  <a:lnTo>
+                    <a:pt x="1055167" y="37475"/>
+                  </a:lnTo>
+                  <a:lnTo>
+                    <a:pt x="1125511" y="39844"/>
+                  </a:lnTo>
+                  <a:lnTo>
+                    <a:pt x="1195856" y="42196"/>
+                  </a:lnTo>
+                  <a:lnTo>
+                    <a:pt x="1266200" y="44534"/>
+                  </a:lnTo>
+                  <a:lnTo>
+                    <a:pt x="1336545" y="46856"/>
+                  </a:lnTo>
+                  <a:lnTo>
+                    <a:pt x="1406889" y="49162"/>
+                  </a:lnTo>
+                  <a:lnTo>
+                    <a:pt x="1477234" y="51453"/>
+                  </a:lnTo>
+                  <a:lnTo>
+                    <a:pt x="1547578" y="53730"/>
+                  </a:lnTo>
+                  <a:lnTo>
+                    <a:pt x="1617923" y="55991"/>
+                  </a:lnTo>
+                  <a:lnTo>
+                    <a:pt x="1688267" y="58237"/>
+                  </a:lnTo>
+                  <a:lnTo>
+                    <a:pt x="1758612" y="60469"/>
+                  </a:lnTo>
+                  <a:lnTo>
+                    <a:pt x="1828956" y="62685"/>
+                  </a:lnTo>
+                  <a:lnTo>
+                    <a:pt x="1899301" y="64887"/>
+                  </a:lnTo>
+                  <a:lnTo>
+                    <a:pt x="1969645" y="67075"/>
+                  </a:lnTo>
+                  <a:lnTo>
+                    <a:pt x="2039990" y="69248"/>
+                  </a:lnTo>
+                  <a:lnTo>
+                    <a:pt x="2110334" y="71407"/>
+                  </a:lnTo>
+                  <a:lnTo>
+                    <a:pt x="2180679" y="73551"/>
+                  </a:lnTo>
+                  <a:lnTo>
+                    <a:pt x="2251023" y="75681"/>
+                  </a:lnTo>
+                  <a:lnTo>
+                    <a:pt x="2321368" y="77798"/>
+                  </a:lnTo>
+                  <a:lnTo>
+                    <a:pt x="2391712" y="79900"/>
+                  </a:lnTo>
+                  <a:lnTo>
+                    <a:pt x="2462057" y="81988"/>
+                  </a:lnTo>
+                  <a:lnTo>
+                    <a:pt x="2532401" y="84063"/>
+                  </a:lnTo>
+                  <a:lnTo>
+                    <a:pt x="2602746" y="86124"/>
+                  </a:lnTo>
+                  <a:lnTo>
+                    <a:pt x="2673090" y="88171"/>
+                  </a:lnTo>
+                  <a:lnTo>
+                    <a:pt x="2743435" y="90205"/>
+                  </a:lnTo>
+                  <a:lnTo>
+                    <a:pt x="2813779" y="92226"/>
+                  </a:lnTo>
+                  <a:lnTo>
+                    <a:pt x="2884124" y="94233"/>
+                  </a:lnTo>
+                  <a:lnTo>
+                    <a:pt x="2954468" y="96226"/>
+                  </a:lnTo>
+                  <a:lnTo>
+                    <a:pt x="3024813" y="98207"/>
+                  </a:lnTo>
+                  <a:lnTo>
+                    <a:pt x="3095157" y="100175"/>
+                  </a:lnTo>
+                  <a:lnTo>
+                    <a:pt x="3165502" y="102129"/>
+                  </a:lnTo>
+                  <a:lnTo>
+                    <a:pt x="3235846" y="104071"/>
+                  </a:lnTo>
+                  <a:lnTo>
+                    <a:pt x="3306191" y="106000"/>
+                  </a:lnTo>
+                  <a:lnTo>
+                    <a:pt x="3376535" y="107916"/>
+                  </a:lnTo>
+                  <a:lnTo>
+                    <a:pt x="3446880" y="109819"/>
+                  </a:lnTo>
+                  <a:lnTo>
+                    <a:pt x="3517224" y="111710"/>
+                  </a:lnTo>
+                  <a:lnTo>
+                    <a:pt x="3587569" y="113589"/>
+                  </a:lnTo>
+                  <a:lnTo>
+                    <a:pt x="3657913" y="115455"/>
+                  </a:lnTo>
+                  <a:lnTo>
+                    <a:pt x="3728257" y="117309"/>
+                  </a:lnTo>
+                  <a:lnTo>
+                    <a:pt x="3798602" y="119150"/>
+                  </a:lnTo>
+                  <a:lnTo>
+                    <a:pt x="3868946" y="120979"/>
+                  </a:lnTo>
+                  <a:lnTo>
+                    <a:pt x="3939291" y="122797"/>
+                  </a:lnTo>
+                  <a:lnTo>
+                    <a:pt x="4009635" y="124602"/>
+                  </a:lnTo>
+                  <a:lnTo>
+                    <a:pt x="4079980" y="126395"/>
+                  </a:lnTo>
+                  <a:lnTo>
+                    <a:pt x="4150324" y="128177"/>
+                  </a:lnTo>
+                  <a:lnTo>
+                    <a:pt x="4220669" y="129946"/>
+                  </a:lnTo>
+                  <a:lnTo>
+                    <a:pt x="4291013" y="131705"/>
+                  </a:lnTo>
+                  <a:lnTo>
+                    <a:pt x="4361358" y="133451"/>
+                  </a:lnTo>
+                  <a:lnTo>
+                    <a:pt x="4431702" y="135186"/>
+                  </a:lnTo>
+                  <a:lnTo>
+                    <a:pt x="4502047" y="136909"/>
+                  </a:lnTo>
+                  <a:lnTo>
+                    <a:pt x="4572391" y="138621"/>
+                  </a:lnTo>
+                  <a:lnTo>
+                    <a:pt x="4642736" y="140322"/>
+                  </a:lnTo>
+                  <a:lnTo>
+                    <a:pt x="4713080" y="142012"/>
+                  </a:lnTo>
+                  <a:lnTo>
+                    <a:pt x="4783425" y="143690"/>
+                  </a:lnTo>
+                  <a:lnTo>
+                    <a:pt x="4853769" y="145358"/>
+                  </a:lnTo>
+                  <a:lnTo>
+                    <a:pt x="4924114" y="147014"/>
+                  </a:lnTo>
+                  <a:lnTo>
+                    <a:pt x="4994458" y="148659"/>
+                  </a:lnTo>
+                  <a:lnTo>
+                    <a:pt x="5064803" y="150294"/>
+                  </a:lnTo>
+                  <a:lnTo>
+                    <a:pt x="5135147" y="151918"/>
+                  </a:lnTo>
+                  <a:lnTo>
+                    <a:pt x="5205492" y="153531"/>
+                  </a:lnTo>
+                  <a:lnTo>
+                    <a:pt x="5275836" y="155133"/>
+                  </a:lnTo>
+                  <a:lnTo>
+                    <a:pt x="5346181" y="156725"/>
+                  </a:lnTo>
+                  <a:lnTo>
+                    <a:pt x="5416525" y="158306"/>
+                  </a:lnTo>
+                  <a:lnTo>
+                    <a:pt x="5486870" y="159877"/>
+                  </a:lnTo>
+                  <a:lnTo>
+                    <a:pt x="5557214" y="161437"/>
+                  </a:lnTo>
+                  <a:lnTo>
+                    <a:pt x="5627559" y="162988"/>
+                  </a:lnTo>
+                  <a:lnTo>
+                    <a:pt x="5697903" y="164528"/>
+                  </a:lnTo>
+                  <a:lnTo>
+                    <a:pt x="5768248" y="166057"/>
+                  </a:lnTo>
+                  <a:lnTo>
+                    <a:pt x="5838592" y="167577"/>
+                  </a:lnTo>
+                  <a:lnTo>
+                    <a:pt x="5908937" y="169087"/>
+                  </a:lnTo>
+                  <a:lnTo>
+                    <a:pt x="5979281" y="170586"/>
+                  </a:lnTo>
+                  <a:lnTo>
+                    <a:pt x="6049626" y="172076"/>
+                  </a:lnTo>
+                  <a:lnTo>
+                    <a:pt x="6119970" y="173556"/>
+                  </a:lnTo>
+                  <a:lnTo>
+                    <a:pt x="6190315" y="175026"/>
+                  </a:lnTo>
+                  <a:lnTo>
+                    <a:pt x="6260659" y="176487"/>
+                  </a:lnTo>
+                  <a:lnTo>
+                    <a:pt x="6331004" y="177938"/>
+                  </a:lnTo>
+                  <a:lnTo>
+                    <a:pt x="6401348" y="179379"/>
+                  </a:lnTo>
+                  <a:lnTo>
+                    <a:pt x="6471693" y="180811"/>
+                  </a:lnTo>
+                  <a:lnTo>
+                    <a:pt x="6542037" y="182233"/>
+                  </a:lnTo>
+                  <a:lnTo>
+                    <a:pt x="6612382" y="183646"/>
+                  </a:lnTo>
+                  <a:lnTo>
+                    <a:pt x="6682726" y="185050"/>
+                  </a:lnTo>
+                  <a:lnTo>
+                    <a:pt x="6753071" y="186444"/>
+                  </a:lnTo>
+                  <a:lnTo>
+                    <a:pt x="6823415" y="187829"/>
+                  </a:lnTo>
+                  <a:lnTo>
+                    <a:pt x="6893760" y="189205"/>
+                  </a:lnTo>
+                  <a:lnTo>
+                    <a:pt x="6964104" y="190572"/>
+                  </a:lnTo>
+                </a:path>
+              </a:pathLst>
+            </a:custGeom>
+            <a:ln w="27101" cap="flat">
+              <a:solidFill>
+                <a:srgbClr val="FF8C00">
+                  <a:alpha val="100000"/>
+                </a:srgbClr>
+              </a:solidFill>
+              <a:prstDash val="solid"/>
+              <a:round/>
+            </a:ln>
+          </p:spPr>
+          <p:txBody>
+            <a:bodyPr/>
+            <a:lstStyle/>
+            <a:p/>
+          </p:txBody>
+        </p:sp>
+        <p:sp>
+          <p:nvSpPr>
+            <p:cNvPr id="74" name="pl74"/>
+            <p:cNvSpPr/>
+            <p:nvPr/>
+          </p:nvSpPr>
+          <p:spPr>
+            <a:xfrm>
+              <a:off x="887106" y="5294352"/>
+              <a:ext cx="7660515" cy="0"/>
+            </a:xfrm>
+            <a:custGeom>
+              <a:avLst/>
+              <a:pathLst>
+                <a:path w="7660515" h="0">
+                  <a:moveTo>
+                    <a:pt x="0" y="0"/>
+                  </a:moveTo>
+                  <a:lnTo>
+                    <a:pt x="7660515" y="0"/>
+                  </a:lnTo>
+                  <a:lnTo>
+                    <a:pt x="7660515" y="0"/>
+                  </a:lnTo>
+                </a:path>
+              </a:pathLst>
+            </a:custGeom>
+            <a:ln w="13550" cap="flat">
+              <a:solidFill>
+                <a:srgbClr val="7F7F7F">
+                  <a:alpha val="100000"/>
+                </a:srgbClr>
+              </a:solidFill>
+              <a:prstDash val="dash"/>
+              <a:round/>
+            </a:ln>
+          </p:spPr>
+          <p:txBody>
+            <a:bodyPr/>
+            <a:lstStyle/>
+            <a:p/>
+          </p:txBody>
+        </p:sp>
+        <p:sp>
+          <p:nvSpPr>
+            <p:cNvPr id="75" name="pl75"/>
+            <p:cNvSpPr/>
+            <p:nvPr/>
+          </p:nvSpPr>
+          <p:spPr>
+            <a:xfrm>
+              <a:off x="4215100" y="4336484"/>
+              <a:ext cx="0" cy="1317069"/>
+            </a:xfrm>
+            <a:custGeom>
+              <a:avLst/>
+              <a:pathLst>
+                <a:path w="0" h="1317069">
+                  <a:moveTo>
+                    <a:pt x="0" y="1317069"/>
+                  </a:moveTo>
+                  <a:lnTo>
+                    <a:pt x="0" y="0"/>
+                  </a:lnTo>
+                  <a:lnTo>
+                    <a:pt x="0" y="0"/>
+                  </a:lnTo>
+                </a:path>
+              </a:pathLst>
+            </a:custGeom>
+            <a:ln w="13550" cap="flat">
+              <a:solidFill>
+                <a:srgbClr val="666666">
+                  <a:alpha val="100000"/>
+                </a:srgbClr>
+              </a:solidFill>
+              <a:prstDash val="dot"/>
+              <a:round/>
+            </a:ln>
+          </p:spPr>
+          <p:txBody>
+            <a:bodyPr/>
+            <a:lstStyle/>
+            <a:p/>
+          </p:txBody>
+        </p:sp>
+        <p:sp>
+          <p:nvSpPr>
+            <p:cNvPr id="76" name="pl76"/>
+            <p:cNvSpPr/>
+            <p:nvPr/>
+          </p:nvSpPr>
+          <p:spPr>
+            <a:xfrm>
+              <a:off x="3046793" y="4336484"/>
+              <a:ext cx="0" cy="1317069"/>
+            </a:xfrm>
+            <a:custGeom>
+              <a:avLst/>
+              <a:pathLst>
+                <a:path w="0" h="1317069">
+                  <a:moveTo>
+                    <a:pt x="0" y="1317069"/>
+                  </a:moveTo>
+                  <a:lnTo>
+                    <a:pt x="0" y="0"/>
+                  </a:lnTo>
+                  <a:lnTo>
+                    <a:pt x="0" y="0"/>
+                  </a:lnTo>
+                </a:path>
+              </a:pathLst>
+            </a:custGeom>
+            <a:ln w="13550" cap="flat">
+              <a:solidFill>
+                <a:srgbClr val="4682B4">
+                  <a:alpha val="69803"/>
+                </a:srgbClr>
+              </a:solidFill>
+              <a:prstDash val="dash"/>
+              <a:round/>
+            </a:ln>
+          </p:spPr>
+          <p:txBody>
+            <a:bodyPr/>
+            <a:lstStyle/>
+            <a:p/>
+          </p:txBody>
+        </p:sp>
+        <p:sp>
+          <p:nvSpPr>
+            <p:cNvPr id="77" name="pl77"/>
+            <p:cNvSpPr/>
+            <p:nvPr/>
+          </p:nvSpPr>
+          <p:spPr>
+            <a:xfrm>
+              <a:off x="5409191" y="4336484"/>
+              <a:ext cx="0" cy="1317069"/>
+            </a:xfrm>
+            <a:custGeom>
+              <a:avLst/>
+              <a:pathLst>
+                <a:path w="0" h="1317069">
+                  <a:moveTo>
+                    <a:pt x="0" y="1317069"/>
+                  </a:moveTo>
+                  <a:lnTo>
+                    <a:pt x="0" y="0"/>
+                  </a:lnTo>
+                  <a:lnTo>
+                    <a:pt x="0" y="0"/>
+                  </a:lnTo>
+                </a:path>
+              </a:pathLst>
+            </a:custGeom>
+            <a:ln w="13550" cap="flat">
+              <a:solidFill>
+                <a:srgbClr val="4682B4">
+                  <a:alpha val="69803"/>
+                </a:srgbClr>
+              </a:solidFill>
+              <a:prstDash val="dash"/>
+              <a:round/>
+            </a:ln>
+          </p:spPr>
+          <p:txBody>
+            <a:bodyPr/>
+            <a:lstStyle/>
+            <a:p/>
+          </p:txBody>
+        </p:sp>
+        <p:sp>
+          <p:nvSpPr>
+            <p:cNvPr id="78" name="tx78"/>
+            <p:cNvSpPr/>
+            <p:nvPr/>
+          </p:nvSpPr>
+          <p:spPr>
+            <a:xfrm>
+              <a:off x="762297" y="5553636"/>
+              <a:ext cx="62179" cy="80101"/>
+            </a:xfrm>
+            <a:prstGeom prst="rect">
+              <a:avLst/>
+            </a:prstGeom>
+            <a:noFill/>
+          </p:spPr>
+          <p:txBody>
+            <a:bodyPr lIns="0" rIns="0" tIns="0" bIns="0" anchorCtr="1" anchor="ctr" wrap="none"/>
+            <a:lstStyle/>
+            <a:p>
+              <a:pPr algn="l" marL="0" marR="0" indent="0">
+                <a:lnSpc>
+                  <a:spcPts val="880"/>
+                </a:lnSpc>
+                <a:spcBef>
+                  <a:spcPts val="0"/>
+                </a:spcBef>
+                <a:spcAft>
+                  <a:spcPts val="0"/>
+                </a:spcAft>
+              </a:pPr>
+              <a:r>
+                <a:rPr sz="880">
+                  <a:solidFill>
+                    <a:srgbClr val="4D4D4D">
+                      <a:alpha val="100000"/>
+                    </a:srgbClr>
+                  </a:solidFill>
+                  <a:latin typeface="Helvetica"/>
+                  <a:cs typeface="Helvetica"/>
+                </a:rPr>
+                <a:t>0</a:t>
+              </a:r>
+            </a:p>
+          </p:txBody>
+        </p:sp>
+        <p:sp>
+          <p:nvSpPr>
+            <p:cNvPr id="79" name="tx79"/>
+            <p:cNvSpPr/>
+            <p:nvPr/>
+          </p:nvSpPr>
+          <p:spPr>
+            <a:xfrm>
+              <a:off x="762297" y="5254302"/>
+              <a:ext cx="62179" cy="80101"/>
+            </a:xfrm>
+            <a:prstGeom prst="rect">
+              <a:avLst/>
+            </a:prstGeom>
+            <a:noFill/>
+          </p:spPr>
+          <p:txBody>
+            <a:bodyPr lIns="0" rIns="0" tIns="0" bIns="0" anchorCtr="1" anchor="ctr" wrap="none"/>
+            <a:lstStyle/>
+            <a:p>
+              <a:pPr algn="l" marL="0" marR="0" indent="0">
+                <a:lnSpc>
+                  <a:spcPts val="880"/>
+                </a:lnSpc>
+                <a:spcBef>
+                  <a:spcPts val="0"/>
+                </a:spcBef>
+                <a:spcAft>
+                  <a:spcPts val="0"/>
+                </a:spcAft>
+              </a:pPr>
+              <a:r>
+                <a:rPr sz="880">
+                  <a:solidFill>
+                    <a:srgbClr val="4D4D4D">
+                      <a:alpha val="100000"/>
+                    </a:srgbClr>
+                  </a:solidFill>
+                  <a:latin typeface="Helvetica"/>
+                  <a:cs typeface="Helvetica"/>
+                </a:rPr>
+                <a:t>1</a:t>
+              </a:r>
+            </a:p>
+          </p:txBody>
+        </p:sp>
+        <p:sp>
+          <p:nvSpPr>
+            <p:cNvPr id="80" name="tx80"/>
+            <p:cNvSpPr/>
+            <p:nvPr/>
+          </p:nvSpPr>
+          <p:spPr>
+            <a:xfrm>
+              <a:off x="762297" y="4954968"/>
+              <a:ext cx="62179" cy="80101"/>
+            </a:xfrm>
+            <a:prstGeom prst="rect">
+              <a:avLst/>
+            </a:prstGeom>
+            <a:noFill/>
+          </p:spPr>
+          <p:txBody>
+            <a:bodyPr lIns="0" rIns="0" tIns="0" bIns="0" anchorCtr="1" anchor="ctr" wrap="none"/>
+            <a:lstStyle/>
+            <a:p>
+              <a:pPr algn="l" marL="0" marR="0" indent="0">
+                <a:lnSpc>
+                  <a:spcPts val="880"/>
+                </a:lnSpc>
+                <a:spcBef>
+                  <a:spcPts val="0"/>
+                </a:spcBef>
+                <a:spcAft>
+                  <a:spcPts val="0"/>
+                </a:spcAft>
+              </a:pPr>
+              <a:r>
+                <a:rPr sz="880">
+                  <a:solidFill>
+                    <a:srgbClr val="4D4D4D">
+                      <a:alpha val="100000"/>
+                    </a:srgbClr>
+                  </a:solidFill>
+                  <a:latin typeface="Helvetica"/>
+                  <a:cs typeface="Helvetica"/>
+                </a:rPr>
+                <a:t>2</a:t>
+              </a:r>
+            </a:p>
+          </p:txBody>
+        </p:sp>
+        <p:sp>
+          <p:nvSpPr>
+            <p:cNvPr id="81" name="tx81"/>
+            <p:cNvSpPr/>
+            <p:nvPr/>
+          </p:nvSpPr>
+          <p:spPr>
+            <a:xfrm>
+              <a:off x="762297" y="4655634"/>
+              <a:ext cx="62179" cy="80101"/>
+            </a:xfrm>
+            <a:prstGeom prst="rect">
+              <a:avLst/>
+            </a:prstGeom>
+            <a:noFill/>
+          </p:spPr>
+          <p:txBody>
+            <a:bodyPr lIns="0" rIns="0" tIns="0" bIns="0" anchorCtr="1" anchor="ctr" wrap="none"/>
+            <a:lstStyle/>
+            <a:p>
+              <a:pPr algn="l" marL="0" marR="0" indent="0">
+                <a:lnSpc>
+                  <a:spcPts val="880"/>
+                </a:lnSpc>
+                <a:spcBef>
+                  <a:spcPts val="0"/>
+                </a:spcBef>
+                <a:spcAft>
+                  <a:spcPts val="0"/>
+                </a:spcAft>
+              </a:pPr>
+              <a:r>
+                <a:rPr sz="880">
+                  <a:solidFill>
+                    <a:srgbClr val="4D4D4D">
+                      <a:alpha val="100000"/>
+                    </a:srgbClr>
+                  </a:solidFill>
+                  <a:latin typeface="Helvetica"/>
+                  <a:cs typeface="Helvetica"/>
+                </a:rPr>
+                <a:t>3</a:t>
+              </a:r>
+            </a:p>
+          </p:txBody>
+        </p:sp>
+        <p:sp>
+          <p:nvSpPr>
+            <p:cNvPr id="82" name="tx82"/>
+            <p:cNvSpPr/>
+            <p:nvPr/>
+          </p:nvSpPr>
+          <p:spPr>
+            <a:xfrm>
+              <a:off x="762297" y="4356300"/>
+              <a:ext cx="62179" cy="80101"/>
+            </a:xfrm>
+            <a:prstGeom prst="rect">
+              <a:avLst/>
+            </a:prstGeom>
+            <a:noFill/>
+          </p:spPr>
+          <p:txBody>
+            <a:bodyPr lIns="0" rIns="0" tIns="0" bIns="0" anchorCtr="1" anchor="ctr" wrap="none"/>
+            <a:lstStyle/>
+            <a:p>
+              <a:pPr algn="l" marL="0" marR="0" indent="0">
+                <a:lnSpc>
+                  <a:spcPts val="880"/>
+                </a:lnSpc>
+                <a:spcBef>
+                  <a:spcPts val="0"/>
+                </a:spcBef>
+                <a:spcAft>
+                  <a:spcPts val="0"/>
+                </a:spcAft>
+              </a:pPr>
+              <a:r>
+                <a:rPr sz="880">
+                  <a:solidFill>
+                    <a:srgbClr val="4D4D4D">
+                      <a:alpha val="100000"/>
+                    </a:srgbClr>
+                  </a:solidFill>
+                  <a:latin typeface="Helvetica"/>
+                  <a:cs typeface="Helvetica"/>
+                </a:rPr>
+                <a:t>4</a:t>
+              </a:r>
+            </a:p>
+          </p:txBody>
+        </p:sp>
+        <p:sp>
+          <p:nvSpPr>
+            <p:cNvPr id="83" name="tx83"/>
+            <p:cNvSpPr/>
+            <p:nvPr/>
+          </p:nvSpPr>
+          <p:spPr>
+            <a:xfrm>
+              <a:off x="1164222" y="5716183"/>
+              <a:ext cx="161574" cy="80101"/>
+            </a:xfrm>
+            <a:prstGeom prst="rect">
+              <a:avLst/>
+            </a:prstGeom>
+            <a:noFill/>
+          </p:spPr>
+          <p:txBody>
+            <a:bodyPr lIns="0" rIns="0" tIns="0" bIns="0" anchorCtr="1" anchor="ctr" wrap="none"/>
+            <a:lstStyle/>
+            <a:p>
+              <a:pPr algn="l" marL="0" marR="0" indent="0">
+                <a:lnSpc>
+                  <a:spcPts val="880"/>
+                </a:lnSpc>
+                <a:spcBef>
+                  <a:spcPts val="0"/>
+                </a:spcBef>
+                <a:spcAft>
+                  <a:spcPts val="0"/>
+                </a:spcAft>
+              </a:pPr>
+              <a:r>
+                <a:rPr sz="880">
+                  <a:solidFill>
+                    <a:srgbClr val="4D4D4D">
+                      <a:alpha val="100000"/>
+                    </a:srgbClr>
+                  </a:solidFill>
+                  <a:latin typeface="Helvetica"/>
+                  <a:cs typeface="Helvetica"/>
+                </a:rPr>
+                <a:t>-50</a:t>
+              </a:r>
+            </a:p>
+          </p:txBody>
+        </p:sp>
+        <p:sp>
+          <p:nvSpPr>
+            <p:cNvPr id="84" name="tx84"/>
+            <p:cNvSpPr/>
+            <p:nvPr/>
+          </p:nvSpPr>
+          <p:spPr>
+            <a:xfrm>
+              <a:off x="2024485" y="5716183"/>
+              <a:ext cx="161574" cy="80101"/>
+            </a:xfrm>
+            <a:prstGeom prst="rect">
+              <a:avLst/>
+            </a:prstGeom>
+            <a:noFill/>
+          </p:spPr>
+          <p:txBody>
+            <a:bodyPr lIns="0" rIns="0" tIns="0" bIns="0" anchorCtr="1" anchor="ctr" wrap="none"/>
+            <a:lstStyle/>
+            <a:p>
+              <a:pPr algn="l" marL="0" marR="0" indent="0">
+                <a:lnSpc>
+                  <a:spcPts val="880"/>
+                </a:lnSpc>
+                <a:spcBef>
+                  <a:spcPts val="0"/>
+                </a:spcBef>
+                <a:spcAft>
+                  <a:spcPts val="0"/>
+                </a:spcAft>
+              </a:pPr>
+              <a:r>
+                <a:rPr sz="880">
+                  <a:solidFill>
+                    <a:srgbClr val="4D4D4D">
+                      <a:alpha val="100000"/>
+                    </a:srgbClr>
+                  </a:solidFill>
+                  <a:latin typeface="Helvetica"/>
+                  <a:cs typeface="Helvetica"/>
+                </a:rPr>
+                <a:t>-40</a:t>
+              </a:r>
+            </a:p>
+          </p:txBody>
+        </p:sp>
+        <p:sp>
+          <p:nvSpPr>
+            <p:cNvPr id="85" name="tx85"/>
+            <p:cNvSpPr/>
+            <p:nvPr/>
+          </p:nvSpPr>
+          <p:spPr>
+            <a:xfrm>
+              <a:off x="2884749" y="5716183"/>
+              <a:ext cx="161574" cy="80101"/>
+            </a:xfrm>
+            <a:prstGeom prst="rect">
+              <a:avLst/>
+            </a:prstGeom>
+            <a:noFill/>
+          </p:spPr>
+          <p:txBody>
+            <a:bodyPr lIns="0" rIns="0" tIns="0" bIns="0" anchorCtr="1" anchor="ctr" wrap="none"/>
+            <a:lstStyle/>
+            <a:p>
+              <a:pPr algn="l" marL="0" marR="0" indent="0">
+                <a:lnSpc>
+                  <a:spcPts val="880"/>
+                </a:lnSpc>
+                <a:spcBef>
+                  <a:spcPts val="0"/>
+                </a:spcBef>
+                <a:spcAft>
+                  <a:spcPts val="0"/>
+                </a:spcAft>
+              </a:pPr>
+              <a:r>
+                <a:rPr sz="880">
+                  <a:solidFill>
+                    <a:srgbClr val="4D4D4D">
+                      <a:alpha val="100000"/>
+                    </a:srgbClr>
+                  </a:solidFill>
+                  <a:latin typeface="Helvetica"/>
+                  <a:cs typeface="Helvetica"/>
+                </a:rPr>
+                <a:t>-30</a:t>
+              </a:r>
+            </a:p>
+          </p:txBody>
+        </p:sp>
+        <p:sp>
+          <p:nvSpPr>
+            <p:cNvPr id="86" name="tx86"/>
+            <p:cNvSpPr/>
+            <p:nvPr/>
+          </p:nvSpPr>
+          <p:spPr>
+            <a:xfrm>
+              <a:off x="3745012" y="5716183"/>
+              <a:ext cx="161574" cy="80101"/>
+            </a:xfrm>
+            <a:prstGeom prst="rect">
+              <a:avLst/>
+            </a:prstGeom>
+            <a:noFill/>
+          </p:spPr>
+          <p:txBody>
+            <a:bodyPr lIns="0" rIns="0" tIns="0" bIns="0" anchorCtr="1" anchor="ctr" wrap="none"/>
+            <a:lstStyle/>
+            <a:p>
+              <a:pPr algn="l" marL="0" marR="0" indent="0">
+                <a:lnSpc>
+                  <a:spcPts val="880"/>
+                </a:lnSpc>
+                <a:spcBef>
+                  <a:spcPts val="0"/>
+                </a:spcBef>
+                <a:spcAft>
+                  <a:spcPts val="0"/>
+                </a:spcAft>
+              </a:pPr>
+              <a:r>
+                <a:rPr sz="880">
+                  <a:solidFill>
+                    <a:srgbClr val="4D4D4D">
+                      <a:alpha val="100000"/>
+                    </a:srgbClr>
+                  </a:solidFill>
+                  <a:latin typeface="Helvetica"/>
+                  <a:cs typeface="Helvetica"/>
+                </a:rPr>
+                <a:t>-20</a:t>
+              </a:r>
+            </a:p>
+          </p:txBody>
+        </p:sp>
+        <p:sp>
+          <p:nvSpPr>
+            <p:cNvPr id="87" name="tx87"/>
+            <p:cNvSpPr/>
+            <p:nvPr/>
+          </p:nvSpPr>
+          <p:spPr>
+            <a:xfrm>
+              <a:off x="4605275" y="5716183"/>
+              <a:ext cx="161574" cy="80101"/>
+            </a:xfrm>
+            <a:prstGeom prst="rect">
+              <a:avLst/>
+            </a:prstGeom>
+            <a:noFill/>
+          </p:spPr>
+          <p:txBody>
+            <a:bodyPr lIns="0" rIns="0" tIns="0" bIns="0" anchorCtr="1" anchor="ctr" wrap="none"/>
+            <a:lstStyle/>
+            <a:p>
+              <a:pPr algn="l" marL="0" marR="0" indent="0">
+                <a:lnSpc>
+                  <a:spcPts val="880"/>
+                </a:lnSpc>
+                <a:spcBef>
+                  <a:spcPts val="0"/>
+                </a:spcBef>
+                <a:spcAft>
+                  <a:spcPts val="0"/>
+                </a:spcAft>
+              </a:pPr>
+              <a:r>
+                <a:rPr sz="880">
+                  <a:solidFill>
+                    <a:srgbClr val="4D4D4D">
+                      <a:alpha val="100000"/>
+                    </a:srgbClr>
+                  </a:solidFill>
+                  <a:latin typeface="Helvetica"/>
+                  <a:cs typeface="Helvetica"/>
+                </a:rPr>
+                <a:t>-10</a:t>
+              </a:r>
+            </a:p>
+          </p:txBody>
+        </p:sp>
+        <p:sp>
+          <p:nvSpPr>
+            <p:cNvPr id="88" name="tx88"/>
+            <p:cNvSpPr/>
+            <p:nvPr/>
+          </p:nvSpPr>
+          <p:spPr>
+            <a:xfrm>
+              <a:off x="5515235" y="5716183"/>
+              <a:ext cx="62179" cy="80101"/>
+            </a:xfrm>
+            <a:prstGeom prst="rect">
+              <a:avLst/>
+            </a:prstGeom>
+            <a:noFill/>
+          </p:spPr>
+          <p:txBody>
+            <a:bodyPr lIns="0" rIns="0" tIns="0" bIns="0" anchorCtr="1" anchor="ctr" wrap="none"/>
+            <a:lstStyle/>
+            <a:p>
+              <a:pPr algn="l" marL="0" marR="0" indent="0">
+                <a:lnSpc>
+                  <a:spcPts val="880"/>
+                </a:lnSpc>
+                <a:spcBef>
+                  <a:spcPts val="0"/>
+                </a:spcBef>
+                <a:spcAft>
+                  <a:spcPts val="0"/>
+                </a:spcAft>
+              </a:pPr>
+              <a:r>
+                <a:rPr sz="880">
+                  <a:solidFill>
+                    <a:srgbClr val="4D4D4D">
+                      <a:alpha val="100000"/>
+                    </a:srgbClr>
+                  </a:solidFill>
+                  <a:latin typeface="Helvetica"/>
+                  <a:cs typeface="Helvetica"/>
+                </a:rPr>
+                <a:t>0</a:t>
+              </a:r>
+            </a:p>
+          </p:txBody>
+        </p:sp>
+        <p:sp>
+          <p:nvSpPr>
+            <p:cNvPr id="89" name="tx89"/>
+            <p:cNvSpPr/>
+            <p:nvPr/>
+          </p:nvSpPr>
+          <p:spPr>
+            <a:xfrm>
+              <a:off x="6344409" y="5716183"/>
+              <a:ext cx="124358" cy="80101"/>
+            </a:xfrm>
+            <a:prstGeom prst="rect">
+              <a:avLst/>
+            </a:prstGeom>
+            <a:noFill/>
+          </p:spPr>
+          <p:txBody>
+            <a:bodyPr lIns="0" rIns="0" tIns="0" bIns="0" anchorCtr="1" anchor="ctr" wrap="none"/>
+            <a:lstStyle/>
+            <a:p>
+              <a:pPr algn="l" marL="0" marR="0" indent="0">
+                <a:lnSpc>
+                  <a:spcPts val="880"/>
+                </a:lnSpc>
+                <a:spcBef>
+                  <a:spcPts val="0"/>
+                </a:spcBef>
+                <a:spcAft>
+                  <a:spcPts val="0"/>
+                </a:spcAft>
+              </a:pPr>
+              <a:r>
+                <a:rPr sz="880">
+                  <a:solidFill>
+                    <a:srgbClr val="4D4D4D">
+                      <a:alpha val="100000"/>
+                    </a:srgbClr>
+                  </a:solidFill>
+                  <a:latin typeface="Helvetica"/>
+                  <a:cs typeface="Helvetica"/>
+                </a:rPr>
+                <a:t>10</a:t>
+              </a:r>
+            </a:p>
+          </p:txBody>
+        </p:sp>
+        <p:sp>
+          <p:nvSpPr>
+            <p:cNvPr id="90" name="tx90"/>
+            <p:cNvSpPr/>
+            <p:nvPr/>
+          </p:nvSpPr>
+          <p:spPr>
+            <a:xfrm>
+              <a:off x="7204672" y="5716183"/>
+              <a:ext cx="124358" cy="80101"/>
+            </a:xfrm>
+            <a:prstGeom prst="rect">
+              <a:avLst/>
+            </a:prstGeom>
+            <a:noFill/>
+          </p:spPr>
+          <p:txBody>
+            <a:bodyPr lIns="0" rIns="0" tIns="0" bIns="0" anchorCtr="1" anchor="ctr" wrap="none"/>
+            <a:lstStyle/>
+            <a:p>
+              <a:pPr algn="l" marL="0" marR="0" indent="0">
+                <a:lnSpc>
+                  <a:spcPts val="880"/>
+                </a:lnSpc>
+                <a:spcBef>
+                  <a:spcPts val="0"/>
+                </a:spcBef>
+                <a:spcAft>
+                  <a:spcPts val="0"/>
+                </a:spcAft>
+              </a:pPr>
+              <a:r>
+                <a:rPr sz="880">
+                  <a:solidFill>
+                    <a:srgbClr val="4D4D4D">
+                      <a:alpha val="100000"/>
+                    </a:srgbClr>
+                  </a:solidFill>
+                  <a:latin typeface="Helvetica"/>
+                  <a:cs typeface="Helvetica"/>
+                </a:rPr>
+                <a:t>20</a:t>
+              </a:r>
+            </a:p>
+          </p:txBody>
+        </p:sp>
+        <p:sp>
+          <p:nvSpPr>
+            <p:cNvPr id="91" name="tx91"/>
+            <p:cNvSpPr/>
+            <p:nvPr/>
+          </p:nvSpPr>
+          <p:spPr>
+            <a:xfrm>
+              <a:off x="8064935" y="5716183"/>
+              <a:ext cx="124358" cy="80101"/>
+            </a:xfrm>
+            <a:prstGeom prst="rect">
+              <a:avLst/>
+            </a:prstGeom>
+            <a:noFill/>
+          </p:spPr>
+          <p:txBody>
+            <a:bodyPr lIns="0" rIns="0" tIns="0" bIns="0" anchorCtr="1" anchor="ctr" wrap="none"/>
+            <a:lstStyle/>
+            <a:p>
+              <a:pPr algn="l" marL="0" marR="0" indent="0">
+                <a:lnSpc>
+                  <a:spcPts val="880"/>
+                </a:lnSpc>
+                <a:spcBef>
+                  <a:spcPts val="0"/>
+                </a:spcBef>
+                <a:spcAft>
+                  <a:spcPts val="0"/>
+                </a:spcAft>
+              </a:pPr>
+              <a:r>
+                <a:rPr sz="880">
+                  <a:solidFill>
+                    <a:srgbClr val="4D4D4D">
+                      <a:alpha val="100000"/>
+                    </a:srgbClr>
+                  </a:solidFill>
+                  <a:latin typeface="Helvetica"/>
+                  <a:cs typeface="Helvetica"/>
+                </a:rPr>
+                <a:t>30</a:t>
+              </a:r>
+            </a:p>
+          </p:txBody>
+        </p:sp>
+        <p:sp>
+          <p:nvSpPr>
+            <p:cNvPr id="92" name="tx92"/>
+            <p:cNvSpPr/>
+            <p:nvPr/>
+          </p:nvSpPr>
+          <p:spPr>
+            <a:xfrm>
+              <a:off x="1561815" y="5855859"/>
+              <a:ext cx="6311097" cy="100218"/>
+            </a:xfrm>
+            <a:prstGeom prst="rect">
+              <a:avLst/>
+            </a:prstGeom>
+            <a:noFill/>
+          </p:spPr>
+          <p:txBody>
+            <a:bodyPr lIns="0" rIns="0" tIns="0" bIns="0" anchorCtr="1" anchor="ctr" wrap="none"/>
+            <a:lstStyle/>
+            <a:p>
+              <a:pPr algn="l" marL="0" marR="0" indent="0">
+                <a:lnSpc>
+                  <a:spcPts val="1100"/>
+                </a:lnSpc>
+                <a:spcBef>
+                  <a:spcPts val="0"/>
+                </a:spcBef>
+                <a:spcAft>
+                  <a:spcPts val="0"/>
+                </a:spcAft>
+              </a:pPr>
+              <a:r>
+                <a:rPr sz="1100">
+                  <a:solidFill>
+                    <a:srgbClr val="000000">
+                      <a:alpha val="100000"/>
+                    </a:srgbClr>
+                  </a:solidFill>
+                  <a:latin typeface="Helvetica"/>
+                  <a:cs typeface="Helvetica"/>
+                </a:rPr>
+                <a:t>Sensitivity eGFR Difference (%): 100 × (CKD-EPI 2012 CysC − CKD-EPI 2021 Cr) / CKD-EPI 2021 Cr</a:t>
+              </a:r>
+            </a:p>
+          </p:txBody>
+        </p:sp>
+        <p:sp>
+          <p:nvSpPr>
+            <p:cNvPr id="93" name="tx93"/>
+            <p:cNvSpPr/>
+            <p:nvPr/>
+          </p:nvSpPr>
+          <p:spPr>
+            <a:xfrm rot="-5400000">
+              <a:off x="138035" y="4944909"/>
+              <a:ext cx="1016904" cy="100218"/>
+            </a:xfrm>
+            <a:prstGeom prst="rect">
+              <a:avLst/>
+            </a:prstGeom>
+            <a:noFill/>
+          </p:spPr>
+          <p:txBody>
+            <a:bodyPr lIns="0" rIns="0" tIns="0" bIns="0" anchorCtr="1" anchor="ctr" wrap="none"/>
+            <a:lstStyle/>
+            <a:p>
+              <a:pPr algn="l" marL="0" marR="0" indent="0">
+                <a:lnSpc>
+                  <a:spcPts val="1100"/>
+                </a:lnSpc>
+                <a:spcBef>
+                  <a:spcPts val="0"/>
+                </a:spcBef>
+                <a:spcAft>
+                  <a:spcPts val="0"/>
+                </a:spcAft>
+              </a:pPr>
+              <a:r>
+                <a:rPr sz="1100">
+                  <a:solidFill>
+                    <a:srgbClr val="000000">
+                      <a:alpha val="100000"/>
+                    </a:srgbClr>
+                  </a:solidFill>
+                  <a:latin typeface="Helvetica"/>
+                  <a:cs typeface="Helvetica"/>
+                </a:rPr>
+                <a:t>subHR (95% CI)</a:t>
+              </a:r>
+            </a:p>
+          </p:txBody>
+        </p:sp>
+        <p:sp>
+          <p:nvSpPr>
+            <p:cNvPr id="94" name="tx94"/>
+            <p:cNvSpPr/>
+            <p:nvPr/>
+          </p:nvSpPr>
+          <p:spPr>
+            <a:xfrm>
+              <a:off x="887106" y="4159544"/>
+              <a:ext cx="6959864" cy="82021"/>
+            </a:xfrm>
+            <a:prstGeom prst="rect">
+              <a:avLst/>
+            </a:prstGeom>
+            <a:noFill/>
+          </p:spPr>
+          <p:txBody>
+            <a:bodyPr lIns="0" rIns="0" tIns="0" bIns="0" anchorCtr="1" anchor="ctr" wrap="none"/>
+            <a:lstStyle/>
+            <a:p>
+              <a:pPr algn="l" marL="0" marR="0" indent="0">
+                <a:lnSpc>
+                  <a:spcPts val="900"/>
+                </a:lnSpc>
+                <a:spcBef>
+                  <a:spcPts val="0"/>
+                </a:spcBef>
+                <a:spcAft>
+                  <a:spcPts val="0"/>
+                </a:spcAft>
+              </a:pPr>
+              <a:r>
+                <a:rPr sz="900">
+                  <a:solidFill>
+                    <a:srgbClr val="404040">
+                      <a:alpha val="100000"/>
+                    </a:srgbClr>
+                  </a:solidFill>
+                  <a:latin typeface="Helvetica"/>
+                  <a:cs typeface="Helvetica"/>
+                </a:rPr>
+                <a:t>subHR per 10 % decline: 1.08 (1.01-1.17), p_Bonf = 0.187 (n = 6)  |  per IQR decline (Δ = 27.5 %): 1.25 (1.02-1.53)  |  IQR: [-29.1, -1.6] %</a:t>
+              </a:r>
+            </a:p>
+          </p:txBody>
+        </p:sp>
+        <p:sp>
+          <p:nvSpPr>
+            <p:cNvPr id="95" name="tx95"/>
+            <p:cNvSpPr/>
+            <p:nvPr/>
+          </p:nvSpPr>
+          <p:spPr>
+            <a:xfrm>
+              <a:off x="887106" y="3932770"/>
               <a:ext cx="2578882" cy="120152"/>
             </a:xfrm>
             <a:prstGeom prst="rect">
